--- a/imagenes.pptx
+++ b/imagenes.pptx
@@ -6,6 +6,8 @@
   </p:sldMasterIdLst>
   <p:sldIdLst>
     <p:sldId id="256" r:id="rId2"/>
+    <p:sldId id="258" r:id="rId3"/>
+    <p:sldId id="257" r:id="rId4"/>
   </p:sldIdLst>
   <p:sldSz cx="12192000" cy="6858000"/>
   <p:notesSz cx="6858000" cy="9144000"/>
@@ -104,7 +106,633 @@
       </a:defRPr>
     </a:lvl9pPr>
   </p:defaultTextStyle>
+  <p:extLst>
+    <p:ext uri="{EFAFB233-063F-42B5-8137-9DF3F51BA10A}">
+      <p15:sldGuideLst xmlns:p15="http://schemas.microsoft.com/office/powerpoint/2012/main"/>
+    </p:ext>
+  </p:extLst>
 </p:presentation>
+</file>
+
+<file path=ppt/revisionInfo.xml><?xml version="1.0" encoding="utf-8"?>
+<p1510:revInfo xmlns:a="http://schemas.openxmlformats.org/drawingml/2006/main" xmlns:r="http://schemas.openxmlformats.org/officeDocument/2006/relationships" xmlns:p1510="http://schemas.microsoft.com/office/powerpoint/2015/10/main">
+  <p1510:revLst>
+    <p1510:client id="{9ECD0A3B-397C-4136-9E60-33C835FA5857}" v="4" dt="2026-06-12T03:44:11.214"/>
+  </p1510:revLst>
+</p1510:revInfo>
+</file>
+
+<file path=ppt/changesInfos/changesInfo1.xml><?xml version="1.0" encoding="utf-8"?>
+<pc:chgInfo xmlns:a="http://schemas.openxmlformats.org/drawingml/2006/main" xmlns:r="http://schemas.openxmlformats.org/officeDocument/2006/relationships" xmlns:ac="http://schemas.microsoft.com/office/drawing/2013/main/command" xmlns:pc="http://schemas.microsoft.com/office/powerpoint/2013/main/command">
+  <pc:docChgLst>
+    <pc:chgData name="Andrés Alfonso Rincón Guerrero" userId="c32465ef0afcf160" providerId="LiveId" clId="{AD91EE57-DF4A-4E81-8CC1-4467C21CA582}"/>
+    <pc:docChg chg="undo custSel addSld modSld modMainMaster">
+      <pc:chgData name="Andrés Alfonso Rincón Guerrero" userId="c32465ef0afcf160" providerId="LiveId" clId="{AD91EE57-DF4A-4E81-8CC1-4467C21CA582}" dt="2026-06-12T03:44:11.214" v="80"/>
+      <pc:docMkLst>
+        <pc:docMk/>
+      </pc:docMkLst>
+      <pc:sldChg chg="modSp">
+        <pc:chgData name="Andrés Alfonso Rincón Guerrero" userId="c32465ef0afcf160" providerId="LiveId" clId="{AD91EE57-DF4A-4E81-8CC1-4467C21CA582}" dt="2026-06-12T03:44:11.214" v="80"/>
+        <pc:sldMkLst>
+          <pc:docMk/>
+          <pc:sldMk cId="3027999517" sldId="256"/>
+        </pc:sldMkLst>
+        <pc:spChg chg="mod">
+          <ac:chgData name="Andrés Alfonso Rincón Guerrero" userId="c32465ef0afcf160" providerId="LiveId" clId="{AD91EE57-DF4A-4E81-8CC1-4467C21CA582}" dt="2026-06-12T03:44:11.214" v="80"/>
+          <ac:spMkLst>
+            <pc:docMk/>
+            <pc:sldMk cId="3027999517" sldId="256"/>
+            <ac:spMk id="165" creationId="{DD6DB10A-DFB5-6FC9-4807-D40FFE8DF5DE}"/>
+          </ac:spMkLst>
+        </pc:spChg>
+        <pc:spChg chg="mod">
+          <ac:chgData name="Andrés Alfonso Rincón Guerrero" userId="c32465ef0afcf160" providerId="LiveId" clId="{AD91EE57-DF4A-4E81-8CC1-4467C21CA582}" dt="2026-06-12T03:44:11.214" v="80"/>
+          <ac:spMkLst>
+            <pc:docMk/>
+            <pc:sldMk cId="3027999517" sldId="256"/>
+            <ac:spMk id="169" creationId="{BB87746E-5135-87AC-5A29-5F450B869A01}"/>
+          </ac:spMkLst>
+        </pc:spChg>
+        <pc:spChg chg="mod">
+          <ac:chgData name="Andrés Alfonso Rincón Guerrero" userId="c32465ef0afcf160" providerId="LiveId" clId="{AD91EE57-DF4A-4E81-8CC1-4467C21CA582}" dt="2026-06-12T03:44:11.214" v="80"/>
+          <ac:spMkLst>
+            <pc:docMk/>
+            <pc:sldMk cId="3027999517" sldId="256"/>
+            <ac:spMk id="170" creationId="{DA674A41-FEDA-4343-D242-1CA2EF0E99DA}"/>
+          </ac:spMkLst>
+        </pc:spChg>
+        <pc:spChg chg="mod">
+          <ac:chgData name="Andrés Alfonso Rincón Guerrero" userId="c32465ef0afcf160" providerId="LiveId" clId="{AD91EE57-DF4A-4E81-8CC1-4467C21CA582}" dt="2026-06-12T03:44:11.214" v="80"/>
+          <ac:spMkLst>
+            <pc:docMk/>
+            <pc:sldMk cId="3027999517" sldId="256"/>
+            <ac:spMk id="181" creationId="{C3F0061E-9D14-6101-FA47-A00BEDDA7267}"/>
+          </ac:spMkLst>
+        </pc:spChg>
+        <pc:spChg chg="mod">
+          <ac:chgData name="Andrés Alfonso Rincón Guerrero" userId="c32465ef0afcf160" providerId="LiveId" clId="{AD91EE57-DF4A-4E81-8CC1-4467C21CA582}" dt="2026-06-12T03:44:11.214" v="80"/>
+          <ac:spMkLst>
+            <pc:docMk/>
+            <pc:sldMk cId="3027999517" sldId="256"/>
+            <ac:spMk id="191" creationId="{FC19FFC1-CA58-56BD-B62A-E4687C05D84C}"/>
+          </ac:spMkLst>
+        </pc:spChg>
+        <pc:spChg chg="mod">
+          <ac:chgData name="Andrés Alfonso Rincón Guerrero" userId="c32465ef0afcf160" providerId="LiveId" clId="{AD91EE57-DF4A-4E81-8CC1-4467C21CA582}" dt="2026-06-12T03:44:11.214" v="80"/>
+          <ac:spMkLst>
+            <pc:docMk/>
+            <pc:sldMk cId="3027999517" sldId="256"/>
+            <ac:spMk id="194" creationId="{609777CA-111C-03A4-1183-EB87DE2C387F}"/>
+          </ac:spMkLst>
+        </pc:spChg>
+        <pc:spChg chg="mod">
+          <ac:chgData name="Andrés Alfonso Rincón Guerrero" userId="c32465ef0afcf160" providerId="LiveId" clId="{AD91EE57-DF4A-4E81-8CC1-4467C21CA582}" dt="2026-06-12T03:44:11.214" v="80"/>
+          <ac:spMkLst>
+            <pc:docMk/>
+            <pc:sldMk cId="3027999517" sldId="256"/>
+            <ac:spMk id="229" creationId="{A8004D16-FE8E-FCAA-C1C8-5573C6A0E4FA}"/>
+          </ac:spMkLst>
+        </pc:spChg>
+        <pc:spChg chg="mod">
+          <ac:chgData name="Andrés Alfonso Rincón Guerrero" userId="c32465ef0afcf160" providerId="LiveId" clId="{AD91EE57-DF4A-4E81-8CC1-4467C21CA582}" dt="2026-06-12T03:44:11.214" v="80"/>
+          <ac:spMkLst>
+            <pc:docMk/>
+            <pc:sldMk cId="3027999517" sldId="256"/>
+            <ac:spMk id="248" creationId="{1B2FD218-DAB6-33E8-86A7-876FA9C2A71D}"/>
+          </ac:spMkLst>
+        </pc:spChg>
+        <pc:spChg chg="mod">
+          <ac:chgData name="Andrés Alfonso Rincón Guerrero" userId="c32465ef0afcf160" providerId="LiveId" clId="{AD91EE57-DF4A-4E81-8CC1-4467C21CA582}" dt="2026-06-12T03:44:11.214" v="80"/>
+          <ac:spMkLst>
+            <pc:docMk/>
+            <pc:sldMk cId="3027999517" sldId="256"/>
+            <ac:spMk id="249" creationId="{BF6C67BB-473C-809B-D469-AD01C1B5102B}"/>
+          </ac:spMkLst>
+        </pc:spChg>
+        <pc:spChg chg="mod">
+          <ac:chgData name="Andrés Alfonso Rincón Guerrero" userId="c32465ef0afcf160" providerId="LiveId" clId="{AD91EE57-DF4A-4E81-8CC1-4467C21CA582}" dt="2026-06-12T03:44:11.214" v="80"/>
+          <ac:spMkLst>
+            <pc:docMk/>
+            <pc:sldMk cId="3027999517" sldId="256"/>
+            <ac:spMk id="253" creationId="{C29E463C-B01C-EE4A-2825-301F1D1BB2AD}"/>
+          </ac:spMkLst>
+        </pc:spChg>
+      </pc:sldChg>
+      <pc:sldChg chg="addSp delSp modSp new mod">
+        <pc:chgData name="Andrés Alfonso Rincón Guerrero" userId="c32465ef0afcf160" providerId="LiveId" clId="{AD91EE57-DF4A-4E81-8CC1-4467C21CA582}" dt="2026-06-12T03:44:11.214" v="80"/>
+        <pc:sldMkLst>
+          <pc:docMk/>
+          <pc:sldMk cId="1853868027" sldId="257"/>
+        </pc:sldMkLst>
+        <pc:spChg chg="del">
+          <ac:chgData name="Andrés Alfonso Rincón Guerrero" userId="c32465ef0afcf160" providerId="LiveId" clId="{AD91EE57-DF4A-4E81-8CC1-4467C21CA582}" dt="2026-06-12T02:51:45.608" v="1" actId="478"/>
+          <ac:spMkLst>
+            <pc:docMk/>
+            <pc:sldMk cId="1853868027" sldId="257"/>
+            <ac:spMk id="2" creationId="{D9D442A3-F54A-9384-753C-9861E9768CB3}"/>
+          </ac:spMkLst>
+        </pc:spChg>
+        <pc:spChg chg="del">
+          <ac:chgData name="Andrés Alfonso Rincón Guerrero" userId="c32465ef0afcf160" providerId="LiveId" clId="{AD91EE57-DF4A-4E81-8CC1-4467C21CA582}" dt="2026-06-12T02:51:45.608" v="1" actId="478"/>
+          <ac:spMkLst>
+            <pc:docMk/>
+            <pc:sldMk cId="1853868027" sldId="257"/>
+            <ac:spMk id="3" creationId="{7CED8060-8864-C4CF-4C11-18DBB0CA3DF6}"/>
+          </ac:spMkLst>
+        </pc:spChg>
+        <pc:spChg chg="add del">
+          <ac:chgData name="Andrés Alfonso Rincón Guerrero" userId="c32465ef0afcf160" providerId="LiveId" clId="{AD91EE57-DF4A-4E81-8CC1-4467C21CA582}" dt="2026-06-12T02:51:47.921" v="3" actId="22"/>
+          <ac:spMkLst>
+            <pc:docMk/>
+            <pc:sldMk cId="1853868027" sldId="257"/>
+            <ac:spMk id="5" creationId="{A85F05B8-1014-CD74-B23F-2B50B11392A6}"/>
+          </ac:spMkLst>
+        </pc:spChg>
+        <pc:picChg chg="add mod">
+          <ac:chgData name="Andrés Alfonso Rincón Guerrero" userId="c32465ef0afcf160" providerId="LiveId" clId="{AD91EE57-DF4A-4E81-8CC1-4467C21CA582}" dt="2026-06-12T03:44:11.214" v="80"/>
+          <ac:picMkLst>
+            <pc:docMk/>
+            <pc:sldMk cId="1853868027" sldId="257"/>
+            <ac:picMk id="7" creationId="{DA5C12B6-13AC-1647-A144-1F13B547C095}"/>
+          </ac:picMkLst>
+        </pc:picChg>
+      </pc:sldChg>
+      <pc:sldChg chg="delSp modSp add mod">
+        <pc:chgData name="Andrés Alfonso Rincón Guerrero" userId="c32465ef0afcf160" providerId="LiveId" clId="{AD91EE57-DF4A-4E81-8CC1-4467C21CA582}" dt="2026-06-12T03:44:11.214" v="80"/>
+        <pc:sldMkLst>
+          <pc:docMk/>
+          <pc:sldMk cId="4102175269" sldId="258"/>
+        </pc:sldMkLst>
+        <pc:spChg chg="mod">
+          <ac:chgData name="Andrés Alfonso Rincón Guerrero" userId="c32465ef0afcf160" providerId="LiveId" clId="{AD91EE57-DF4A-4E81-8CC1-4467C21CA582}" dt="2026-06-12T03:42:39.895" v="76" actId="14100"/>
+          <ac:spMkLst>
+            <pc:docMk/>
+            <pc:sldMk cId="4102175269" sldId="258"/>
+            <ac:spMk id="128" creationId="{203B44FC-9827-B84B-AAE3-4105C594792A}"/>
+          </ac:spMkLst>
+        </pc:spChg>
+        <pc:spChg chg="mod">
+          <ac:chgData name="Andrés Alfonso Rincón Guerrero" userId="c32465ef0afcf160" providerId="LiveId" clId="{AD91EE57-DF4A-4E81-8CC1-4467C21CA582}" dt="2026-06-12T03:42:39.895" v="76" actId="14100"/>
+          <ac:spMkLst>
+            <pc:docMk/>
+            <pc:sldMk cId="4102175269" sldId="258"/>
+            <ac:spMk id="131" creationId="{94CE5616-B098-75A2-4532-2543F2070770}"/>
+          </ac:spMkLst>
+        </pc:spChg>
+        <pc:spChg chg="mod">
+          <ac:chgData name="Andrés Alfonso Rincón Guerrero" userId="c32465ef0afcf160" providerId="LiveId" clId="{AD91EE57-DF4A-4E81-8CC1-4467C21CA582}" dt="2026-06-12T03:42:39.895" v="76" actId="14100"/>
+          <ac:spMkLst>
+            <pc:docMk/>
+            <pc:sldMk cId="4102175269" sldId="258"/>
+            <ac:spMk id="132" creationId="{ED0C5A4E-A14B-82C6-6277-7EF51CBAE168}"/>
+          </ac:spMkLst>
+        </pc:spChg>
+        <pc:spChg chg="mod">
+          <ac:chgData name="Andrés Alfonso Rincón Guerrero" userId="c32465ef0afcf160" providerId="LiveId" clId="{AD91EE57-DF4A-4E81-8CC1-4467C21CA582}" dt="2026-06-12T03:42:39.895" v="76" actId="14100"/>
+          <ac:spMkLst>
+            <pc:docMk/>
+            <pc:sldMk cId="4102175269" sldId="258"/>
+            <ac:spMk id="133" creationId="{87775D43-CD5D-56FA-C400-B0A6730DEF91}"/>
+          </ac:spMkLst>
+        </pc:spChg>
+        <pc:spChg chg="mod">
+          <ac:chgData name="Andrés Alfonso Rincón Guerrero" userId="c32465ef0afcf160" providerId="LiveId" clId="{AD91EE57-DF4A-4E81-8CC1-4467C21CA582}" dt="2026-06-12T03:42:39.895" v="76" actId="14100"/>
+          <ac:spMkLst>
+            <pc:docMk/>
+            <pc:sldMk cId="4102175269" sldId="258"/>
+            <ac:spMk id="134" creationId="{BA99C9E3-A328-3E77-AAEC-3BE13873BDAC}"/>
+          </ac:spMkLst>
+        </pc:spChg>
+        <pc:spChg chg="mod">
+          <ac:chgData name="Andrés Alfonso Rincón Guerrero" userId="c32465ef0afcf160" providerId="LiveId" clId="{AD91EE57-DF4A-4E81-8CC1-4467C21CA582}" dt="2026-06-12T03:44:11.214" v="80"/>
+          <ac:spMkLst>
+            <pc:docMk/>
+            <pc:sldMk cId="4102175269" sldId="258"/>
+            <ac:spMk id="183" creationId="{6AEC1546-834E-A166-3F0C-0754C992C872}"/>
+          </ac:spMkLst>
+        </pc:spChg>
+        <pc:spChg chg="mod">
+          <ac:chgData name="Andrés Alfonso Rincón Guerrero" userId="c32465ef0afcf160" providerId="LiveId" clId="{AD91EE57-DF4A-4E81-8CC1-4467C21CA582}" dt="2026-06-12T03:44:11.214" v="80"/>
+          <ac:spMkLst>
+            <pc:docMk/>
+            <pc:sldMk cId="4102175269" sldId="258"/>
+            <ac:spMk id="193" creationId="{5973FF89-916E-5135-05F7-F4D70E4637F7}"/>
+          </ac:spMkLst>
+        </pc:spChg>
+        <pc:spChg chg="mod">
+          <ac:chgData name="Andrés Alfonso Rincón Guerrero" userId="c32465ef0afcf160" providerId="LiveId" clId="{AD91EE57-DF4A-4E81-8CC1-4467C21CA582}" dt="2026-06-12T03:44:11.214" v="80"/>
+          <ac:spMkLst>
+            <pc:docMk/>
+            <pc:sldMk cId="4102175269" sldId="258"/>
+            <ac:spMk id="227" creationId="{A66C7001-5961-902E-7C4B-8EA203F3A8EE}"/>
+          </ac:spMkLst>
+        </pc:spChg>
+        <pc:spChg chg="mod">
+          <ac:chgData name="Andrés Alfonso Rincón Guerrero" userId="c32465ef0afcf160" providerId="LiveId" clId="{AD91EE57-DF4A-4E81-8CC1-4467C21CA582}" dt="2026-06-12T03:44:11.214" v="80"/>
+          <ac:spMkLst>
+            <pc:docMk/>
+            <pc:sldMk cId="4102175269" sldId="258"/>
+            <ac:spMk id="229" creationId="{B6438751-F6EF-65D2-F105-C1589302AB57}"/>
+          </ac:spMkLst>
+        </pc:spChg>
+        <pc:spChg chg="mod">
+          <ac:chgData name="Andrés Alfonso Rincón Guerrero" userId="c32465ef0afcf160" providerId="LiveId" clId="{AD91EE57-DF4A-4E81-8CC1-4467C21CA582}" dt="2026-06-12T03:42:39.895" v="76" actId="14100"/>
+          <ac:spMkLst>
+            <pc:docMk/>
+            <pc:sldMk cId="4102175269" sldId="258"/>
+            <ac:spMk id="251" creationId="{FD1B6044-DD44-14B5-9551-E08AB4C90EC0}"/>
+          </ac:spMkLst>
+        </pc:spChg>
+        <pc:spChg chg="mod">
+          <ac:chgData name="Andrés Alfonso Rincón Guerrero" userId="c32465ef0afcf160" providerId="LiveId" clId="{AD91EE57-DF4A-4E81-8CC1-4467C21CA582}" dt="2026-06-12T03:44:11.214" v="80"/>
+          <ac:spMkLst>
+            <pc:docMk/>
+            <pc:sldMk cId="4102175269" sldId="258"/>
+            <ac:spMk id="252" creationId="{60352BAE-B626-69D6-8813-CDD232DEF536}"/>
+          </ac:spMkLst>
+        </pc:spChg>
+        <pc:spChg chg="mod">
+          <ac:chgData name="Andrés Alfonso Rincón Guerrero" userId="c32465ef0afcf160" providerId="LiveId" clId="{AD91EE57-DF4A-4E81-8CC1-4467C21CA582}" dt="2026-06-12T03:42:39.895" v="76" actId="14100"/>
+          <ac:spMkLst>
+            <pc:docMk/>
+            <pc:sldMk cId="4102175269" sldId="258"/>
+            <ac:spMk id="253" creationId="{DD59F065-7FFC-8E5E-45FE-2B6DFA77F5DB}"/>
+          </ac:spMkLst>
+        </pc:spChg>
+        <pc:spChg chg="del">
+          <ac:chgData name="Andrés Alfonso Rincón Guerrero" userId="c32465ef0afcf160" providerId="LiveId" clId="{AD91EE57-DF4A-4E81-8CC1-4467C21CA582}" dt="2026-06-12T03:42:23.530" v="6" actId="478"/>
+          <ac:spMkLst>
+            <pc:docMk/>
+            <pc:sldMk cId="4102175269" sldId="258"/>
+            <ac:spMk id="263" creationId="{46ED0CFC-4000-724F-4EBB-40317C565463}"/>
+          </ac:spMkLst>
+        </pc:spChg>
+        <pc:spChg chg="del">
+          <ac:chgData name="Andrés Alfonso Rincón Guerrero" userId="c32465ef0afcf160" providerId="LiveId" clId="{AD91EE57-DF4A-4E81-8CC1-4467C21CA582}" dt="2026-06-12T03:42:23.530" v="6" actId="478"/>
+          <ac:spMkLst>
+            <pc:docMk/>
+            <pc:sldMk cId="4102175269" sldId="258"/>
+            <ac:spMk id="264" creationId="{B3F4A92F-9921-8820-F0C4-8149D5D0AEC2}"/>
+          </ac:spMkLst>
+        </pc:spChg>
+        <pc:spChg chg="mod">
+          <ac:chgData name="Andrés Alfonso Rincón Guerrero" userId="c32465ef0afcf160" providerId="LiveId" clId="{AD91EE57-DF4A-4E81-8CC1-4467C21CA582}" dt="2026-06-12T03:44:11.214" v="80"/>
+          <ac:spMkLst>
+            <pc:docMk/>
+            <pc:sldMk cId="4102175269" sldId="258"/>
+            <ac:spMk id="281" creationId="{7CD5C606-FCF1-E47C-FE60-86A4A5A834AF}"/>
+          </ac:spMkLst>
+        </pc:spChg>
+        <pc:spChg chg="mod">
+          <ac:chgData name="Andrés Alfonso Rincón Guerrero" userId="c32465ef0afcf160" providerId="LiveId" clId="{AD91EE57-DF4A-4E81-8CC1-4467C21CA582}" dt="2026-06-12T03:44:11.214" v="80"/>
+          <ac:spMkLst>
+            <pc:docMk/>
+            <pc:sldMk cId="4102175269" sldId="258"/>
+            <ac:spMk id="283" creationId="{239C0963-F2D9-81DA-1C91-024A206AAFF6}"/>
+          </ac:spMkLst>
+        </pc:spChg>
+        <pc:spChg chg="mod">
+          <ac:chgData name="Andrés Alfonso Rincón Guerrero" userId="c32465ef0afcf160" providerId="LiveId" clId="{AD91EE57-DF4A-4E81-8CC1-4467C21CA582}" dt="2026-06-12T03:44:11.214" v="80"/>
+          <ac:spMkLst>
+            <pc:docMk/>
+            <pc:sldMk cId="4102175269" sldId="258"/>
+            <ac:spMk id="284" creationId="{65D71154-F051-5680-59B8-5F8A27143011}"/>
+          </ac:spMkLst>
+        </pc:spChg>
+        <pc:spChg chg="mod">
+          <ac:chgData name="Andrés Alfonso Rincón Guerrero" userId="c32465ef0afcf160" providerId="LiveId" clId="{AD91EE57-DF4A-4E81-8CC1-4467C21CA582}" dt="2026-06-12T03:44:11.214" v="80"/>
+          <ac:spMkLst>
+            <pc:docMk/>
+            <pc:sldMk cId="4102175269" sldId="258"/>
+            <ac:spMk id="285" creationId="{35FE7F01-C420-2EE5-007E-E1B7B60136AF}"/>
+          </ac:spMkLst>
+        </pc:spChg>
+        <pc:spChg chg="mod">
+          <ac:chgData name="Andrés Alfonso Rincón Guerrero" userId="c32465ef0afcf160" providerId="LiveId" clId="{AD91EE57-DF4A-4E81-8CC1-4467C21CA582}" dt="2026-06-12T03:44:11.214" v="80"/>
+          <ac:spMkLst>
+            <pc:docMk/>
+            <pc:sldMk cId="4102175269" sldId="258"/>
+            <ac:spMk id="289" creationId="{DEE246CB-B50D-CF47-5F7E-29A1BC3611BF}"/>
+          </ac:spMkLst>
+        </pc:spChg>
+        <pc:spChg chg="mod">
+          <ac:chgData name="Andrés Alfonso Rincón Guerrero" userId="c32465ef0afcf160" providerId="LiveId" clId="{AD91EE57-DF4A-4E81-8CC1-4467C21CA582}" dt="2026-06-12T03:42:39.895" v="76" actId="14100"/>
+          <ac:spMkLst>
+            <pc:docMk/>
+            <pc:sldMk cId="4102175269" sldId="258"/>
+            <ac:spMk id="294" creationId="{9347F12F-F109-5D85-4CDD-6065BA79680A}"/>
+          </ac:spMkLst>
+        </pc:spChg>
+        <pc:spChg chg="mod">
+          <ac:chgData name="Andrés Alfonso Rincón Guerrero" userId="c32465ef0afcf160" providerId="LiveId" clId="{AD91EE57-DF4A-4E81-8CC1-4467C21CA582}" dt="2026-06-12T03:42:39.895" v="76" actId="14100"/>
+          <ac:spMkLst>
+            <pc:docMk/>
+            <pc:sldMk cId="4102175269" sldId="258"/>
+            <ac:spMk id="295" creationId="{F4A7B192-4629-9840-F817-630FDE283214}"/>
+          </ac:spMkLst>
+        </pc:spChg>
+        <pc:spChg chg="del">
+          <ac:chgData name="Andrés Alfonso Rincón Guerrero" userId="c32465ef0afcf160" providerId="LiveId" clId="{AD91EE57-DF4A-4E81-8CC1-4467C21CA582}" dt="2026-06-12T03:42:23.530" v="6" actId="478"/>
+          <ac:spMkLst>
+            <pc:docMk/>
+            <pc:sldMk cId="4102175269" sldId="258"/>
+            <ac:spMk id="296" creationId="{EC95B1A6-DE0A-EC71-F9D3-C0985BCD29B2}"/>
+          </ac:spMkLst>
+        </pc:spChg>
+        <pc:spChg chg="del">
+          <ac:chgData name="Andrés Alfonso Rincón Guerrero" userId="c32465ef0afcf160" providerId="LiveId" clId="{AD91EE57-DF4A-4E81-8CC1-4467C21CA582}" dt="2026-06-12T03:42:23.530" v="6" actId="478"/>
+          <ac:spMkLst>
+            <pc:docMk/>
+            <pc:sldMk cId="4102175269" sldId="258"/>
+            <ac:spMk id="297" creationId="{AECF91B1-41A2-346D-478C-0922DAD204E4}"/>
+          </ac:spMkLst>
+        </pc:spChg>
+        <pc:graphicFrameChg chg="del">
+          <ac:chgData name="Andrés Alfonso Rincón Guerrero" userId="c32465ef0afcf160" providerId="LiveId" clId="{AD91EE57-DF4A-4E81-8CC1-4467C21CA582}" dt="2026-06-12T03:42:23.530" v="6" actId="478"/>
+          <ac:graphicFrameMkLst>
+            <pc:docMk/>
+            <pc:sldMk cId="4102175269" sldId="258"/>
+            <ac:graphicFrameMk id="254" creationId="{501760C5-167C-1B8A-ADFB-E46C0F3371FF}"/>
+          </ac:graphicFrameMkLst>
+        </pc:graphicFrameChg>
+      </pc:sldChg>
+      <pc:sldMasterChg chg="modSp modSldLayout">
+        <pc:chgData name="Andrés Alfonso Rincón Guerrero" userId="c32465ef0afcf160" providerId="LiveId" clId="{AD91EE57-DF4A-4E81-8CC1-4467C21CA582}" dt="2026-06-12T03:44:11.214" v="80"/>
+        <pc:sldMasterMkLst>
+          <pc:docMk/>
+          <pc:sldMasterMk cId="1977657265" sldId="2147483648"/>
+        </pc:sldMasterMkLst>
+        <pc:spChg chg="mod">
+          <ac:chgData name="Andrés Alfonso Rincón Guerrero" userId="c32465ef0afcf160" providerId="LiveId" clId="{AD91EE57-DF4A-4E81-8CC1-4467C21CA582}" dt="2026-06-12T03:44:11.214" v="80"/>
+          <ac:spMkLst>
+            <pc:docMk/>
+            <pc:sldMasterMk cId="1977657265" sldId="2147483648"/>
+            <ac:spMk id="2" creationId="{F53D3FF1-F396-148C-B6E2-22F016E381FF}"/>
+          </ac:spMkLst>
+        </pc:spChg>
+        <pc:spChg chg="mod">
+          <ac:chgData name="Andrés Alfonso Rincón Guerrero" userId="c32465ef0afcf160" providerId="LiveId" clId="{AD91EE57-DF4A-4E81-8CC1-4467C21CA582}" dt="2026-06-12T03:44:11.214" v="80"/>
+          <ac:spMkLst>
+            <pc:docMk/>
+            <pc:sldMasterMk cId="1977657265" sldId="2147483648"/>
+            <ac:spMk id="3" creationId="{92332EB1-DDB6-9ED2-CD3A-C67B1E776CCD}"/>
+          </ac:spMkLst>
+        </pc:spChg>
+        <pc:spChg chg="mod">
+          <ac:chgData name="Andrés Alfonso Rincón Guerrero" userId="c32465ef0afcf160" providerId="LiveId" clId="{AD91EE57-DF4A-4E81-8CC1-4467C21CA582}" dt="2026-06-12T03:44:11.214" v="80"/>
+          <ac:spMkLst>
+            <pc:docMk/>
+            <pc:sldMasterMk cId="1977657265" sldId="2147483648"/>
+            <ac:spMk id="4" creationId="{7007503D-D22D-D60D-B61B-F1E3C8A69182}"/>
+          </ac:spMkLst>
+        </pc:spChg>
+        <pc:spChg chg="mod">
+          <ac:chgData name="Andrés Alfonso Rincón Guerrero" userId="c32465ef0afcf160" providerId="LiveId" clId="{AD91EE57-DF4A-4E81-8CC1-4467C21CA582}" dt="2026-06-12T03:44:11.214" v="80"/>
+          <ac:spMkLst>
+            <pc:docMk/>
+            <pc:sldMasterMk cId="1977657265" sldId="2147483648"/>
+            <ac:spMk id="5" creationId="{AEA6651F-F1B5-922A-70C3-AAF37C4C1B3A}"/>
+          </ac:spMkLst>
+        </pc:spChg>
+        <pc:spChg chg="mod">
+          <ac:chgData name="Andrés Alfonso Rincón Guerrero" userId="c32465ef0afcf160" providerId="LiveId" clId="{AD91EE57-DF4A-4E81-8CC1-4467C21CA582}" dt="2026-06-12T03:44:11.214" v="80"/>
+          <ac:spMkLst>
+            <pc:docMk/>
+            <pc:sldMasterMk cId="1977657265" sldId="2147483648"/>
+            <ac:spMk id="6" creationId="{A808D765-476E-A9E7-544F-71DABDA866DD}"/>
+          </ac:spMkLst>
+        </pc:spChg>
+        <pc:sldLayoutChg chg="modSp">
+          <pc:chgData name="Andrés Alfonso Rincón Guerrero" userId="c32465ef0afcf160" providerId="LiveId" clId="{AD91EE57-DF4A-4E81-8CC1-4467C21CA582}" dt="2026-06-12T03:44:11.214" v="80"/>
+          <pc:sldLayoutMkLst>
+            <pc:docMk/>
+            <pc:sldMasterMk cId="1977657265" sldId="2147483648"/>
+            <pc:sldLayoutMk cId="3851897952" sldId="2147483649"/>
+          </pc:sldLayoutMkLst>
+          <pc:spChg chg="mod">
+            <ac:chgData name="Andrés Alfonso Rincón Guerrero" userId="c32465ef0afcf160" providerId="LiveId" clId="{AD91EE57-DF4A-4E81-8CC1-4467C21CA582}" dt="2026-06-12T03:44:11.214" v="80"/>
+            <ac:spMkLst>
+              <pc:docMk/>
+              <pc:sldMasterMk cId="1977657265" sldId="2147483648"/>
+              <pc:sldLayoutMk cId="3851897952" sldId="2147483649"/>
+              <ac:spMk id="2" creationId="{3DDA4C99-990F-DE30-83E5-6EACF9047A58}"/>
+            </ac:spMkLst>
+          </pc:spChg>
+          <pc:spChg chg="mod">
+            <ac:chgData name="Andrés Alfonso Rincón Guerrero" userId="c32465ef0afcf160" providerId="LiveId" clId="{AD91EE57-DF4A-4E81-8CC1-4467C21CA582}" dt="2026-06-12T03:44:11.214" v="80"/>
+            <ac:spMkLst>
+              <pc:docMk/>
+              <pc:sldMasterMk cId="1977657265" sldId="2147483648"/>
+              <pc:sldLayoutMk cId="3851897952" sldId="2147483649"/>
+              <ac:spMk id="3" creationId="{4452EF86-B451-414B-EC33-C23648578075}"/>
+            </ac:spMkLst>
+          </pc:spChg>
+        </pc:sldLayoutChg>
+        <pc:sldLayoutChg chg="modSp">
+          <pc:chgData name="Andrés Alfonso Rincón Guerrero" userId="c32465ef0afcf160" providerId="LiveId" clId="{AD91EE57-DF4A-4E81-8CC1-4467C21CA582}" dt="2026-06-12T03:44:11.214" v="80"/>
+          <pc:sldLayoutMkLst>
+            <pc:docMk/>
+            <pc:sldMasterMk cId="1977657265" sldId="2147483648"/>
+            <pc:sldLayoutMk cId="2728328224" sldId="2147483651"/>
+          </pc:sldLayoutMkLst>
+          <pc:spChg chg="mod">
+            <ac:chgData name="Andrés Alfonso Rincón Guerrero" userId="c32465ef0afcf160" providerId="LiveId" clId="{AD91EE57-DF4A-4E81-8CC1-4467C21CA582}" dt="2026-06-12T03:44:11.214" v="80"/>
+            <ac:spMkLst>
+              <pc:docMk/>
+              <pc:sldMasterMk cId="1977657265" sldId="2147483648"/>
+              <pc:sldLayoutMk cId="2728328224" sldId="2147483651"/>
+              <ac:spMk id="2" creationId="{681ACBA7-CCB0-1964-E47A-3D1207FF566F}"/>
+            </ac:spMkLst>
+          </pc:spChg>
+          <pc:spChg chg="mod">
+            <ac:chgData name="Andrés Alfonso Rincón Guerrero" userId="c32465ef0afcf160" providerId="LiveId" clId="{AD91EE57-DF4A-4E81-8CC1-4467C21CA582}" dt="2026-06-12T03:44:11.214" v="80"/>
+            <ac:spMkLst>
+              <pc:docMk/>
+              <pc:sldMasterMk cId="1977657265" sldId="2147483648"/>
+              <pc:sldLayoutMk cId="2728328224" sldId="2147483651"/>
+              <ac:spMk id="3" creationId="{1A939C67-81B7-7639-F638-C6B3E5D2AA65}"/>
+            </ac:spMkLst>
+          </pc:spChg>
+        </pc:sldLayoutChg>
+        <pc:sldLayoutChg chg="modSp">
+          <pc:chgData name="Andrés Alfonso Rincón Guerrero" userId="c32465ef0afcf160" providerId="LiveId" clId="{AD91EE57-DF4A-4E81-8CC1-4467C21CA582}" dt="2026-06-12T03:44:11.214" v="80"/>
+          <pc:sldLayoutMkLst>
+            <pc:docMk/>
+            <pc:sldMasterMk cId="1977657265" sldId="2147483648"/>
+            <pc:sldLayoutMk cId="544003496" sldId="2147483652"/>
+          </pc:sldLayoutMkLst>
+          <pc:spChg chg="mod">
+            <ac:chgData name="Andrés Alfonso Rincón Guerrero" userId="c32465ef0afcf160" providerId="LiveId" clId="{AD91EE57-DF4A-4E81-8CC1-4467C21CA582}" dt="2026-06-12T03:44:11.214" v="80"/>
+            <ac:spMkLst>
+              <pc:docMk/>
+              <pc:sldMasterMk cId="1977657265" sldId="2147483648"/>
+              <pc:sldLayoutMk cId="544003496" sldId="2147483652"/>
+              <ac:spMk id="3" creationId="{5AFE65D2-4986-74B4-A959-CFAAB7497E66}"/>
+            </ac:spMkLst>
+          </pc:spChg>
+          <pc:spChg chg="mod">
+            <ac:chgData name="Andrés Alfonso Rincón Guerrero" userId="c32465ef0afcf160" providerId="LiveId" clId="{AD91EE57-DF4A-4E81-8CC1-4467C21CA582}" dt="2026-06-12T03:44:11.214" v="80"/>
+            <ac:spMkLst>
+              <pc:docMk/>
+              <pc:sldMasterMk cId="1977657265" sldId="2147483648"/>
+              <pc:sldLayoutMk cId="544003496" sldId="2147483652"/>
+              <ac:spMk id="4" creationId="{9FBE8BC7-FC5E-DE84-28DD-0CC2E71C81FB}"/>
+            </ac:spMkLst>
+          </pc:spChg>
+        </pc:sldLayoutChg>
+        <pc:sldLayoutChg chg="modSp">
+          <pc:chgData name="Andrés Alfonso Rincón Guerrero" userId="c32465ef0afcf160" providerId="LiveId" clId="{AD91EE57-DF4A-4E81-8CC1-4467C21CA582}" dt="2026-06-12T03:44:11.214" v="80"/>
+          <pc:sldLayoutMkLst>
+            <pc:docMk/>
+            <pc:sldMasterMk cId="1977657265" sldId="2147483648"/>
+            <pc:sldLayoutMk cId="2563414976" sldId="2147483653"/>
+          </pc:sldLayoutMkLst>
+          <pc:spChg chg="mod">
+            <ac:chgData name="Andrés Alfonso Rincón Guerrero" userId="c32465ef0afcf160" providerId="LiveId" clId="{AD91EE57-DF4A-4E81-8CC1-4467C21CA582}" dt="2026-06-12T03:44:11.214" v="80"/>
+            <ac:spMkLst>
+              <pc:docMk/>
+              <pc:sldMasterMk cId="1977657265" sldId="2147483648"/>
+              <pc:sldLayoutMk cId="2563414976" sldId="2147483653"/>
+              <ac:spMk id="2" creationId="{3D97D875-3C6D-A8BB-1608-514607C74AF9}"/>
+            </ac:spMkLst>
+          </pc:spChg>
+          <pc:spChg chg="mod">
+            <ac:chgData name="Andrés Alfonso Rincón Guerrero" userId="c32465ef0afcf160" providerId="LiveId" clId="{AD91EE57-DF4A-4E81-8CC1-4467C21CA582}" dt="2026-06-12T03:44:11.214" v="80"/>
+            <ac:spMkLst>
+              <pc:docMk/>
+              <pc:sldMasterMk cId="1977657265" sldId="2147483648"/>
+              <pc:sldLayoutMk cId="2563414976" sldId="2147483653"/>
+              <ac:spMk id="3" creationId="{918E17E1-C0C8-C52B-811A-C8B8C52967D1}"/>
+            </ac:spMkLst>
+          </pc:spChg>
+          <pc:spChg chg="mod">
+            <ac:chgData name="Andrés Alfonso Rincón Guerrero" userId="c32465ef0afcf160" providerId="LiveId" clId="{AD91EE57-DF4A-4E81-8CC1-4467C21CA582}" dt="2026-06-12T03:44:11.214" v="80"/>
+            <ac:spMkLst>
+              <pc:docMk/>
+              <pc:sldMasterMk cId="1977657265" sldId="2147483648"/>
+              <pc:sldLayoutMk cId="2563414976" sldId="2147483653"/>
+              <ac:spMk id="4" creationId="{2E7EC5F2-076E-E0CF-948C-2B201C1945EC}"/>
+            </ac:spMkLst>
+          </pc:spChg>
+          <pc:spChg chg="mod">
+            <ac:chgData name="Andrés Alfonso Rincón Guerrero" userId="c32465ef0afcf160" providerId="LiveId" clId="{AD91EE57-DF4A-4E81-8CC1-4467C21CA582}" dt="2026-06-12T03:44:11.214" v="80"/>
+            <ac:spMkLst>
+              <pc:docMk/>
+              <pc:sldMasterMk cId="1977657265" sldId="2147483648"/>
+              <pc:sldLayoutMk cId="2563414976" sldId="2147483653"/>
+              <ac:spMk id="5" creationId="{7B22D129-273A-EE9F-B497-10C534ED9019}"/>
+            </ac:spMkLst>
+          </pc:spChg>
+          <pc:spChg chg="mod">
+            <ac:chgData name="Andrés Alfonso Rincón Guerrero" userId="c32465ef0afcf160" providerId="LiveId" clId="{AD91EE57-DF4A-4E81-8CC1-4467C21CA582}" dt="2026-06-12T03:44:11.214" v="80"/>
+            <ac:spMkLst>
+              <pc:docMk/>
+              <pc:sldMasterMk cId="1977657265" sldId="2147483648"/>
+              <pc:sldLayoutMk cId="2563414976" sldId="2147483653"/>
+              <ac:spMk id="6" creationId="{1D3BB72E-DC68-CF41-E718-553D47771D0D}"/>
+            </ac:spMkLst>
+          </pc:spChg>
+        </pc:sldLayoutChg>
+        <pc:sldLayoutChg chg="modSp">
+          <pc:chgData name="Andrés Alfonso Rincón Guerrero" userId="c32465ef0afcf160" providerId="LiveId" clId="{AD91EE57-DF4A-4E81-8CC1-4467C21CA582}" dt="2026-06-12T03:44:11.214" v="80"/>
+          <pc:sldLayoutMkLst>
+            <pc:docMk/>
+            <pc:sldMasterMk cId="1977657265" sldId="2147483648"/>
+            <pc:sldLayoutMk cId="3696056074" sldId="2147483656"/>
+          </pc:sldLayoutMkLst>
+          <pc:spChg chg="mod">
+            <ac:chgData name="Andrés Alfonso Rincón Guerrero" userId="c32465ef0afcf160" providerId="LiveId" clId="{AD91EE57-DF4A-4E81-8CC1-4467C21CA582}" dt="2026-06-12T03:44:11.214" v="80"/>
+            <ac:spMkLst>
+              <pc:docMk/>
+              <pc:sldMasterMk cId="1977657265" sldId="2147483648"/>
+              <pc:sldLayoutMk cId="3696056074" sldId="2147483656"/>
+              <ac:spMk id="2" creationId="{B418ED08-B129-BA7C-8D71-CB8ACEEA0A32}"/>
+            </ac:spMkLst>
+          </pc:spChg>
+          <pc:spChg chg="mod">
+            <ac:chgData name="Andrés Alfonso Rincón Guerrero" userId="c32465ef0afcf160" providerId="LiveId" clId="{AD91EE57-DF4A-4E81-8CC1-4467C21CA582}" dt="2026-06-12T03:44:11.214" v="80"/>
+            <ac:spMkLst>
+              <pc:docMk/>
+              <pc:sldMasterMk cId="1977657265" sldId="2147483648"/>
+              <pc:sldLayoutMk cId="3696056074" sldId="2147483656"/>
+              <ac:spMk id="3" creationId="{4A1104F4-5A0D-4CDB-6759-85E58ED37ED4}"/>
+            </ac:spMkLst>
+          </pc:spChg>
+          <pc:spChg chg="mod">
+            <ac:chgData name="Andrés Alfonso Rincón Guerrero" userId="c32465ef0afcf160" providerId="LiveId" clId="{AD91EE57-DF4A-4E81-8CC1-4467C21CA582}" dt="2026-06-12T03:44:11.214" v="80"/>
+            <ac:spMkLst>
+              <pc:docMk/>
+              <pc:sldMasterMk cId="1977657265" sldId="2147483648"/>
+              <pc:sldLayoutMk cId="3696056074" sldId="2147483656"/>
+              <ac:spMk id="4" creationId="{D7F1CFD7-488F-FD87-24CB-B352B1194012}"/>
+            </ac:spMkLst>
+          </pc:spChg>
+        </pc:sldLayoutChg>
+        <pc:sldLayoutChg chg="modSp">
+          <pc:chgData name="Andrés Alfonso Rincón Guerrero" userId="c32465ef0afcf160" providerId="LiveId" clId="{AD91EE57-DF4A-4E81-8CC1-4467C21CA582}" dt="2026-06-12T03:44:11.214" v="80"/>
+          <pc:sldLayoutMkLst>
+            <pc:docMk/>
+            <pc:sldMasterMk cId="1977657265" sldId="2147483648"/>
+            <pc:sldLayoutMk cId="98476377" sldId="2147483657"/>
+          </pc:sldLayoutMkLst>
+          <pc:spChg chg="mod">
+            <ac:chgData name="Andrés Alfonso Rincón Guerrero" userId="c32465ef0afcf160" providerId="LiveId" clId="{AD91EE57-DF4A-4E81-8CC1-4467C21CA582}" dt="2026-06-12T03:44:11.214" v="80"/>
+            <ac:spMkLst>
+              <pc:docMk/>
+              <pc:sldMasterMk cId="1977657265" sldId="2147483648"/>
+              <pc:sldLayoutMk cId="98476377" sldId="2147483657"/>
+              <ac:spMk id="2" creationId="{FCE87561-AD85-CCF3-D282-AD263C998CF9}"/>
+            </ac:spMkLst>
+          </pc:spChg>
+          <pc:spChg chg="mod">
+            <ac:chgData name="Andrés Alfonso Rincón Guerrero" userId="c32465ef0afcf160" providerId="LiveId" clId="{AD91EE57-DF4A-4E81-8CC1-4467C21CA582}" dt="2026-06-12T03:44:11.214" v="80"/>
+            <ac:spMkLst>
+              <pc:docMk/>
+              <pc:sldMasterMk cId="1977657265" sldId="2147483648"/>
+              <pc:sldLayoutMk cId="98476377" sldId="2147483657"/>
+              <ac:spMk id="3" creationId="{C372083B-91BB-2094-F0A1-C54CC97E24FB}"/>
+            </ac:spMkLst>
+          </pc:spChg>
+          <pc:spChg chg="mod">
+            <ac:chgData name="Andrés Alfonso Rincón Guerrero" userId="c32465ef0afcf160" providerId="LiveId" clId="{AD91EE57-DF4A-4E81-8CC1-4467C21CA582}" dt="2026-06-12T03:44:11.214" v="80"/>
+            <ac:spMkLst>
+              <pc:docMk/>
+              <pc:sldMasterMk cId="1977657265" sldId="2147483648"/>
+              <pc:sldLayoutMk cId="98476377" sldId="2147483657"/>
+              <ac:spMk id="4" creationId="{CC89FA34-E8B0-3457-C59D-21D261782FF7}"/>
+            </ac:spMkLst>
+          </pc:spChg>
+        </pc:sldLayoutChg>
+        <pc:sldLayoutChg chg="modSp">
+          <pc:chgData name="Andrés Alfonso Rincón Guerrero" userId="c32465ef0afcf160" providerId="LiveId" clId="{AD91EE57-DF4A-4E81-8CC1-4467C21CA582}" dt="2026-06-12T03:44:11.214" v="80"/>
+          <pc:sldLayoutMkLst>
+            <pc:docMk/>
+            <pc:sldMasterMk cId="1977657265" sldId="2147483648"/>
+            <pc:sldLayoutMk cId="3628209186" sldId="2147483659"/>
+          </pc:sldLayoutMkLst>
+          <pc:spChg chg="mod">
+            <ac:chgData name="Andrés Alfonso Rincón Guerrero" userId="c32465ef0afcf160" providerId="LiveId" clId="{AD91EE57-DF4A-4E81-8CC1-4467C21CA582}" dt="2026-06-12T03:44:11.214" v="80"/>
+            <ac:spMkLst>
+              <pc:docMk/>
+              <pc:sldMasterMk cId="1977657265" sldId="2147483648"/>
+              <pc:sldLayoutMk cId="3628209186" sldId="2147483659"/>
+              <ac:spMk id="2" creationId="{F394634C-1420-7787-BB44-24FF26F51728}"/>
+            </ac:spMkLst>
+          </pc:spChg>
+          <pc:spChg chg="mod">
+            <ac:chgData name="Andrés Alfonso Rincón Guerrero" userId="c32465ef0afcf160" providerId="LiveId" clId="{AD91EE57-DF4A-4E81-8CC1-4467C21CA582}" dt="2026-06-12T03:44:11.214" v="80"/>
+            <ac:spMkLst>
+              <pc:docMk/>
+              <pc:sldMasterMk cId="1977657265" sldId="2147483648"/>
+              <pc:sldLayoutMk cId="3628209186" sldId="2147483659"/>
+              <ac:spMk id="3" creationId="{5E89C669-8880-F140-F44E-D93229C0C87D}"/>
+            </ac:spMkLst>
+          </pc:spChg>
+        </pc:sldLayoutChg>
+      </pc:sldMasterChg>
+    </pc:docChg>
+  </pc:docChgLst>
+</pc:chgInfo>
 </file>
 
 <file path=ppt/slideLayouts/slideLayout1.xml><?xml version="1.0" encoding="utf-8"?>
@@ -191,35 +819,35 @@
               <a:buNone/>
               <a:defRPr sz="2400"/>
             </a:lvl1pPr>
-            <a:lvl2pPr marL="457200" indent="0" algn="ctr">
+            <a:lvl2pPr marL="457189" indent="0" algn="ctr">
               <a:buNone/>
               <a:defRPr sz="2000"/>
             </a:lvl2pPr>
-            <a:lvl3pPr marL="914400" indent="0" algn="ctr">
+            <a:lvl3pPr marL="914377" indent="0" algn="ctr">
               <a:buNone/>
               <a:defRPr sz="1800"/>
             </a:lvl3pPr>
-            <a:lvl4pPr marL="1371600" indent="0" algn="ctr">
+            <a:lvl4pPr marL="1371566" indent="0" algn="ctr">
               <a:buNone/>
               <a:defRPr sz="1600"/>
             </a:lvl4pPr>
-            <a:lvl5pPr marL="1828800" indent="0" algn="ctr">
+            <a:lvl5pPr marL="1828754" indent="0" algn="ctr">
               <a:buNone/>
               <a:defRPr sz="1600"/>
             </a:lvl5pPr>
-            <a:lvl6pPr marL="2286000" indent="0" algn="ctr">
+            <a:lvl6pPr marL="2285943" indent="0" algn="ctr">
               <a:buNone/>
               <a:defRPr sz="1600"/>
             </a:lvl6pPr>
-            <a:lvl7pPr marL="2743200" indent="0" algn="ctr">
+            <a:lvl7pPr marL="2743131" indent="0" algn="ctr">
               <a:buNone/>
               <a:defRPr sz="1600"/>
             </a:lvl7pPr>
-            <a:lvl8pPr marL="3200400" indent="0" algn="ctr">
+            <a:lvl8pPr marL="3200320" indent="0" algn="ctr">
               <a:buNone/>
               <a:defRPr sz="1600"/>
             </a:lvl8pPr>
-            <a:lvl9pPr marL="3657600" indent="0" algn="ctr">
+            <a:lvl9pPr marL="3657509" indent="0" algn="ctr">
               <a:buNone/>
               <a:defRPr sz="1600"/>
             </a:lvl9pPr>
@@ -256,7 +884,7 @@
           <a:p>
             <a:fld id="{856C4F6A-DD1F-4964-8271-E0674F9DFEA3}" type="datetimeFigureOut">
               <a:rPr lang="es-CO" smtClean="0"/>
-              <a:t>6/06/2026</a:t>
+              <a:t>11/06/2026</a:t>
             </a:fld>
             <a:endParaRPr lang="es-CO"/>
           </a:p>
@@ -456,7 +1084,7 @@
           <a:p>
             <a:fld id="{856C4F6A-DD1F-4964-8271-E0674F9DFEA3}" type="datetimeFigureOut">
               <a:rPr lang="es-CO" smtClean="0"/>
-              <a:t>6/06/2026</a:t>
+              <a:t>11/06/2026</a:t>
             </a:fld>
             <a:endParaRPr lang="es-CO"/>
           </a:p>
@@ -564,7 +1192,7 @@
         </p:nvSpPr>
         <p:spPr>
           <a:xfrm>
-            <a:off x="8724900" y="365125"/>
+            <a:off x="8724902" y="365125"/>
             <a:ext cx="2628900" cy="5811838"/>
           </a:xfrm>
         </p:spPr>
@@ -598,7 +1226,7 @@
         </p:nvSpPr>
         <p:spPr>
           <a:xfrm>
-            <a:off x="838200" y="365125"/>
+            <a:off x="838202" y="365125"/>
             <a:ext cx="7734300" cy="5811838"/>
           </a:xfrm>
         </p:spPr>
@@ -666,7 +1294,7 @@
           <a:p>
             <a:fld id="{856C4F6A-DD1F-4964-8271-E0674F9DFEA3}" type="datetimeFigureOut">
               <a:rPr lang="es-CO" smtClean="0"/>
-              <a:t>6/06/2026</a:t>
+              <a:t>11/06/2026</a:t>
             </a:fld>
             <a:endParaRPr lang="es-CO"/>
           </a:p>
@@ -866,7 +1494,7 @@
           <a:p>
             <a:fld id="{856C4F6A-DD1F-4964-8271-E0674F9DFEA3}" type="datetimeFigureOut">
               <a:rPr lang="es-CO" smtClean="0"/>
-              <a:t>6/06/2026</a:t>
+              <a:t>11/06/2026</a:t>
             </a:fld>
             <a:endParaRPr lang="es-CO"/>
           </a:p>
@@ -974,7 +1602,7 @@
         </p:nvSpPr>
         <p:spPr>
           <a:xfrm>
-            <a:off x="831850" y="1709738"/>
+            <a:off x="831851" y="1709742"/>
             <a:ext cx="10515600" cy="2852737"/>
           </a:xfrm>
         </p:spPr>
@@ -1012,7 +1640,7 @@
         </p:nvSpPr>
         <p:spPr>
           <a:xfrm>
-            <a:off x="831850" y="4589463"/>
+            <a:off x="831851" y="4589467"/>
             <a:ext cx="10515600" cy="1500187"/>
           </a:xfrm>
         </p:spPr>
@@ -1029,7 +1657,7 @@
                 </a:solidFill>
               </a:defRPr>
             </a:lvl1pPr>
-            <a:lvl2pPr marL="457200" indent="0">
+            <a:lvl2pPr marL="457189" indent="0">
               <a:buNone/>
               <a:defRPr sz="2000">
                 <a:solidFill>
@@ -1039,7 +1667,7 @@
                 </a:solidFill>
               </a:defRPr>
             </a:lvl2pPr>
-            <a:lvl3pPr marL="914400" indent="0">
+            <a:lvl3pPr marL="914377" indent="0">
               <a:buNone/>
               <a:defRPr sz="1800">
                 <a:solidFill>
@@ -1049,7 +1677,7 @@
                 </a:solidFill>
               </a:defRPr>
             </a:lvl3pPr>
-            <a:lvl4pPr marL="1371600" indent="0">
+            <a:lvl4pPr marL="1371566" indent="0">
               <a:buNone/>
               <a:defRPr sz="1600">
                 <a:solidFill>
@@ -1059,7 +1687,7 @@
                 </a:solidFill>
               </a:defRPr>
             </a:lvl4pPr>
-            <a:lvl5pPr marL="1828800" indent="0">
+            <a:lvl5pPr marL="1828754" indent="0">
               <a:buNone/>
               <a:defRPr sz="1600">
                 <a:solidFill>
@@ -1069,7 +1697,7 @@
                 </a:solidFill>
               </a:defRPr>
             </a:lvl5pPr>
-            <a:lvl6pPr marL="2286000" indent="0">
+            <a:lvl6pPr marL="2285943" indent="0">
               <a:buNone/>
               <a:defRPr sz="1600">
                 <a:solidFill>
@@ -1079,7 +1707,7 @@
                 </a:solidFill>
               </a:defRPr>
             </a:lvl6pPr>
-            <a:lvl7pPr marL="2743200" indent="0">
+            <a:lvl7pPr marL="2743131" indent="0">
               <a:buNone/>
               <a:defRPr sz="1600">
                 <a:solidFill>
@@ -1089,7 +1717,7 @@
                 </a:solidFill>
               </a:defRPr>
             </a:lvl7pPr>
-            <a:lvl8pPr marL="3200400" indent="0">
+            <a:lvl8pPr marL="3200320" indent="0">
               <a:buNone/>
               <a:defRPr sz="1600">
                 <a:solidFill>
@@ -1099,7 +1727,7 @@
                 </a:solidFill>
               </a:defRPr>
             </a:lvl8pPr>
-            <a:lvl9pPr marL="3657600" indent="0">
+            <a:lvl9pPr marL="3657509" indent="0">
               <a:buNone/>
               <a:defRPr sz="1600">
                 <a:solidFill>
@@ -1142,7 +1770,7 @@
           <a:p>
             <a:fld id="{856C4F6A-DD1F-4964-8271-E0674F9DFEA3}" type="datetimeFigureOut">
               <a:rPr lang="es-CO" smtClean="0"/>
-              <a:t>6/06/2026</a:t>
+              <a:t>11/06/2026</a:t>
             </a:fld>
             <a:endParaRPr lang="es-CO"/>
           </a:p>
@@ -1410,7 +2038,7 @@
           <a:p>
             <a:fld id="{856C4F6A-DD1F-4964-8271-E0674F9DFEA3}" type="datetimeFigureOut">
               <a:rPr lang="es-CO" smtClean="0"/>
-              <a:t>6/06/2026</a:t>
+              <a:t>11/06/2026</a:t>
             </a:fld>
             <a:endParaRPr lang="es-CO"/>
           </a:p>
@@ -1518,7 +2146,7 @@
         </p:nvSpPr>
         <p:spPr>
           <a:xfrm>
-            <a:off x="839788" y="365125"/>
+            <a:off x="839788" y="365129"/>
             <a:ext cx="10515600" cy="1325563"/>
           </a:xfrm>
         </p:spPr>
@@ -1552,7 +2180,7 @@
         </p:nvSpPr>
         <p:spPr>
           <a:xfrm>
-            <a:off x="839788" y="1681163"/>
+            <a:off x="839789" y="1681163"/>
             <a:ext cx="5157787" cy="823912"/>
           </a:xfrm>
         </p:spPr>
@@ -1563,35 +2191,35 @@
               <a:buNone/>
               <a:defRPr sz="2400" b="1"/>
             </a:lvl1pPr>
-            <a:lvl2pPr marL="457200" indent="0">
+            <a:lvl2pPr marL="457189" indent="0">
               <a:buNone/>
               <a:defRPr sz="2000" b="1"/>
             </a:lvl2pPr>
-            <a:lvl3pPr marL="914400" indent="0">
+            <a:lvl3pPr marL="914377" indent="0">
               <a:buNone/>
               <a:defRPr sz="1800" b="1"/>
             </a:lvl3pPr>
-            <a:lvl4pPr marL="1371600" indent="0">
+            <a:lvl4pPr marL="1371566" indent="0">
               <a:buNone/>
               <a:defRPr sz="1600" b="1"/>
             </a:lvl4pPr>
-            <a:lvl5pPr marL="1828800" indent="0">
+            <a:lvl5pPr marL="1828754" indent="0">
               <a:buNone/>
               <a:defRPr sz="1600" b="1"/>
             </a:lvl5pPr>
-            <a:lvl6pPr marL="2286000" indent="0">
+            <a:lvl6pPr marL="2285943" indent="0">
               <a:buNone/>
               <a:defRPr sz="1600" b="1"/>
             </a:lvl6pPr>
-            <a:lvl7pPr marL="2743200" indent="0">
+            <a:lvl7pPr marL="2743131" indent="0">
               <a:buNone/>
               <a:defRPr sz="1600" b="1"/>
             </a:lvl7pPr>
-            <a:lvl8pPr marL="3200400" indent="0">
+            <a:lvl8pPr marL="3200320" indent="0">
               <a:buNone/>
               <a:defRPr sz="1600" b="1"/>
             </a:lvl8pPr>
-            <a:lvl9pPr marL="3657600" indent="0">
+            <a:lvl9pPr marL="3657509" indent="0">
               <a:buNone/>
               <a:defRPr sz="1600" b="1"/>
             </a:lvl9pPr>
@@ -1623,7 +2251,7 @@
         </p:nvSpPr>
         <p:spPr>
           <a:xfrm>
-            <a:off x="839788" y="2505075"/>
+            <a:off x="839789" y="2505075"/>
             <a:ext cx="5157787" cy="3684588"/>
           </a:xfrm>
         </p:spPr>
@@ -1686,7 +2314,7 @@
         </p:nvSpPr>
         <p:spPr>
           <a:xfrm>
-            <a:off x="6172200" y="1681163"/>
+            <a:off x="6172202" y="1681163"/>
             <a:ext cx="5183188" cy="823912"/>
           </a:xfrm>
         </p:spPr>
@@ -1697,35 +2325,35 @@
               <a:buNone/>
               <a:defRPr sz="2400" b="1"/>
             </a:lvl1pPr>
-            <a:lvl2pPr marL="457200" indent="0">
+            <a:lvl2pPr marL="457189" indent="0">
               <a:buNone/>
               <a:defRPr sz="2000" b="1"/>
             </a:lvl2pPr>
-            <a:lvl3pPr marL="914400" indent="0">
+            <a:lvl3pPr marL="914377" indent="0">
               <a:buNone/>
               <a:defRPr sz="1800" b="1"/>
             </a:lvl3pPr>
-            <a:lvl4pPr marL="1371600" indent="0">
+            <a:lvl4pPr marL="1371566" indent="0">
               <a:buNone/>
               <a:defRPr sz="1600" b="1"/>
             </a:lvl4pPr>
-            <a:lvl5pPr marL="1828800" indent="0">
+            <a:lvl5pPr marL="1828754" indent="0">
               <a:buNone/>
               <a:defRPr sz="1600" b="1"/>
             </a:lvl5pPr>
-            <a:lvl6pPr marL="2286000" indent="0">
+            <a:lvl6pPr marL="2285943" indent="0">
               <a:buNone/>
               <a:defRPr sz="1600" b="1"/>
             </a:lvl6pPr>
-            <a:lvl7pPr marL="2743200" indent="0">
+            <a:lvl7pPr marL="2743131" indent="0">
               <a:buNone/>
               <a:defRPr sz="1600" b="1"/>
             </a:lvl7pPr>
-            <a:lvl8pPr marL="3200400" indent="0">
+            <a:lvl8pPr marL="3200320" indent="0">
               <a:buNone/>
               <a:defRPr sz="1600" b="1"/>
             </a:lvl8pPr>
-            <a:lvl9pPr marL="3657600" indent="0">
+            <a:lvl9pPr marL="3657509" indent="0">
               <a:buNone/>
               <a:defRPr sz="1600" b="1"/>
             </a:lvl9pPr>
@@ -1757,7 +2385,7 @@
         </p:nvSpPr>
         <p:spPr>
           <a:xfrm>
-            <a:off x="6172200" y="2505075"/>
+            <a:off x="6172202" y="2505075"/>
             <a:ext cx="5183188" cy="3684588"/>
           </a:xfrm>
         </p:spPr>
@@ -1825,7 +2453,7 @@
           <a:p>
             <a:fld id="{856C4F6A-DD1F-4964-8271-E0674F9DFEA3}" type="datetimeFigureOut">
               <a:rPr lang="es-CO" smtClean="0"/>
-              <a:t>6/06/2026</a:t>
+              <a:t>11/06/2026</a:t>
             </a:fld>
             <a:endParaRPr lang="es-CO"/>
           </a:p>
@@ -1967,7 +2595,7 @@
           <a:p>
             <a:fld id="{856C4F6A-DD1F-4964-8271-E0674F9DFEA3}" type="datetimeFigureOut">
               <a:rPr lang="es-CO" smtClean="0"/>
-              <a:t>6/06/2026</a:t>
+              <a:t>11/06/2026</a:t>
             </a:fld>
             <a:endParaRPr lang="es-CO"/>
           </a:p>
@@ -2080,7 +2708,7 @@
           <a:p>
             <a:fld id="{856C4F6A-DD1F-4964-8271-E0674F9DFEA3}" type="datetimeFigureOut">
               <a:rPr lang="es-CO" smtClean="0"/>
-              <a:t>6/06/2026</a:t>
+              <a:t>11/06/2026</a:t>
             </a:fld>
             <a:endParaRPr lang="es-CO"/>
           </a:p>
@@ -2226,7 +2854,7 @@
         </p:nvSpPr>
         <p:spPr>
           <a:xfrm>
-            <a:off x="5183188" y="987425"/>
+            <a:off x="5183188" y="987429"/>
             <a:ext cx="6172200" cy="4873625"/>
           </a:xfrm>
         </p:spPr>
@@ -2328,35 +2956,35 @@
               <a:buNone/>
               <a:defRPr sz="1600"/>
             </a:lvl1pPr>
-            <a:lvl2pPr marL="457200" indent="0">
+            <a:lvl2pPr marL="457189" indent="0">
               <a:buNone/>
               <a:defRPr sz="1400"/>
             </a:lvl2pPr>
-            <a:lvl3pPr marL="914400" indent="0">
+            <a:lvl3pPr marL="914377" indent="0">
               <a:buNone/>
               <a:defRPr sz="1200"/>
             </a:lvl3pPr>
-            <a:lvl4pPr marL="1371600" indent="0">
+            <a:lvl4pPr marL="1371566" indent="0">
               <a:buNone/>
               <a:defRPr sz="1000"/>
             </a:lvl4pPr>
-            <a:lvl5pPr marL="1828800" indent="0">
+            <a:lvl5pPr marL="1828754" indent="0">
               <a:buNone/>
               <a:defRPr sz="1000"/>
             </a:lvl5pPr>
-            <a:lvl6pPr marL="2286000" indent="0">
+            <a:lvl6pPr marL="2285943" indent="0">
               <a:buNone/>
               <a:defRPr sz="1000"/>
             </a:lvl6pPr>
-            <a:lvl7pPr marL="2743200" indent="0">
+            <a:lvl7pPr marL="2743131" indent="0">
               <a:buNone/>
               <a:defRPr sz="1000"/>
             </a:lvl7pPr>
-            <a:lvl8pPr marL="3200400" indent="0">
+            <a:lvl8pPr marL="3200320" indent="0">
               <a:buNone/>
               <a:defRPr sz="1000"/>
             </a:lvl8pPr>
-            <a:lvl9pPr marL="3657600" indent="0">
+            <a:lvl9pPr marL="3657509" indent="0">
               <a:buNone/>
               <a:defRPr sz="1000"/>
             </a:lvl9pPr>
@@ -2393,7 +3021,7 @@
           <a:p>
             <a:fld id="{856C4F6A-DD1F-4964-8271-E0674F9DFEA3}" type="datetimeFigureOut">
               <a:rPr lang="es-CO" smtClean="0"/>
-              <a:t>6/06/2026</a:t>
+              <a:t>11/06/2026</a:t>
             </a:fld>
             <a:endParaRPr lang="es-CO"/>
           </a:p>
@@ -2539,7 +3167,7 @@
         </p:nvSpPr>
         <p:spPr>
           <a:xfrm>
-            <a:off x="5183188" y="987425"/>
+            <a:off x="5183188" y="987429"/>
             <a:ext cx="6172200" cy="4873625"/>
           </a:xfrm>
         </p:spPr>
@@ -2550,35 +3178,35 @@
               <a:buNone/>
               <a:defRPr sz="3200"/>
             </a:lvl1pPr>
-            <a:lvl2pPr marL="457200" indent="0">
+            <a:lvl2pPr marL="457189" indent="0">
               <a:buNone/>
               <a:defRPr sz="2800"/>
             </a:lvl2pPr>
-            <a:lvl3pPr marL="914400" indent="0">
+            <a:lvl3pPr marL="914377" indent="0">
               <a:buNone/>
               <a:defRPr sz="2400"/>
             </a:lvl3pPr>
-            <a:lvl4pPr marL="1371600" indent="0">
+            <a:lvl4pPr marL="1371566" indent="0">
               <a:buNone/>
               <a:defRPr sz="2000"/>
             </a:lvl4pPr>
-            <a:lvl5pPr marL="1828800" indent="0">
+            <a:lvl5pPr marL="1828754" indent="0">
               <a:buNone/>
               <a:defRPr sz="2000"/>
             </a:lvl5pPr>
-            <a:lvl6pPr marL="2286000" indent="0">
+            <a:lvl6pPr marL="2285943" indent="0">
               <a:buNone/>
               <a:defRPr sz="2000"/>
             </a:lvl6pPr>
-            <a:lvl7pPr marL="2743200" indent="0">
+            <a:lvl7pPr marL="2743131" indent="0">
               <a:buNone/>
               <a:defRPr sz="2000"/>
             </a:lvl7pPr>
-            <a:lvl8pPr marL="3200400" indent="0">
+            <a:lvl8pPr marL="3200320" indent="0">
               <a:buNone/>
               <a:defRPr sz="2000"/>
             </a:lvl8pPr>
-            <a:lvl9pPr marL="3657600" indent="0">
+            <a:lvl9pPr marL="3657509" indent="0">
               <a:buNone/>
               <a:defRPr sz="2000"/>
             </a:lvl9pPr>
@@ -2617,35 +3245,35 @@
               <a:buNone/>
               <a:defRPr sz="1600"/>
             </a:lvl1pPr>
-            <a:lvl2pPr marL="457200" indent="0">
+            <a:lvl2pPr marL="457189" indent="0">
               <a:buNone/>
               <a:defRPr sz="1400"/>
             </a:lvl2pPr>
-            <a:lvl3pPr marL="914400" indent="0">
+            <a:lvl3pPr marL="914377" indent="0">
               <a:buNone/>
               <a:defRPr sz="1200"/>
             </a:lvl3pPr>
-            <a:lvl4pPr marL="1371600" indent="0">
+            <a:lvl4pPr marL="1371566" indent="0">
               <a:buNone/>
               <a:defRPr sz="1000"/>
             </a:lvl4pPr>
-            <a:lvl5pPr marL="1828800" indent="0">
+            <a:lvl5pPr marL="1828754" indent="0">
               <a:buNone/>
               <a:defRPr sz="1000"/>
             </a:lvl5pPr>
-            <a:lvl6pPr marL="2286000" indent="0">
+            <a:lvl6pPr marL="2285943" indent="0">
               <a:buNone/>
               <a:defRPr sz="1000"/>
             </a:lvl6pPr>
-            <a:lvl7pPr marL="2743200" indent="0">
+            <a:lvl7pPr marL="2743131" indent="0">
               <a:buNone/>
               <a:defRPr sz="1000"/>
             </a:lvl7pPr>
-            <a:lvl8pPr marL="3200400" indent="0">
+            <a:lvl8pPr marL="3200320" indent="0">
               <a:buNone/>
               <a:defRPr sz="1000"/>
             </a:lvl8pPr>
-            <a:lvl9pPr marL="3657600" indent="0">
+            <a:lvl9pPr marL="3657509" indent="0">
               <a:buNone/>
               <a:defRPr sz="1000"/>
             </a:lvl9pPr>
@@ -2682,7 +3310,7 @@
           <a:p>
             <a:fld id="{856C4F6A-DD1F-4964-8271-E0674F9DFEA3}" type="datetimeFigureOut">
               <a:rPr lang="es-CO" smtClean="0"/>
-              <a:t>6/06/2026</a:t>
+              <a:t>11/06/2026</a:t>
             </a:fld>
             <a:endParaRPr lang="es-CO"/>
           </a:p>
@@ -2795,7 +3423,7 @@
         </p:nvSpPr>
         <p:spPr>
           <a:xfrm>
-            <a:off x="838200" y="365125"/>
+            <a:off x="838200" y="365129"/>
             <a:ext cx="10515600" cy="1325563"/>
           </a:xfrm>
           <a:prstGeom prst="rect">
@@ -2902,7 +3530,7 @@
         </p:nvSpPr>
         <p:spPr>
           <a:xfrm>
-            <a:off x="838200" y="6356350"/>
+            <a:off x="838200" y="6356354"/>
             <a:ext cx="2743200" cy="365125"/>
           </a:xfrm>
           <a:prstGeom prst="rect">
@@ -2925,7 +3553,7 @@
           <a:p>
             <a:fld id="{856C4F6A-DD1F-4964-8271-E0674F9DFEA3}" type="datetimeFigureOut">
               <a:rPr lang="es-CO" smtClean="0"/>
-              <a:t>6/06/2026</a:t>
+              <a:t>11/06/2026</a:t>
             </a:fld>
             <a:endParaRPr lang="es-CO"/>
           </a:p>
@@ -2949,7 +3577,7 @@
         </p:nvSpPr>
         <p:spPr>
           <a:xfrm>
-            <a:off x="4038600" y="6356350"/>
+            <a:off x="4038600" y="6356354"/>
             <a:ext cx="4114800" cy="365125"/>
           </a:xfrm>
           <a:prstGeom prst="rect">
@@ -2992,7 +3620,7 @@
         </p:nvSpPr>
         <p:spPr>
           <a:xfrm>
-            <a:off x="8610600" y="6356350"/>
+            <a:off x="8610600" y="6356354"/>
             <a:ext cx="2743200" cy="365125"/>
           </a:xfrm>
           <a:prstGeom prst="rect">
@@ -3044,7 +3672,7 @@
   </p:sldLayoutIdLst>
   <p:txStyles>
     <p:titleStyle>
-      <a:lvl1pPr algn="l" defTabSz="914400" rtl="0" eaLnBrk="1" latinLnBrk="0" hangingPunct="1">
+      <a:lvl1pPr algn="l" defTabSz="914377" rtl="0" eaLnBrk="1" latinLnBrk="0" hangingPunct="1">
         <a:lnSpc>
           <a:spcPct val="90000"/>
         </a:lnSpc>
@@ -3063,7 +3691,7 @@
       </a:lvl1pPr>
     </p:titleStyle>
     <p:bodyStyle>
-      <a:lvl1pPr marL="228600" indent="-228600" algn="l" defTabSz="914400" rtl="0" eaLnBrk="1" latinLnBrk="0" hangingPunct="1">
+      <a:lvl1pPr marL="228594" indent="-228594" algn="l" defTabSz="914377" rtl="0" eaLnBrk="1" latinLnBrk="0" hangingPunct="1">
         <a:lnSpc>
           <a:spcPct val="90000"/>
         </a:lnSpc>
@@ -3081,7 +3709,7 @@
           <a:cs typeface="+mn-cs"/>
         </a:defRPr>
       </a:lvl1pPr>
-      <a:lvl2pPr marL="685800" indent="-228600" algn="l" defTabSz="914400" rtl="0" eaLnBrk="1" latinLnBrk="0" hangingPunct="1">
+      <a:lvl2pPr marL="685783" indent="-228594" algn="l" defTabSz="914377" rtl="0" eaLnBrk="1" latinLnBrk="0" hangingPunct="1">
         <a:lnSpc>
           <a:spcPct val="90000"/>
         </a:lnSpc>
@@ -3099,7 +3727,7 @@
           <a:cs typeface="+mn-cs"/>
         </a:defRPr>
       </a:lvl2pPr>
-      <a:lvl3pPr marL="1143000" indent="-228600" algn="l" defTabSz="914400" rtl="0" eaLnBrk="1" latinLnBrk="0" hangingPunct="1">
+      <a:lvl3pPr marL="1142971" indent="-228594" algn="l" defTabSz="914377" rtl="0" eaLnBrk="1" latinLnBrk="0" hangingPunct="1">
         <a:lnSpc>
           <a:spcPct val="90000"/>
         </a:lnSpc>
@@ -3117,7 +3745,7 @@
           <a:cs typeface="+mn-cs"/>
         </a:defRPr>
       </a:lvl3pPr>
-      <a:lvl4pPr marL="1600200" indent="-228600" algn="l" defTabSz="914400" rtl="0" eaLnBrk="1" latinLnBrk="0" hangingPunct="1">
+      <a:lvl4pPr marL="1600160" indent="-228594" algn="l" defTabSz="914377" rtl="0" eaLnBrk="1" latinLnBrk="0" hangingPunct="1">
         <a:lnSpc>
           <a:spcPct val="90000"/>
         </a:lnSpc>
@@ -3135,7 +3763,7 @@
           <a:cs typeface="+mn-cs"/>
         </a:defRPr>
       </a:lvl4pPr>
-      <a:lvl5pPr marL="2057400" indent="-228600" algn="l" defTabSz="914400" rtl="0" eaLnBrk="1" latinLnBrk="0" hangingPunct="1">
+      <a:lvl5pPr marL="2057349" indent="-228594" algn="l" defTabSz="914377" rtl="0" eaLnBrk="1" latinLnBrk="0" hangingPunct="1">
         <a:lnSpc>
           <a:spcPct val="90000"/>
         </a:lnSpc>
@@ -3153,7 +3781,7 @@
           <a:cs typeface="+mn-cs"/>
         </a:defRPr>
       </a:lvl5pPr>
-      <a:lvl6pPr marL="2514600" indent="-228600" algn="l" defTabSz="914400" rtl="0" eaLnBrk="1" latinLnBrk="0" hangingPunct="1">
+      <a:lvl6pPr marL="2514537" indent="-228594" algn="l" defTabSz="914377" rtl="0" eaLnBrk="1" latinLnBrk="0" hangingPunct="1">
         <a:lnSpc>
           <a:spcPct val="90000"/>
         </a:lnSpc>
@@ -3171,7 +3799,7 @@
           <a:cs typeface="+mn-cs"/>
         </a:defRPr>
       </a:lvl6pPr>
-      <a:lvl7pPr marL="2971800" indent="-228600" algn="l" defTabSz="914400" rtl="0" eaLnBrk="1" latinLnBrk="0" hangingPunct="1">
+      <a:lvl7pPr marL="2971726" indent="-228594" algn="l" defTabSz="914377" rtl="0" eaLnBrk="1" latinLnBrk="0" hangingPunct="1">
         <a:lnSpc>
           <a:spcPct val="90000"/>
         </a:lnSpc>
@@ -3189,7 +3817,7 @@
           <a:cs typeface="+mn-cs"/>
         </a:defRPr>
       </a:lvl7pPr>
-      <a:lvl8pPr marL="3429000" indent="-228600" algn="l" defTabSz="914400" rtl="0" eaLnBrk="1" latinLnBrk="0" hangingPunct="1">
+      <a:lvl8pPr marL="3428914" indent="-228594" algn="l" defTabSz="914377" rtl="0" eaLnBrk="1" latinLnBrk="0" hangingPunct="1">
         <a:lnSpc>
           <a:spcPct val="90000"/>
         </a:lnSpc>
@@ -3207,7 +3835,7 @@
           <a:cs typeface="+mn-cs"/>
         </a:defRPr>
       </a:lvl8pPr>
-      <a:lvl9pPr marL="3886200" indent="-228600" algn="l" defTabSz="914400" rtl="0" eaLnBrk="1" latinLnBrk="0" hangingPunct="1">
+      <a:lvl9pPr marL="3886103" indent="-228594" algn="l" defTabSz="914377" rtl="0" eaLnBrk="1" latinLnBrk="0" hangingPunct="1">
         <a:lnSpc>
           <a:spcPct val="90000"/>
         </a:lnSpc>
@@ -3230,7 +3858,7 @@
       <a:defPPr>
         <a:defRPr lang="es-CO"/>
       </a:defPPr>
-      <a:lvl1pPr marL="0" algn="l" defTabSz="914400" rtl="0" eaLnBrk="1" latinLnBrk="0" hangingPunct="1">
+      <a:lvl1pPr marL="0" algn="l" defTabSz="914377" rtl="0" eaLnBrk="1" latinLnBrk="0" hangingPunct="1">
         <a:defRPr sz="1800" kern="1200">
           <a:solidFill>
             <a:schemeClr val="tx1"/>
@@ -3240,7 +3868,7 @@
           <a:cs typeface="+mn-cs"/>
         </a:defRPr>
       </a:lvl1pPr>
-      <a:lvl2pPr marL="457200" algn="l" defTabSz="914400" rtl="0" eaLnBrk="1" latinLnBrk="0" hangingPunct="1">
+      <a:lvl2pPr marL="457189" algn="l" defTabSz="914377" rtl="0" eaLnBrk="1" latinLnBrk="0" hangingPunct="1">
         <a:defRPr sz="1800" kern="1200">
           <a:solidFill>
             <a:schemeClr val="tx1"/>
@@ -3250,7 +3878,7 @@
           <a:cs typeface="+mn-cs"/>
         </a:defRPr>
       </a:lvl2pPr>
-      <a:lvl3pPr marL="914400" algn="l" defTabSz="914400" rtl="0" eaLnBrk="1" latinLnBrk="0" hangingPunct="1">
+      <a:lvl3pPr marL="914377" algn="l" defTabSz="914377" rtl="0" eaLnBrk="1" latinLnBrk="0" hangingPunct="1">
         <a:defRPr sz="1800" kern="1200">
           <a:solidFill>
             <a:schemeClr val="tx1"/>
@@ -3260,7 +3888,7 @@
           <a:cs typeface="+mn-cs"/>
         </a:defRPr>
       </a:lvl3pPr>
-      <a:lvl4pPr marL="1371600" algn="l" defTabSz="914400" rtl="0" eaLnBrk="1" latinLnBrk="0" hangingPunct="1">
+      <a:lvl4pPr marL="1371566" algn="l" defTabSz="914377" rtl="0" eaLnBrk="1" latinLnBrk="0" hangingPunct="1">
         <a:defRPr sz="1800" kern="1200">
           <a:solidFill>
             <a:schemeClr val="tx1"/>
@@ -3270,7 +3898,7 @@
           <a:cs typeface="+mn-cs"/>
         </a:defRPr>
       </a:lvl4pPr>
-      <a:lvl5pPr marL="1828800" algn="l" defTabSz="914400" rtl="0" eaLnBrk="1" latinLnBrk="0" hangingPunct="1">
+      <a:lvl5pPr marL="1828754" algn="l" defTabSz="914377" rtl="0" eaLnBrk="1" latinLnBrk="0" hangingPunct="1">
         <a:defRPr sz="1800" kern="1200">
           <a:solidFill>
             <a:schemeClr val="tx1"/>
@@ -3280,7 +3908,7 @@
           <a:cs typeface="+mn-cs"/>
         </a:defRPr>
       </a:lvl5pPr>
-      <a:lvl6pPr marL="2286000" algn="l" defTabSz="914400" rtl="0" eaLnBrk="1" latinLnBrk="0" hangingPunct="1">
+      <a:lvl6pPr marL="2285943" algn="l" defTabSz="914377" rtl="0" eaLnBrk="1" latinLnBrk="0" hangingPunct="1">
         <a:defRPr sz="1800" kern="1200">
           <a:solidFill>
             <a:schemeClr val="tx1"/>
@@ -3290,7 +3918,7 @@
           <a:cs typeface="+mn-cs"/>
         </a:defRPr>
       </a:lvl6pPr>
-      <a:lvl7pPr marL="2743200" algn="l" defTabSz="914400" rtl="0" eaLnBrk="1" latinLnBrk="0" hangingPunct="1">
+      <a:lvl7pPr marL="2743131" algn="l" defTabSz="914377" rtl="0" eaLnBrk="1" latinLnBrk="0" hangingPunct="1">
         <a:defRPr sz="1800" kern="1200">
           <a:solidFill>
             <a:schemeClr val="tx1"/>
@@ -3300,7 +3928,7 @@
           <a:cs typeface="+mn-cs"/>
         </a:defRPr>
       </a:lvl7pPr>
-      <a:lvl8pPr marL="3200400" algn="l" defTabSz="914400" rtl="0" eaLnBrk="1" latinLnBrk="0" hangingPunct="1">
+      <a:lvl8pPr marL="3200320" algn="l" defTabSz="914377" rtl="0" eaLnBrk="1" latinLnBrk="0" hangingPunct="1">
         <a:defRPr sz="1800" kern="1200">
           <a:solidFill>
             <a:schemeClr val="tx1"/>
@@ -3310,7 +3938,7 @@
           <a:cs typeface="+mn-cs"/>
         </a:defRPr>
       </a:lvl8pPr>
-      <a:lvl9pPr marL="3657600" algn="l" defTabSz="914400" rtl="0" eaLnBrk="1" latinLnBrk="0" hangingPunct="1">
+      <a:lvl9pPr marL="3657509" algn="l" defTabSz="914377" rtl="0" eaLnBrk="1" latinLnBrk="0" hangingPunct="1">
         <a:defRPr sz="1800" kern="1200">
           <a:solidFill>
             <a:schemeClr val="tx1"/>
@@ -3464,8 +4092,8 @@
         </p:nvSpPr>
         <p:spPr>
           <a:xfrm rot="16200000">
-            <a:off x="4568338" y="2303602"/>
-            <a:ext cx="1537734" cy="216000"/>
+            <a:off x="4568340" y="2303603"/>
+            <a:ext cx="1537735" cy="216000"/>
           </a:xfrm>
           <a:prstGeom prst="roundRect">
             <a:avLst/>
@@ -3518,8 +4146,8 @@
         </p:nvSpPr>
         <p:spPr>
           <a:xfrm rot="19814728">
-            <a:off x="3950861" y="3472423"/>
-            <a:ext cx="1537734" cy="216000"/>
+            <a:off x="3950864" y="3472423"/>
+            <a:ext cx="1537735" cy="216000"/>
           </a:xfrm>
           <a:prstGeom prst="roundRect">
             <a:avLst/>
@@ -3572,8 +4200,8 @@
         </p:nvSpPr>
         <p:spPr>
           <a:xfrm rot="3837572">
-            <a:off x="2924472" y="2972558"/>
-            <a:ext cx="1537734" cy="216000"/>
+            <a:off x="2924475" y="2972559"/>
+            <a:ext cx="1537735" cy="216000"/>
           </a:xfrm>
           <a:prstGeom prst="roundRect">
             <a:avLst/>
@@ -3626,7 +4254,7 @@
         </p:nvSpPr>
         <p:spPr>
           <a:xfrm rot="19933396">
-            <a:off x="1392998" y="2631910"/>
+            <a:off x="1392999" y="2631911"/>
             <a:ext cx="1870661" cy="216000"/>
           </a:xfrm>
           <a:prstGeom prst="roundRect">
@@ -3682,7 +4310,7 @@
         </p:nvCxnSpPr>
         <p:spPr>
           <a:xfrm>
-            <a:off x="3434314" y="2528620"/>
+            <a:off x="3434315" y="2528620"/>
             <a:ext cx="537304" cy="1113616"/>
           </a:xfrm>
           <a:prstGeom prst="straightConnector1">
@@ -3823,7 +4451,7 @@
         </p:nvSpPr>
         <p:spPr>
           <a:xfrm>
-            <a:off x="5100327" y="2976706"/>
+            <a:off x="5100327" y="2976707"/>
             <a:ext cx="504000" cy="540000"/>
           </a:xfrm>
           <a:prstGeom prst="ellipse">
@@ -3919,7 +4547,7 @@
         </p:nvSpPr>
         <p:spPr>
           <a:xfrm>
-            <a:off x="3827530" y="3643242"/>
+            <a:off x="3827531" y="3643243"/>
             <a:ext cx="504000" cy="540000"/>
           </a:xfrm>
           <a:prstGeom prst="ellipse">
@@ -3967,7 +4595,7 @@
         </p:nvSpPr>
         <p:spPr>
           <a:xfrm>
-            <a:off x="2231522" y="4559325"/>
+            <a:off x="2231523" y="4559325"/>
             <a:ext cx="504000" cy="540000"/>
           </a:xfrm>
           <a:prstGeom prst="ellipse">
@@ -4065,7 +4693,7 @@
         </p:nvCxnSpPr>
         <p:spPr>
           <a:xfrm flipV="1">
-            <a:off x="2540628" y="2541946"/>
+            <a:off x="2540629" y="2541949"/>
             <a:ext cx="646372" cy="2017211"/>
           </a:xfrm>
           <a:prstGeom prst="straightConnector1">
@@ -4112,8 +4740,8 @@
         </p:nvCxnSpPr>
         <p:spPr>
           <a:xfrm>
-            <a:off x="3516010" y="2402816"/>
-            <a:ext cx="1605032" cy="718054"/>
+            <a:off x="3516011" y="2402819"/>
+            <a:ext cx="1605032" cy="718055"/>
           </a:xfrm>
           <a:prstGeom prst="straightConnector1">
             <a:avLst/>
@@ -4159,7 +4787,7 @@
         </p:nvCxnSpPr>
         <p:spPr>
           <a:xfrm flipV="1">
-            <a:off x="2653237" y="4018989"/>
+            <a:off x="2653240" y="4018992"/>
             <a:ext cx="1174293" cy="637487"/>
           </a:xfrm>
           <a:prstGeom prst="straightConnector1">
@@ -4206,8 +4834,8 @@
         </p:nvCxnSpPr>
         <p:spPr>
           <a:xfrm flipV="1">
-            <a:off x="4307004" y="3357487"/>
-            <a:ext cx="793323" cy="427666"/>
+            <a:off x="4307007" y="3357489"/>
+            <a:ext cx="793323" cy="427667"/>
           </a:xfrm>
           <a:prstGeom prst="straightConnector1">
             <a:avLst/>
@@ -4251,8 +4879,8 @@
         </p:nvGrpSpPr>
         <p:grpSpPr>
           <a:xfrm rot="19971564">
-            <a:off x="1942445" y="2632430"/>
-            <a:ext cx="518548" cy="108930"/>
+            <a:off x="1942446" y="2632431"/>
+            <a:ext cx="518548" cy="108931"/>
             <a:chOff x="7777424" y="2883875"/>
             <a:chExt cx="593258" cy="137455"/>
           </a:xfrm>
@@ -4416,7 +5044,7 @@
         </p:nvGrpSpPr>
         <p:grpSpPr>
           <a:xfrm rot="3788728">
-            <a:off x="3600863" y="3037398"/>
+            <a:off x="3600863" y="3037402"/>
             <a:ext cx="470144" cy="120145"/>
             <a:chOff x="7777424" y="2883875"/>
             <a:chExt cx="593258" cy="137455"/>
@@ -4581,8 +5209,8 @@
         </p:nvGrpSpPr>
         <p:grpSpPr>
           <a:xfrm rot="20362009">
-            <a:off x="4032827" y="1713090"/>
-            <a:ext cx="518548" cy="108930"/>
+            <a:off x="4032827" y="1713091"/>
+            <a:ext cx="518548" cy="108931"/>
             <a:chOff x="7777424" y="2883875"/>
             <a:chExt cx="593258" cy="137455"/>
           </a:xfrm>
@@ -4746,8 +5374,8 @@
         </p:nvGrpSpPr>
         <p:grpSpPr>
           <a:xfrm rot="16200000">
-            <a:off x="5180697" y="2311305"/>
-            <a:ext cx="518548" cy="108930"/>
+            <a:off x="5180698" y="2311307"/>
+            <a:ext cx="518548" cy="108931"/>
             <a:chOff x="7777424" y="2883875"/>
             <a:chExt cx="593258" cy="137455"/>
           </a:xfrm>
@@ -4911,8 +5539,8 @@
         </p:nvGrpSpPr>
         <p:grpSpPr>
           <a:xfrm rot="12233250">
-            <a:off x="4210465" y="2669847"/>
-            <a:ext cx="518548" cy="108930"/>
+            <a:off x="4210466" y="2669849"/>
+            <a:ext cx="518548" cy="108931"/>
             <a:chOff x="7777424" y="2883875"/>
             <a:chExt cx="593258" cy="137455"/>
           </a:xfrm>
@@ -5076,8 +5704,8 @@
         </p:nvGrpSpPr>
         <p:grpSpPr>
           <a:xfrm rot="19931559">
-            <a:off x="2953527" y="4415592"/>
-            <a:ext cx="518548" cy="108930"/>
+            <a:off x="2953527" y="4415594"/>
+            <a:ext cx="518548" cy="108931"/>
             <a:chOff x="7777424" y="2883875"/>
             <a:chExt cx="593258" cy="137455"/>
           </a:xfrm>
@@ -5241,8 +5869,8 @@
         </p:nvGrpSpPr>
         <p:grpSpPr>
           <a:xfrm rot="7123298">
-            <a:off x="4805701" y="4038776"/>
-            <a:ext cx="518548" cy="108930"/>
+            <a:off x="4805702" y="4038778"/>
+            <a:ext cx="518548" cy="108931"/>
             <a:chOff x="7777424" y="2883875"/>
             <a:chExt cx="593258" cy="137455"/>
           </a:xfrm>
@@ -5406,8 +6034,8 @@
         </p:nvGrpSpPr>
         <p:grpSpPr>
           <a:xfrm>
-            <a:off x="3138640" y="4877980"/>
-            <a:ext cx="518548" cy="108930"/>
+            <a:off x="3138641" y="4877982"/>
+            <a:ext cx="518548" cy="108931"/>
             <a:chOff x="7777424" y="2883875"/>
             <a:chExt cx="593258" cy="137455"/>
           </a:xfrm>
@@ -5571,8 +6199,8 @@
         </p:nvGrpSpPr>
         <p:grpSpPr>
           <a:xfrm rot="1631157">
-            <a:off x="2179452" y="3814768"/>
-            <a:ext cx="518548" cy="108930"/>
+            <a:off x="2179453" y="3814770"/>
+            <a:ext cx="518548" cy="108931"/>
             <a:chOff x="7777424" y="2883875"/>
             <a:chExt cx="593258" cy="137455"/>
           </a:xfrm>
@@ -5736,8 +6364,8 @@
         </p:nvGrpSpPr>
         <p:grpSpPr>
           <a:xfrm rot="6499666">
-            <a:off x="2696823" y="3525142"/>
-            <a:ext cx="518548" cy="108930"/>
+            <a:off x="2696823" y="3525143"/>
+            <a:ext cx="518548" cy="108931"/>
             <a:chOff x="7777424" y="2883875"/>
             <a:chExt cx="593258" cy="137455"/>
           </a:xfrm>
@@ -5901,8 +6529,8 @@
         </p:nvGrpSpPr>
         <p:grpSpPr>
           <a:xfrm rot="17255206">
-            <a:off x="2539990" y="3309520"/>
-            <a:ext cx="518548" cy="108930"/>
+            <a:off x="2539991" y="3309522"/>
+            <a:ext cx="518548" cy="108931"/>
             <a:chOff x="7777424" y="2883875"/>
             <a:chExt cx="593258" cy="137455"/>
           </a:xfrm>
@@ -6067,7 +6695,7 @@
         <p:grpSpPr>
           <a:xfrm rot="3389364">
             <a:off x="1521371" y="3966352"/>
-            <a:ext cx="518548" cy="108930"/>
+            <a:ext cx="518548" cy="108931"/>
             <a:chOff x="7777424" y="2883875"/>
             <a:chExt cx="593258" cy="137455"/>
           </a:xfrm>
@@ -6231,8 +6859,8 @@
         </p:nvGrpSpPr>
         <p:grpSpPr>
           <a:xfrm rot="19931559">
-            <a:off x="4485291" y="3605804"/>
-            <a:ext cx="518548" cy="108930"/>
+            <a:off x="4485291" y="3605806"/>
+            <a:ext cx="518548" cy="108931"/>
             <a:chOff x="7777424" y="2883875"/>
             <a:chExt cx="593258" cy="137455"/>
           </a:xfrm>
@@ -6405,8 +7033,8 @@
               </p:nvPr>
             </p:nvGraphicFramePr>
             <p:xfrm>
-              <a:off x="6603078" y="1978187"/>
-              <a:ext cx="4712624" cy="2761452"/>
+              <a:off x="6603079" y="1978187"/>
+              <a:ext cx="4712624" cy="2761458"/>
             </p:xfrm>
             <a:graphic>
               <a:graphicData uri="http://schemas.openxmlformats.org/drawingml/2006/table">
@@ -6465,14 +7093,14 @@
                       </a:extLst>
                     </a:gridCol>
                   </a:tblGrid>
-                  <a:tr h="466362">
+                  <a:tr h="466363">
                     <a:tc>
                       <a:txBody>
                         <a:bodyPr/>
                         <a:lstStyle/>
                         <a:p>
                           <a:pPr algn="ctr"/>
-                          <a:endParaRPr lang="es-CO"/>
+                          <a:endParaRPr lang="es-CO" sz="1300"/>
                         </a:p>
                       </a:txBody>
                       <a:tcPr anchor="ctr"/>
@@ -6567,7 +7195,7 @@
                       </a:ext>
                     </a:extLst>
                   </a:tr>
-                  <a:tr h="459018">
+                  <a:tr h="459019">
                     <a:tc>
                       <a:txBody>
                         <a:bodyPr/>
@@ -6613,7 +7241,7 @@
                                 <m:sSub>
                                   <m:sSubPr>
                                     <m:ctrlPr>
-                                      <a:rPr lang="es-CO" sz="1400" b="0" i="1" smtClean="0">
+                                      <a:rPr lang="es-CO" sz="1500" b="0" i="1" smtClean="0">
                                         <a:latin typeface="Cambria Math" panose="02040503050406030204" pitchFamily="18" charset="0"/>
                                         <a:ea typeface="Cambria Math" panose="02040503050406030204" pitchFamily="18" charset="0"/>
                                         <a:cs typeface="Shruti" panose="020B0502040204020203" pitchFamily="34" charset="0"/>
@@ -6622,7 +7250,7 @@
                                   </m:sSubPr>
                                   <m:e>
                                     <m:r>
-                                      <a:rPr lang="es-CO" sz="1400" b="0" i="1" smtClean="0">
+                                      <a:rPr lang="es-CO" sz="1500" b="0" i="1" smtClean="0">
                                         <a:latin typeface="Cambria Math" panose="02040503050406030204" pitchFamily="18" charset="0"/>
                                         <a:ea typeface="Cambria Math" panose="02040503050406030204" pitchFamily="18" charset="0"/>
                                         <a:cs typeface="Shruti" panose="020B0502040204020203" pitchFamily="34" charset="0"/>
@@ -6632,7 +7260,7 @@
                                   </m:e>
                                   <m:sub>
                                     <m:r>
-                                      <a:rPr lang="es-CO" sz="1400" b="0" i="1" smtClean="0">
+                                      <a:rPr lang="es-CO" sz="1500" b="0" i="1" smtClean="0">
                                         <a:latin typeface="Cambria Math" panose="02040503050406030204" pitchFamily="18" charset="0"/>
                                         <a:ea typeface="Cambria Math" panose="02040503050406030204" pitchFamily="18" charset="0"/>
                                         <a:cs typeface="Shruti" panose="020B0502040204020203" pitchFamily="34" charset="0"/>
@@ -6644,7 +7272,7 @@
                               </m:oMath>
                             </m:oMathPara>
                           </a14:m>
-                          <a:endParaRPr lang="es-CO" sz="1400" dirty="0">
+                          <a:endParaRPr lang="es-CO" sz="1500" dirty="0">
                             <a:latin typeface="Cambria Math" panose="02040503050406030204" pitchFamily="18" charset="0"/>
                             <a:ea typeface="Cambria Math" panose="02040503050406030204" pitchFamily="18" charset="0"/>
                             <a:cs typeface="Shruti" panose="020B0502040204020203" pitchFamily="34" charset="0"/>
@@ -6684,7 +7312,7 @@
                                 <m:sSub>
                                   <m:sSubPr>
                                     <m:ctrlPr>
-                                      <a:rPr lang="es-CO" sz="1400" b="0" i="1" smtClean="0">
+                                      <a:rPr lang="es-CO" sz="1500" b="0" i="1" smtClean="0">
                                         <a:latin typeface="Cambria Math" panose="02040503050406030204" pitchFamily="18" charset="0"/>
                                         <a:ea typeface="Cambria Math" panose="02040503050406030204" pitchFamily="18" charset="0"/>
                                         <a:cs typeface="Shruti" panose="020B0502040204020203" pitchFamily="34" charset="0"/>
@@ -6693,7 +7321,7 @@
                                   </m:sSubPr>
                                   <m:e>
                                     <m:r>
-                                      <a:rPr lang="es-CO" sz="1400" b="0" i="1" smtClean="0">
+                                      <a:rPr lang="es-CO" sz="1500" b="0" i="1" smtClean="0">
                                         <a:latin typeface="Cambria Math" panose="02040503050406030204" pitchFamily="18" charset="0"/>
                                         <a:ea typeface="Cambria Math" panose="02040503050406030204" pitchFamily="18" charset="0"/>
                                         <a:cs typeface="Shruti" panose="020B0502040204020203" pitchFamily="34" charset="0"/>
@@ -6703,27 +7331,19 @@
                                   </m:e>
                                   <m:sub>
                                     <m:r>
-                                      <a:rPr lang="es-CO" sz="1400" b="0" i="1" smtClean="0">
+                                      <a:rPr lang="es-CO" sz="1500" b="0" i="1" smtClean="0">
                                         <a:latin typeface="Cambria Math" panose="02040503050406030204" pitchFamily="18" charset="0"/>
                                         <a:ea typeface="Cambria Math" panose="02040503050406030204" pitchFamily="18" charset="0"/>
                                         <a:cs typeface="Shruti" panose="020B0502040204020203" pitchFamily="34" charset="0"/>
                                       </a:rPr>
-                                      <m:t>1</m:t>
-                                    </m:r>
-                                    <m:r>
-                                      <a:rPr lang="es-CO" sz="1400" b="0" i="1" smtClean="0">
-                                        <a:latin typeface="Cambria Math" panose="02040503050406030204" pitchFamily="18" charset="0"/>
-                                        <a:ea typeface="Cambria Math" panose="02040503050406030204" pitchFamily="18" charset="0"/>
-                                        <a:cs typeface="Shruti" panose="020B0502040204020203" pitchFamily="34" charset="0"/>
-                                      </a:rPr>
-                                      <m:t>3</m:t>
+                                      <m:t>13</m:t>
                                     </m:r>
                                   </m:sub>
                                 </m:sSub>
                               </m:oMath>
                             </m:oMathPara>
                           </a14:m>
-                          <a:endParaRPr lang="es-CO" sz="1400" dirty="0">
+                          <a:endParaRPr lang="es-CO" sz="1500" dirty="0">
                             <a:latin typeface="Cambria Math" panose="02040503050406030204" pitchFamily="18" charset="0"/>
                             <a:ea typeface="Cambria Math" panose="02040503050406030204" pitchFamily="18" charset="0"/>
                             <a:cs typeface="Shruti" panose="020B0502040204020203" pitchFamily="34" charset="0"/>
@@ -6763,7 +7383,7 @@
                                 <m:sSub>
                                   <m:sSubPr>
                                     <m:ctrlPr>
-                                      <a:rPr lang="es-CO" sz="1400" b="0" i="1" smtClean="0">
+                                      <a:rPr lang="es-CO" sz="1500" b="0" i="1" smtClean="0">
                                         <a:latin typeface="Cambria Math" panose="02040503050406030204" pitchFamily="18" charset="0"/>
                                         <a:ea typeface="Cambria Math" panose="02040503050406030204" pitchFamily="18" charset="0"/>
                                         <a:cs typeface="Shruti" panose="020B0502040204020203" pitchFamily="34" charset="0"/>
@@ -6772,7 +7392,7 @@
                                   </m:sSubPr>
                                   <m:e>
                                     <m:r>
-                                      <a:rPr lang="es-CO" sz="1400" b="0" i="1" smtClean="0">
+                                      <a:rPr lang="es-CO" sz="1500" b="0" i="1" smtClean="0">
                                         <a:latin typeface="Cambria Math" panose="02040503050406030204" pitchFamily="18" charset="0"/>
                                         <a:ea typeface="Cambria Math" panose="02040503050406030204" pitchFamily="18" charset="0"/>
                                         <a:cs typeface="Shruti" panose="020B0502040204020203" pitchFamily="34" charset="0"/>
@@ -6782,27 +7402,19 @@
                                   </m:e>
                                   <m:sub>
                                     <m:r>
-                                      <a:rPr lang="es-CO" sz="1400" b="0" i="1" smtClean="0">
+                                      <a:rPr lang="es-CO" sz="1500" b="0" i="1" smtClean="0">
                                         <a:latin typeface="Cambria Math" panose="02040503050406030204" pitchFamily="18" charset="0"/>
                                         <a:ea typeface="Cambria Math" panose="02040503050406030204" pitchFamily="18" charset="0"/>
                                         <a:cs typeface="Shruti" panose="020B0502040204020203" pitchFamily="34" charset="0"/>
                                       </a:rPr>
-                                      <m:t>1</m:t>
-                                    </m:r>
-                                    <m:r>
-                                      <a:rPr lang="es-CO" sz="1400" b="0" i="1" smtClean="0">
-                                        <a:latin typeface="Cambria Math" panose="02040503050406030204" pitchFamily="18" charset="0"/>
-                                        <a:ea typeface="Cambria Math" panose="02040503050406030204" pitchFamily="18" charset="0"/>
-                                        <a:cs typeface="Shruti" panose="020B0502040204020203" pitchFamily="34" charset="0"/>
-                                      </a:rPr>
-                                      <m:t>4</m:t>
+                                      <m:t>14</m:t>
                                     </m:r>
                                   </m:sub>
                                 </m:sSub>
                               </m:oMath>
                             </m:oMathPara>
                           </a14:m>
-                          <a:endParaRPr lang="es-CO" sz="1400" dirty="0">
+                          <a:endParaRPr lang="es-CO" sz="1500" dirty="0">
                             <a:latin typeface="Cambria Math" panose="02040503050406030204" pitchFamily="18" charset="0"/>
                             <a:ea typeface="Cambria Math" panose="02040503050406030204" pitchFamily="18" charset="0"/>
                             <a:cs typeface="Shruti" panose="020B0502040204020203" pitchFamily="34" charset="0"/>
@@ -6842,7 +7454,7 @@
                                 <m:sSub>
                                   <m:sSubPr>
                                     <m:ctrlPr>
-                                      <a:rPr lang="es-CO" sz="1400" b="0" i="1" smtClean="0">
+                                      <a:rPr lang="es-CO" sz="1500" b="0" i="1" smtClean="0">
                                         <a:latin typeface="Cambria Math" panose="02040503050406030204" pitchFamily="18" charset="0"/>
                                         <a:ea typeface="Cambria Math" panose="02040503050406030204" pitchFamily="18" charset="0"/>
                                         <a:cs typeface="Shruti" panose="020B0502040204020203" pitchFamily="34" charset="0"/>
@@ -6851,7 +7463,7 @@
                                   </m:sSubPr>
                                   <m:e>
                                     <m:r>
-                                      <a:rPr lang="es-CO" sz="1400" b="0" i="1" smtClean="0">
+                                      <a:rPr lang="es-CO" sz="1500" b="0" i="1" smtClean="0">
                                         <a:latin typeface="Cambria Math" panose="02040503050406030204" pitchFamily="18" charset="0"/>
                                         <a:ea typeface="Cambria Math" panose="02040503050406030204" pitchFamily="18" charset="0"/>
                                         <a:cs typeface="Shruti" panose="020B0502040204020203" pitchFamily="34" charset="0"/>
@@ -6861,27 +7473,19 @@
                                   </m:e>
                                   <m:sub>
                                     <m:r>
-                                      <a:rPr lang="es-CO" sz="1400" b="0" i="1" smtClean="0">
+                                      <a:rPr lang="es-CO" sz="1500" b="0" i="1" smtClean="0">
                                         <a:latin typeface="Cambria Math" panose="02040503050406030204" pitchFamily="18" charset="0"/>
                                         <a:ea typeface="Cambria Math" panose="02040503050406030204" pitchFamily="18" charset="0"/>
                                         <a:cs typeface="Shruti" panose="020B0502040204020203" pitchFamily="34" charset="0"/>
                                       </a:rPr>
-                                      <m:t>1</m:t>
-                                    </m:r>
-                                    <m:r>
-                                      <a:rPr lang="es-CO" sz="1400" b="0" i="1" smtClean="0">
-                                        <a:latin typeface="Cambria Math" panose="02040503050406030204" pitchFamily="18" charset="0"/>
-                                        <a:ea typeface="Cambria Math" panose="02040503050406030204" pitchFamily="18" charset="0"/>
-                                        <a:cs typeface="Shruti" panose="020B0502040204020203" pitchFamily="34" charset="0"/>
-                                      </a:rPr>
-                                      <m:t>5</m:t>
+                                      <m:t>15</m:t>
                                     </m:r>
                                   </m:sub>
                                 </m:sSub>
                               </m:oMath>
                             </m:oMathPara>
                           </a14:m>
-                          <a:endParaRPr lang="es-CO" sz="1400" dirty="0">
+                          <a:endParaRPr lang="es-CO" sz="1500" dirty="0">
                             <a:latin typeface="Cambria Math" panose="02040503050406030204" pitchFamily="18" charset="0"/>
                             <a:ea typeface="Cambria Math" panose="02040503050406030204" pitchFamily="18" charset="0"/>
                             <a:cs typeface="Shruti" panose="020B0502040204020203" pitchFamily="34" charset="0"/>
@@ -6921,7 +7525,7 @@
                                 <m:sSub>
                                   <m:sSubPr>
                                     <m:ctrlPr>
-                                      <a:rPr lang="es-CO" sz="1400" b="0" i="1" smtClean="0">
+                                      <a:rPr lang="es-CO" sz="1500" b="0" i="1" smtClean="0">
                                         <a:latin typeface="Cambria Math" panose="02040503050406030204" pitchFamily="18" charset="0"/>
                                         <a:ea typeface="Cambria Math" panose="02040503050406030204" pitchFamily="18" charset="0"/>
                                         <a:cs typeface="Shruti" panose="020B0502040204020203" pitchFamily="34" charset="0"/>
@@ -6930,7 +7534,7 @@
                                   </m:sSubPr>
                                   <m:e>
                                     <m:r>
-                                      <a:rPr lang="es-CO" sz="1400" b="0" i="1" smtClean="0">
+                                      <a:rPr lang="es-CO" sz="1500" b="0" i="1" smtClean="0">
                                         <a:latin typeface="Cambria Math" panose="02040503050406030204" pitchFamily="18" charset="0"/>
                                         <a:ea typeface="Cambria Math" panose="02040503050406030204" pitchFamily="18" charset="0"/>
                                         <a:cs typeface="Shruti" panose="020B0502040204020203" pitchFamily="34" charset="0"/>
@@ -6940,27 +7544,19 @@
                                   </m:e>
                                   <m:sub>
                                     <m:r>
-                                      <a:rPr lang="es-CO" sz="1400" b="0" i="1" smtClean="0">
+                                      <a:rPr lang="es-CO" sz="1500" b="0" i="1" smtClean="0">
                                         <a:latin typeface="Cambria Math" panose="02040503050406030204" pitchFamily="18" charset="0"/>
                                         <a:ea typeface="Cambria Math" panose="02040503050406030204" pitchFamily="18" charset="0"/>
                                         <a:cs typeface="Shruti" panose="020B0502040204020203" pitchFamily="34" charset="0"/>
                                       </a:rPr>
-                                      <m:t>1</m:t>
-                                    </m:r>
-                                    <m:r>
-                                      <a:rPr lang="es-CO" sz="1400" b="0" i="1" smtClean="0">
-                                        <a:latin typeface="Cambria Math" panose="02040503050406030204" pitchFamily="18" charset="0"/>
-                                        <a:ea typeface="Cambria Math" panose="02040503050406030204" pitchFamily="18" charset="0"/>
-                                        <a:cs typeface="Shruti" panose="020B0502040204020203" pitchFamily="34" charset="0"/>
-                                      </a:rPr>
-                                      <m:t>6</m:t>
+                                      <m:t>16</m:t>
                                     </m:r>
                                   </m:sub>
                                 </m:sSub>
                               </m:oMath>
                             </m:oMathPara>
                           </a14:m>
-                          <a:endParaRPr lang="es-CO" sz="1400" dirty="0">
+                          <a:endParaRPr lang="es-CO" sz="1500" dirty="0">
                             <a:latin typeface="Cambria Math" panose="02040503050406030204" pitchFamily="18" charset="0"/>
                             <a:ea typeface="Cambria Math" panose="02040503050406030204" pitchFamily="18" charset="0"/>
                             <a:cs typeface="Shruti" panose="020B0502040204020203" pitchFamily="34" charset="0"/>
@@ -7000,7 +7596,7 @@
                                 <m:sSub>
                                   <m:sSubPr>
                                     <m:ctrlPr>
-                                      <a:rPr lang="es-CO" sz="1400" b="0" i="1" smtClean="0">
+                                      <a:rPr lang="es-CO" sz="1500" b="0" i="1" smtClean="0">
                                         <a:latin typeface="Cambria Math" panose="02040503050406030204" pitchFamily="18" charset="0"/>
                                         <a:ea typeface="Cambria Math" panose="02040503050406030204" pitchFamily="18" charset="0"/>
                                         <a:cs typeface="Shruti" panose="020B0502040204020203" pitchFamily="34" charset="0"/>
@@ -7009,7 +7605,7 @@
                                   </m:sSubPr>
                                   <m:e>
                                     <m:r>
-                                      <a:rPr lang="es-CO" sz="1400" b="0" i="1" smtClean="0">
+                                      <a:rPr lang="es-CO" sz="1500" b="0" i="1" smtClean="0">
                                         <a:latin typeface="Cambria Math" panose="02040503050406030204" pitchFamily="18" charset="0"/>
                                         <a:ea typeface="Cambria Math" panose="02040503050406030204" pitchFamily="18" charset="0"/>
                                         <a:cs typeface="Shruti" panose="020B0502040204020203" pitchFamily="34" charset="0"/>
@@ -7019,27 +7615,19 @@
                                   </m:e>
                                   <m:sub>
                                     <m:r>
-                                      <a:rPr lang="es-CO" sz="1400" b="0" i="1" smtClean="0">
+                                      <a:rPr lang="es-CO" sz="1500" b="0" i="1" smtClean="0">
                                         <a:latin typeface="Cambria Math" panose="02040503050406030204" pitchFamily="18" charset="0"/>
                                         <a:ea typeface="Cambria Math" panose="02040503050406030204" pitchFamily="18" charset="0"/>
                                         <a:cs typeface="Shruti" panose="020B0502040204020203" pitchFamily="34" charset="0"/>
                                       </a:rPr>
-                                      <m:t>1</m:t>
-                                    </m:r>
-                                    <m:r>
-                                      <a:rPr lang="es-CO" sz="1400" b="0" i="1" smtClean="0">
-                                        <a:latin typeface="Cambria Math" panose="02040503050406030204" pitchFamily="18" charset="0"/>
-                                        <a:ea typeface="Cambria Math" panose="02040503050406030204" pitchFamily="18" charset="0"/>
-                                        <a:cs typeface="Shruti" panose="020B0502040204020203" pitchFamily="34" charset="0"/>
-                                      </a:rPr>
-                                      <m:t>7</m:t>
+                                      <m:t>17</m:t>
                                     </m:r>
                                   </m:sub>
                                 </m:sSub>
                               </m:oMath>
                             </m:oMathPara>
                           </a14:m>
-                          <a:endParaRPr lang="es-CO" sz="1400" dirty="0">
+                          <a:endParaRPr lang="es-CO" sz="1500" dirty="0">
                             <a:latin typeface="Cambria Math" panose="02040503050406030204" pitchFamily="18" charset="0"/>
                             <a:ea typeface="Cambria Math" panose="02040503050406030204" pitchFamily="18" charset="0"/>
                             <a:cs typeface="Shruti" panose="020B0502040204020203" pitchFamily="34" charset="0"/>
@@ -7054,7 +7642,7 @@
                       </a:ext>
                     </a:extLst>
                   </a:tr>
-                  <a:tr h="459018">
+                  <a:tr h="459019">
                     <a:tc>
                       <a:txBody>
                         <a:bodyPr/>
@@ -7084,7 +7672,7 @@
                                 <m:sSub>
                                   <m:sSubPr>
                                     <m:ctrlPr>
-                                      <a:rPr lang="es-CO" sz="1400" b="0" i="1" smtClean="0">
+                                      <a:rPr lang="es-CO" sz="1500" b="0" i="1" smtClean="0">
                                         <a:latin typeface="Cambria Math" panose="02040503050406030204" pitchFamily="18" charset="0"/>
                                         <a:ea typeface="Cambria Math" panose="02040503050406030204" pitchFamily="18" charset="0"/>
                                         <a:cs typeface="Shruti" panose="020B0502040204020203" pitchFamily="34" charset="0"/>
@@ -7093,7 +7681,7 @@
                                   </m:sSubPr>
                                   <m:e>
                                     <m:r>
-                                      <a:rPr lang="es-CO" sz="1400" b="0" i="1" smtClean="0">
+                                      <a:rPr lang="es-CO" sz="1500" b="0" i="1" smtClean="0">
                                         <a:latin typeface="Cambria Math" panose="02040503050406030204" pitchFamily="18" charset="0"/>
                                         <a:ea typeface="Cambria Math" panose="02040503050406030204" pitchFamily="18" charset="0"/>
                                         <a:cs typeface="Shruti" panose="020B0502040204020203" pitchFamily="34" charset="0"/>
@@ -7103,27 +7691,19 @@
                                   </m:e>
                                   <m:sub>
                                     <m:r>
-                                      <a:rPr lang="es-CO" sz="1400" b="0" i="1" smtClean="0">
+                                      <a:rPr lang="es-CO" sz="1500" b="0" i="1" smtClean="0">
                                         <a:latin typeface="Cambria Math" panose="02040503050406030204" pitchFamily="18" charset="0"/>
                                         <a:ea typeface="Cambria Math" panose="02040503050406030204" pitchFamily="18" charset="0"/>
                                         <a:cs typeface="Shruti" panose="020B0502040204020203" pitchFamily="34" charset="0"/>
                                       </a:rPr>
-                                      <m:t>2</m:t>
-                                    </m:r>
-                                    <m:r>
-                                      <a:rPr lang="es-CO" sz="1400" b="0" i="1" smtClean="0">
-                                        <a:latin typeface="Cambria Math" panose="02040503050406030204" pitchFamily="18" charset="0"/>
-                                        <a:ea typeface="Cambria Math" panose="02040503050406030204" pitchFamily="18" charset="0"/>
-                                        <a:cs typeface="Shruti" panose="020B0502040204020203" pitchFamily="34" charset="0"/>
-                                      </a:rPr>
-                                      <m:t>2</m:t>
+                                      <m:t>22</m:t>
                                     </m:r>
                                   </m:sub>
                                 </m:sSub>
                               </m:oMath>
                             </m:oMathPara>
                           </a14:m>
-                          <a:endParaRPr lang="es-CO" sz="1400" dirty="0"/>
+                          <a:endParaRPr lang="es-CO" sz="1500" dirty="0"/>
                         </a:p>
                       </a:txBody>
                       <a:tcPr anchor="ctr"/>
@@ -7143,7 +7723,7 @@
                                 <m:sSub>
                                   <m:sSubPr>
                                     <m:ctrlPr>
-                                      <a:rPr lang="es-CO" sz="1400" b="0" i="1" smtClean="0">
+                                      <a:rPr lang="es-CO" sz="1500" b="0" i="1" smtClean="0">
                                         <a:latin typeface="Cambria Math" panose="02040503050406030204" pitchFamily="18" charset="0"/>
                                         <a:ea typeface="Cambria Math" panose="02040503050406030204" pitchFamily="18" charset="0"/>
                                         <a:cs typeface="Shruti" panose="020B0502040204020203" pitchFamily="34" charset="0"/>
@@ -7152,7 +7732,7 @@
                                   </m:sSubPr>
                                   <m:e>
                                     <m:r>
-                                      <a:rPr lang="es-CO" sz="1400" b="0" i="1" smtClean="0">
+                                      <a:rPr lang="es-CO" sz="1500" b="0" i="1" smtClean="0">
                                         <a:latin typeface="Cambria Math" panose="02040503050406030204" pitchFamily="18" charset="0"/>
                                         <a:ea typeface="Cambria Math" panose="02040503050406030204" pitchFamily="18" charset="0"/>
                                         <a:cs typeface="Shruti" panose="020B0502040204020203" pitchFamily="34" charset="0"/>
@@ -7162,27 +7742,19 @@
                                   </m:e>
                                   <m:sub>
                                     <m:r>
-                                      <a:rPr lang="es-CO" sz="1400" b="0" i="1" smtClean="0">
+                                      <a:rPr lang="es-CO" sz="1500" b="0" i="1" smtClean="0">
                                         <a:latin typeface="Cambria Math" panose="02040503050406030204" pitchFamily="18" charset="0"/>
                                         <a:ea typeface="Cambria Math" panose="02040503050406030204" pitchFamily="18" charset="0"/>
                                         <a:cs typeface="Shruti" panose="020B0502040204020203" pitchFamily="34" charset="0"/>
                                       </a:rPr>
-                                      <m:t>2</m:t>
-                                    </m:r>
-                                    <m:r>
-                                      <a:rPr lang="es-CO" sz="1400" b="0" i="1" smtClean="0">
-                                        <a:latin typeface="Cambria Math" panose="02040503050406030204" pitchFamily="18" charset="0"/>
-                                        <a:ea typeface="Cambria Math" panose="02040503050406030204" pitchFamily="18" charset="0"/>
-                                        <a:cs typeface="Shruti" panose="020B0502040204020203" pitchFamily="34" charset="0"/>
-                                      </a:rPr>
-                                      <m:t>3</m:t>
+                                      <m:t>23</m:t>
                                     </m:r>
                                   </m:sub>
                                 </m:sSub>
                               </m:oMath>
                             </m:oMathPara>
                           </a14:m>
-                          <a:endParaRPr lang="es-CO" sz="1400" dirty="0"/>
+                          <a:endParaRPr lang="es-CO" sz="1500" dirty="0"/>
                         </a:p>
                       </a:txBody>
                       <a:tcPr anchor="ctr"/>
@@ -7202,7 +7774,7 @@
                                 <m:sSub>
                                   <m:sSubPr>
                                     <m:ctrlPr>
-                                      <a:rPr lang="es-CO" sz="1400" b="0" i="1" smtClean="0">
+                                      <a:rPr lang="es-CO" sz="1500" b="0" i="1" smtClean="0">
                                         <a:latin typeface="Cambria Math" panose="02040503050406030204" pitchFamily="18" charset="0"/>
                                         <a:ea typeface="Cambria Math" panose="02040503050406030204" pitchFamily="18" charset="0"/>
                                         <a:cs typeface="Shruti" panose="020B0502040204020203" pitchFamily="34" charset="0"/>
@@ -7211,7 +7783,7 @@
                                   </m:sSubPr>
                                   <m:e>
                                     <m:r>
-                                      <a:rPr lang="es-CO" sz="1400" b="0" i="1" smtClean="0">
+                                      <a:rPr lang="es-CO" sz="1500" b="0" i="1" smtClean="0">
                                         <a:latin typeface="Cambria Math" panose="02040503050406030204" pitchFamily="18" charset="0"/>
                                         <a:ea typeface="Cambria Math" panose="02040503050406030204" pitchFamily="18" charset="0"/>
                                         <a:cs typeface="Shruti" panose="020B0502040204020203" pitchFamily="34" charset="0"/>
@@ -7221,27 +7793,19 @@
                                   </m:e>
                                   <m:sub>
                                     <m:r>
-                                      <a:rPr lang="es-CO" sz="1400" b="0" i="1" smtClean="0">
+                                      <a:rPr lang="es-CO" sz="1500" b="0" i="1" smtClean="0">
                                         <a:latin typeface="Cambria Math" panose="02040503050406030204" pitchFamily="18" charset="0"/>
                                         <a:ea typeface="Cambria Math" panose="02040503050406030204" pitchFamily="18" charset="0"/>
                                         <a:cs typeface="Shruti" panose="020B0502040204020203" pitchFamily="34" charset="0"/>
                                       </a:rPr>
-                                      <m:t>2</m:t>
-                                    </m:r>
-                                    <m:r>
-                                      <a:rPr lang="es-CO" sz="1400" b="0" i="1" smtClean="0">
-                                        <a:latin typeface="Cambria Math" panose="02040503050406030204" pitchFamily="18" charset="0"/>
-                                        <a:ea typeface="Cambria Math" panose="02040503050406030204" pitchFamily="18" charset="0"/>
-                                        <a:cs typeface="Shruti" panose="020B0502040204020203" pitchFamily="34" charset="0"/>
-                                      </a:rPr>
-                                      <m:t>4</m:t>
+                                      <m:t>24</m:t>
                                     </m:r>
                                   </m:sub>
                                 </m:sSub>
                               </m:oMath>
                             </m:oMathPara>
                           </a14:m>
-                          <a:endParaRPr lang="es-CO" sz="1400" dirty="0"/>
+                          <a:endParaRPr lang="es-CO" sz="1500" dirty="0"/>
                         </a:p>
                       </a:txBody>
                       <a:tcPr anchor="ctr"/>
@@ -7261,7 +7825,7 @@
                                 <m:sSub>
                                   <m:sSubPr>
                                     <m:ctrlPr>
-                                      <a:rPr lang="es-CO" sz="1400" b="0" i="1" smtClean="0">
+                                      <a:rPr lang="es-CO" sz="1500" b="0" i="1" smtClean="0">
                                         <a:latin typeface="Cambria Math" panose="02040503050406030204" pitchFamily="18" charset="0"/>
                                         <a:ea typeface="Cambria Math" panose="02040503050406030204" pitchFamily="18" charset="0"/>
                                         <a:cs typeface="Shruti" panose="020B0502040204020203" pitchFamily="34" charset="0"/>
@@ -7270,7 +7834,7 @@
                                   </m:sSubPr>
                                   <m:e>
                                     <m:r>
-                                      <a:rPr lang="es-CO" sz="1400" b="0" i="1" smtClean="0">
+                                      <a:rPr lang="es-CO" sz="1500" b="0" i="1" smtClean="0">
                                         <a:latin typeface="Cambria Math" panose="02040503050406030204" pitchFamily="18" charset="0"/>
                                         <a:ea typeface="Cambria Math" panose="02040503050406030204" pitchFamily="18" charset="0"/>
                                         <a:cs typeface="Shruti" panose="020B0502040204020203" pitchFamily="34" charset="0"/>
@@ -7280,27 +7844,19 @@
                                   </m:e>
                                   <m:sub>
                                     <m:r>
-                                      <a:rPr lang="es-CO" sz="1400" b="0" i="1" smtClean="0">
+                                      <a:rPr lang="es-CO" sz="1500" b="0" i="1" smtClean="0">
                                         <a:latin typeface="Cambria Math" panose="02040503050406030204" pitchFamily="18" charset="0"/>
                                         <a:ea typeface="Cambria Math" panose="02040503050406030204" pitchFamily="18" charset="0"/>
                                         <a:cs typeface="Shruti" panose="020B0502040204020203" pitchFamily="34" charset="0"/>
                                       </a:rPr>
-                                      <m:t>2</m:t>
-                                    </m:r>
-                                    <m:r>
-                                      <a:rPr lang="es-CO" sz="1400" b="0" i="1" smtClean="0">
-                                        <a:latin typeface="Cambria Math" panose="02040503050406030204" pitchFamily="18" charset="0"/>
-                                        <a:ea typeface="Cambria Math" panose="02040503050406030204" pitchFamily="18" charset="0"/>
-                                        <a:cs typeface="Shruti" panose="020B0502040204020203" pitchFamily="34" charset="0"/>
-                                      </a:rPr>
-                                      <m:t>5</m:t>
+                                      <m:t>25</m:t>
                                     </m:r>
                                   </m:sub>
                                 </m:sSub>
                               </m:oMath>
                             </m:oMathPara>
                           </a14:m>
-                          <a:endParaRPr lang="es-CO" sz="1400" dirty="0"/>
+                          <a:endParaRPr lang="es-CO" sz="1500" dirty="0"/>
                         </a:p>
                       </a:txBody>
                       <a:tcPr anchor="ctr"/>
@@ -7320,7 +7876,7 @@
                                 <m:sSub>
                                   <m:sSubPr>
                                     <m:ctrlPr>
-                                      <a:rPr lang="es-CO" sz="1400" b="0" i="1" smtClean="0">
+                                      <a:rPr lang="es-CO" sz="1500" b="0" i="1" smtClean="0">
                                         <a:latin typeface="Cambria Math" panose="02040503050406030204" pitchFamily="18" charset="0"/>
                                         <a:ea typeface="Cambria Math" panose="02040503050406030204" pitchFamily="18" charset="0"/>
                                         <a:cs typeface="Shruti" panose="020B0502040204020203" pitchFamily="34" charset="0"/>
@@ -7329,7 +7885,7 @@
                                   </m:sSubPr>
                                   <m:e>
                                     <m:r>
-                                      <a:rPr lang="es-CO" sz="1400" b="0" i="1" smtClean="0">
+                                      <a:rPr lang="es-CO" sz="1500" b="0" i="1" smtClean="0">
                                         <a:latin typeface="Cambria Math" panose="02040503050406030204" pitchFamily="18" charset="0"/>
                                         <a:ea typeface="Cambria Math" panose="02040503050406030204" pitchFamily="18" charset="0"/>
                                         <a:cs typeface="Shruti" panose="020B0502040204020203" pitchFamily="34" charset="0"/>
@@ -7339,27 +7895,19 @@
                                   </m:e>
                                   <m:sub>
                                     <m:r>
-                                      <a:rPr lang="es-CO" sz="1400" b="0" i="1" smtClean="0">
+                                      <a:rPr lang="es-CO" sz="1500" b="0" i="1" smtClean="0">
                                         <a:latin typeface="Cambria Math" panose="02040503050406030204" pitchFamily="18" charset="0"/>
                                         <a:ea typeface="Cambria Math" panose="02040503050406030204" pitchFamily="18" charset="0"/>
                                         <a:cs typeface="Shruti" panose="020B0502040204020203" pitchFamily="34" charset="0"/>
                                       </a:rPr>
-                                      <m:t>2</m:t>
-                                    </m:r>
-                                    <m:r>
-                                      <a:rPr lang="es-CO" sz="1400" b="0" i="1" smtClean="0">
-                                        <a:latin typeface="Cambria Math" panose="02040503050406030204" pitchFamily="18" charset="0"/>
-                                        <a:ea typeface="Cambria Math" panose="02040503050406030204" pitchFamily="18" charset="0"/>
-                                        <a:cs typeface="Shruti" panose="020B0502040204020203" pitchFamily="34" charset="0"/>
-                                      </a:rPr>
-                                      <m:t>6</m:t>
+                                      <m:t>26</m:t>
                                     </m:r>
                                   </m:sub>
                                 </m:sSub>
                               </m:oMath>
                             </m:oMathPara>
                           </a14:m>
-                          <a:endParaRPr lang="es-CO" sz="1400" dirty="0"/>
+                          <a:endParaRPr lang="es-CO" sz="1500" dirty="0"/>
                         </a:p>
                       </a:txBody>
                       <a:tcPr anchor="ctr"/>
@@ -7379,7 +7927,7 @@
                                 <m:sSub>
                                   <m:sSubPr>
                                     <m:ctrlPr>
-                                      <a:rPr lang="es-CO" sz="1400" b="0" i="1" smtClean="0">
+                                      <a:rPr lang="es-CO" sz="1500" b="0" i="1" smtClean="0">
                                         <a:latin typeface="Cambria Math" panose="02040503050406030204" pitchFamily="18" charset="0"/>
                                         <a:ea typeface="Cambria Math" panose="02040503050406030204" pitchFamily="18" charset="0"/>
                                         <a:cs typeface="Shruti" panose="020B0502040204020203" pitchFamily="34" charset="0"/>
@@ -7388,7 +7936,7 @@
                                   </m:sSubPr>
                                   <m:e>
                                     <m:r>
-                                      <a:rPr lang="es-CO" sz="1400" b="0" i="1" smtClean="0">
+                                      <a:rPr lang="es-CO" sz="1500" b="0" i="1" smtClean="0">
                                         <a:latin typeface="Cambria Math" panose="02040503050406030204" pitchFamily="18" charset="0"/>
                                         <a:ea typeface="Cambria Math" panose="02040503050406030204" pitchFamily="18" charset="0"/>
                                         <a:cs typeface="Shruti" panose="020B0502040204020203" pitchFamily="34" charset="0"/>
@@ -7398,27 +7946,19 @@
                                   </m:e>
                                   <m:sub>
                                     <m:r>
-                                      <a:rPr lang="es-CO" sz="1400" b="0" i="1" smtClean="0">
+                                      <a:rPr lang="es-CO" sz="1500" b="0" i="1" smtClean="0">
                                         <a:latin typeface="Cambria Math" panose="02040503050406030204" pitchFamily="18" charset="0"/>
                                         <a:ea typeface="Cambria Math" panose="02040503050406030204" pitchFamily="18" charset="0"/>
                                         <a:cs typeface="Shruti" panose="020B0502040204020203" pitchFamily="34" charset="0"/>
                                       </a:rPr>
-                                      <m:t>2</m:t>
-                                    </m:r>
-                                    <m:r>
-                                      <a:rPr lang="es-CO" sz="1400" b="0" i="1" smtClean="0">
-                                        <a:latin typeface="Cambria Math" panose="02040503050406030204" pitchFamily="18" charset="0"/>
-                                        <a:ea typeface="Cambria Math" panose="02040503050406030204" pitchFamily="18" charset="0"/>
-                                        <a:cs typeface="Shruti" panose="020B0502040204020203" pitchFamily="34" charset="0"/>
-                                      </a:rPr>
-                                      <m:t>7</m:t>
+                                      <m:t>27</m:t>
                                     </m:r>
                                   </m:sub>
                                 </m:sSub>
                               </m:oMath>
                             </m:oMathPara>
                           </a14:m>
-                          <a:endParaRPr lang="es-CO" sz="1400" dirty="0"/>
+                          <a:endParaRPr lang="es-CO" sz="1500" dirty="0"/>
                         </a:p>
                       </a:txBody>
                       <a:tcPr anchor="ctr"/>
@@ -7429,7 +7969,7 @@
                       </a:ext>
                     </a:extLst>
                   </a:tr>
-                  <a:tr h="459018">
+                  <a:tr h="459019">
                     <a:tc>
                       <a:txBody>
                         <a:bodyPr/>
@@ -7459,7 +7999,7 @@
                                 <m:sSub>
                                   <m:sSubPr>
                                     <m:ctrlPr>
-                                      <a:rPr lang="es-CO" sz="1400" b="0" i="1" smtClean="0">
+                                      <a:rPr lang="es-CO" sz="1500" b="0" i="1" smtClean="0">
                                         <a:latin typeface="Cambria Math" panose="02040503050406030204" pitchFamily="18" charset="0"/>
                                         <a:ea typeface="Cambria Math" panose="02040503050406030204" pitchFamily="18" charset="0"/>
                                         <a:cs typeface="Shruti" panose="020B0502040204020203" pitchFamily="34" charset="0"/>
@@ -7468,7 +8008,7 @@
                                   </m:sSubPr>
                                   <m:e>
                                     <m:r>
-                                      <a:rPr lang="es-CO" sz="1400" b="0" i="1" smtClean="0">
+                                      <a:rPr lang="es-CO" sz="1500" b="0" i="1" smtClean="0">
                                         <a:latin typeface="Cambria Math" panose="02040503050406030204" pitchFamily="18" charset="0"/>
                                         <a:ea typeface="Cambria Math" panose="02040503050406030204" pitchFamily="18" charset="0"/>
                                         <a:cs typeface="Shruti" panose="020B0502040204020203" pitchFamily="34" charset="0"/>
@@ -7478,27 +8018,19 @@
                                   </m:e>
                                   <m:sub>
                                     <m:r>
-                                      <a:rPr lang="es-CO" sz="1400" b="0" i="1" smtClean="0">
+                                      <a:rPr lang="es-CO" sz="1500" b="0" i="1" smtClean="0">
                                         <a:latin typeface="Cambria Math" panose="02040503050406030204" pitchFamily="18" charset="0"/>
                                         <a:ea typeface="Cambria Math" panose="02040503050406030204" pitchFamily="18" charset="0"/>
                                         <a:cs typeface="Shruti" panose="020B0502040204020203" pitchFamily="34" charset="0"/>
                                       </a:rPr>
-                                      <m:t>3</m:t>
-                                    </m:r>
-                                    <m:r>
-                                      <a:rPr lang="es-CO" sz="1400" b="0" i="1" smtClean="0">
-                                        <a:latin typeface="Cambria Math" panose="02040503050406030204" pitchFamily="18" charset="0"/>
-                                        <a:ea typeface="Cambria Math" panose="02040503050406030204" pitchFamily="18" charset="0"/>
-                                        <a:cs typeface="Shruti" panose="020B0502040204020203" pitchFamily="34" charset="0"/>
-                                      </a:rPr>
-                                      <m:t>2</m:t>
+                                      <m:t>32</m:t>
                                     </m:r>
                                   </m:sub>
                                 </m:sSub>
                               </m:oMath>
                             </m:oMathPara>
                           </a14:m>
-                          <a:endParaRPr lang="es-CO" sz="1400" dirty="0"/>
+                          <a:endParaRPr lang="es-CO" sz="1500" dirty="0"/>
                         </a:p>
                       </a:txBody>
                       <a:tcPr anchor="ctr"/>
@@ -7518,7 +8050,7 @@
                                 <m:sSub>
                                   <m:sSubPr>
                                     <m:ctrlPr>
-                                      <a:rPr lang="es-CO" sz="1400" b="0" i="1" smtClean="0">
+                                      <a:rPr lang="es-CO" sz="1500" b="0" i="1" smtClean="0">
                                         <a:latin typeface="Cambria Math" panose="02040503050406030204" pitchFamily="18" charset="0"/>
                                         <a:ea typeface="Cambria Math" panose="02040503050406030204" pitchFamily="18" charset="0"/>
                                         <a:cs typeface="Shruti" panose="020B0502040204020203" pitchFamily="34" charset="0"/>
@@ -7527,7 +8059,7 @@
                                   </m:sSubPr>
                                   <m:e>
                                     <m:r>
-                                      <a:rPr lang="es-CO" sz="1400" b="0" i="1" smtClean="0">
+                                      <a:rPr lang="es-CO" sz="1500" b="0" i="1" smtClean="0">
                                         <a:latin typeface="Cambria Math" panose="02040503050406030204" pitchFamily="18" charset="0"/>
                                         <a:ea typeface="Cambria Math" panose="02040503050406030204" pitchFamily="18" charset="0"/>
                                         <a:cs typeface="Shruti" panose="020B0502040204020203" pitchFamily="34" charset="0"/>
@@ -7537,7 +8069,7 @@
                                   </m:e>
                                   <m:sub>
                                     <m:r>
-                                      <a:rPr lang="es-CO" sz="1400" b="0" i="1" smtClean="0">
+                                      <a:rPr lang="es-CO" sz="1500" b="0" i="1" smtClean="0">
                                         <a:latin typeface="Cambria Math" panose="02040503050406030204" pitchFamily="18" charset="0"/>
                                         <a:ea typeface="Cambria Math" panose="02040503050406030204" pitchFamily="18" charset="0"/>
                                         <a:cs typeface="Shruti" panose="020B0502040204020203" pitchFamily="34" charset="0"/>
@@ -7549,7 +8081,7 @@
                               </m:oMath>
                             </m:oMathPara>
                           </a14:m>
-                          <a:endParaRPr lang="es-CO" sz="1400" dirty="0"/>
+                          <a:endParaRPr lang="es-CO" sz="1500" dirty="0"/>
                         </a:p>
                       </a:txBody>
                       <a:tcPr anchor="ctr"/>
@@ -7569,7 +8101,7 @@
                                 <m:sSub>
                                   <m:sSubPr>
                                     <m:ctrlPr>
-                                      <a:rPr lang="es-CO" sz="1400" b="0" i="1" smtClean="0">
+                                      <a:rPr lang="es-CO" sz="1500" b="0" i="1" smtClean="0">
                                         <a:latin typeface="Cambria Math" panose="02040503050406030204" pitchFamily="18" charset="0"/>
                                         <a:ea typeface="Cambria Math" panose="02040503050406030204" pitchFamily="18" charset="0"/>
                                         <a:cs typeface="Shruti" panose="020B0502040204020203" pitchFamily="34" charset="0"/>
@@ -7578,7 +8110,7 @@
                                   </m:sSubPr>
                                   <m:e>
                                     <m:r>
-                                      <a:rPr lang="es-CO" sz="1400" b="0" i="1" smtClean="0">
+                                      <a:rPr lang="es-CO" sz="1500" b="0" i="1" smtClean="0">
                                         <a:latin typeface="Cambria Math" panose="02040503050406030204" pitchFamily="18" charset="0"/>
                                         <a:ea typeface="Cambria Math" panose="02040503050406030204" pitchFamily="18" charset="0"/>
                                         <a:cs typeface="Shruti" panose="020B0502040204020203" pitchFamily="34" charset="0"/>
@@ -7588,7 +8120,7 @@
                                   </m:e>
                                   <m:sub>
                                     <m:r>
-                                      <a:rPr lang="es-CO" sz="1400" b="0" i="1" smtClean="0">
+                                      <a:rPr lang="es-CO" sz="1500" b="0" i="1" smtClean="0">
                                         <a:latin typeface="Cambria Math" panose="02040503050406030204" pitchFamily="18" charset="0"/>
                                         <a:ea typeface="Cambria Math" panose="02040503050406030204" pitchFamily="18" charset="0"/>
                                         <a:cs typeface="Shruti" panose="020B0502040204020203" pitchFamily="34" charset="0"/>
@@ -7600,7 +8132,7 @@
                               </m:oMath>
                             </m:oMathPara>
                           </a14:m>
-                          <a:endParaRPr lang="es-CO" sz="1400" dirty="0"/>
+                          <a:endParaRPr lang="es-CO" sz="1500" dirty="0"/>
                         </a:p>
                       </a:txBody>
                       <a:tcPr anchor="ctr"/>
@@ -7620,7 +8152,7 @@
                                 <m:sSub>
                                   <m:sSubPr>
                                     <m:ctrlPr>
-                                      <a:rPr lang="es-CO" sz="1400" b="0" i="1" smtClean="0">
+                                      <a:rPr lang="es-CO" sz="1500" b="0" i="1" smtClean="0">
                                         <a:latin typeface="Cambria Math" panose="02040503050406030204" pitchFamily="18" charset="0"/>
                                         <a:ea typeface="Cambria Math" panose="02040503050406030204" pitchFamily="18" charset="0"/>
                                         <a:cs typeface="Shruti" panose="020B0502040204020203" pitchFamily="34" charset="0"/>
@@ -7629,7 +8161,7 @@
                                   </m:sSubPr>
                                   <m:e>
                                     <m:r>
-                                      <a:rPr lang="es-CO" sz="1400" b="0" i="1" smtClean="0">
+                                      <a:rPr lang="es-CO" sz="1500" b="0" i="1" smtClean="0">
                                         <a:latin typeface="Cambria Math" panose="02040503050406030204" pitchFamily="18" charset="0"/>
                                         <a:ea typeface="Cambria Math" panose="02040503050406030204" pitchFamily="18" charset="0"/>
                                         <a:cs typeface="Shruti" panose="020B0502040204020203" pitchFamily="34" charset="0"/>
@@ -7639,7 +8171,7 @@
                                   </m:e>
                                   <m:sub>
                                     <m:r>
-                                      <a:rPr lang="es-CO" sz="1400" b="0" i="1" smtClean="0">
+                                      <a:rPr lang="es-CO" sz="1500" b="0" i="1" smtClean="0">
                                         <a:latin typeface="Cambria Math" panose="02040503050406030204" pitchFamily="18" charset="0"/>
                                         <a:ea typeface="Cambria Math" panose="02040503050406030204" pitchFamily="18" charset="0"/>
                                         <a:cs typeface="Shruti" panose="020B0502040204020203" pitchFamily="34" charset="0"/>
@@ -7651,7 +8183,7 @@
                               </m:oMath>
                             </m:oMathPara>
                           </a14:m>
-                          <a:endParaRPr lang="es-CO" sz="1400" dirty="0"/>
+                          <a:endParaRPr lang="es-CO" sz="1500" dirty="0"/>
                         </a:p>
                       </a:txBody>
                       <a:tcPr anchor="ctr"/>
@@ -7671,7 +8203,7 @@
                                 <m:sSub>
                                   <m:sSubPr>
                                     <m:ctrlPr>
-                                      <a:rPr lang="es-CO" sz="1400" b="0" i="1" smtClean="0">
+                                      <a:rPr lang="es-CO" sz="1500" b="0" i="1" smtClean="0">
                                         <a:latin typeface="Cambria Math" panose="02040503050406030204" pitchFamily="18" charset="0"/>
                                         <a:ea typeface="Cambria Math" panose="02040503050406030204" pitchFamily="18" charset="0"/>
                                         <a:cs typeface="Shruti" panose="020B0502040204020203" pitchFamily="34" charset="0"/>
@@ -7680,7 +8212,7 @@
                                   </m:sSubPr>
                                   <m:e>
                                     <m:r>
-                                      <a:rPr lang="es-CO" sz="1400" b="0" i="1" smtClean="0">
+                                      <a:rPr lang="es-CO" sz="1500" b="0" i="1" smtClean="0">
                                         <a:latin typeface="Cambria Math" panose="02040503050406030204" pitchFamily="18" charset="0"/>
                                         <a:ea typeface="Cambria Math" panose="02040503050406030204" pitchFamily="18" charset="0"/>
                                         <a:cs typeface="Shruti" panose="020B0502040204020203" pitchFamily="34" charset="0"/>
@@ -7690,7 +8222,7 @@
                                   </m:e>
                                   <m:sub>
                                     <m:r>
-                                      <a:rPr lang="es-CO" sz="1400" b="0" i="1" smtClean="0">
+                                      <a:rPr lang="es-CO" sz="1500" b="0" i="1" smtClean="0">
                                         <a:latin typeface="Cambria Math" panose="02040503050406030204" pitchFamily="18" charset="0"/>
                                         <a:ea typeface="Cambria Math" panose="02040503050406030204" pitchFamily="18" charset="0"/>
                                         <a:cs typeface="Shruti" panose="020B0502040204020203" pitchFamily="34" charset="0"/>
@@ -7702,7 +8234,7 @@
                               </m:oMath>
                             </m:oMathPara>
                           </a14:m>
-                          <a:endParaRPr lang="es-CO" sz="1400" dirty="0"/>
+                          <a:endParaRPr lang="es-CO" sz="1500" dirty="0"/>
                         </a:p>
                       </a:txBody>
                       <a:tcPr anchor="ctr"/>
@@ -7722,7 +8254,7 @@
                                 <m:sSub>
                                   <m:sSubPr>
                                     <m:ctrlPr>
-                                      <a:rPr lang="es-CO" sz="1400" b="0" i="1" smtClean="0">
+                                      <a:rPr lang="es-CO" sz="1500" b="0" i="1" smtClean="0">
                                         <a:latin typeface="Cambria Math" panose="02040503050406030204" pitchFamily="18" charset="0"/>
                                         <a:ea typeface="Cambria Math" panose="02040503050406030204" pitchFamily="18" charset="0"/>
                                         <a:cs typeface="Shruti" panose="020B0502040204020203" pitchFamily="34" charset="0"/>
@@ -7731,7 +8263,7 @@
                                   </m:sSubPr>
                                   <m:e>
                                     <m:r>
-                                      <a:rPr lang="es-CO" sz="1400" b="0" i="1" smtClean="0">
+                                      <a:rPr lang="es-CO" sz="1500" b="0" i="1" smtClean="0">
                                         <a:latin typeface="Cambria Math" panose="02040503050406030204" pitchFamily="18" charset="0"/>
                                         <a:ea typeface="Cambria Math" panose="02040503050406030204" pitchFamily="18" charset="0"/>
                                         <a:cs typeface="Shruti" panose="020B0502040204020203" pitchFamily="34" charset="0"/>
@@ -7741,7 +8273,7 @@
                                   </m:e>
                                   <m:sub>
                                     <m:r>
-                                      <a:rPr lang="es-CO" sz="1400" b="0" i="1" smtClean="0">
+                                      <a:rPr lang="es-CO" sz="1500" b="0" i="1" smtClean="0">
                                         <a:latin typeface="Cambria Math" panose="02040503050406030204" pitchFamily="18" charset="0"/>
                                         <a:ea typeface="Cambria Math" panose="02040503050406030204" pitchFamily="18" charset="0"/>
                                         <a:cs typeface="Shruti" panose="020B0502040204020203" pitchFamily="34" charset="0"/>
@@ -7753,7 +8285,7 @@
                               </m:oMath>
                             </m:oMathPara>
                           </a14:m>
-                          <a:endParaRPr lang="es-CO" sz="1400" dirty="0"/>
+                          <a:endParaRPr lang="es-CO" sz="1500" dirty="0"/>
                         </a:p>
                       </a:txBody>
                       <a:tcPr anchor="ctr"/>
@@ -7764,7 +8296,7 @@
                       </a:ext>
                     </a:extLst>
                   </a:tr>
-                  <a:tr h="459018">
+                  <a:tr h="459019">
                     <a:tc>
                       <a:txBody>
                         <a:bodyPr/>
@@ -7794,7 +8326,7 @@
                                 <m:sSub>
                                   <m:sSubPr>
                                     <m:ctrlPr>
-                                      <a:rPr lang="es-CO" sz="1400" b="0" i="1" smtClean="0">
+                                      <a:rPr lang="es-CO" sz="1500" b="0" i="1" smtClean="0">
                                         <a:latin typeface="Cambria Math" panose="02040503050406030204" pitchFamily="18" charset="0"/>
                                         <a:ea typeface="Cambria Math" panose="02040503050406030204" pitchFamily="18" charset="0"/>
                                         <a:cs typeface="Shruti" panose="020B0502040204020203" pitchFamily="34" charset="0"/>
@@ -7803,7 +8335,7 @@
                                   </m:sSubPr>
                                   <m:e>
                                     <m:r>
-                                      <a:rPr lang="es-CO" sz="1400" b="0" i="1" smtClean="0">
+                                      <a:rPr lang="es-CO" sz="1500" b="0" i="1" smtClean="0">
                                         <a:latin typeface="Cambria Math" panose="02040503050406030204" pitchFamily="18" charset="0"/>
                                         <a:ea typeface="Cambria Math" panose="02040503050406030204" pitchFamily="18" charset="0"/>
                                         <a:cs typeface="Shruti" panose="020B0502040204020203" pitchFamily="34" charset="0"/>
@@ -7813,27 +8345,19 @@
                                   </m:e>
                                   <m:sub>
                                     <m:r>
-                                      <a:rPr lang="es-CO" sz="1400" b="0" i="1" smtClean="0">
+                                      <a:rPr lang="es-CO" sz="1500" b="0" i="1" smtClean="0">
                                         <a:latin typeface="Cambria Math" panose="02040503050406030204" pitchFamily="18" charset="0"/>
                                         <a:ea typeface="Cambria Math" panose="02040503050406030204" pitchFamily="18" charset="0"/>
                                         <a:cs typeface="Shruti" panose="020B0502040204020203" pitchFamily="34" charset="0"/>
                                       </a:rPr>
-                                      <m:t>4</m:t>
-                                    </m:r>
-                                    <m:r>
-                                      <a:rPr lang="es-CO" sz="1400" b="0" i="1" smtClean="0">
-                                        <a:latin typeface="Cambria Math" panose="02040503050406030204" pitchFamily="18" charset="0"/>
-                                        <a:ea typeface="Cambria Math" panose="02040503050406030204" pitchFamily="18" charset="0"/>
-                                        <a:cs typeface="Shruti" panose="020B0502040204020203" pitchFamily="34" charset="0"/>
-                                      </a:rPr>
-                                      <m:t>2</m:t>
+                                      <m:t>42</m:t>
                                     </m:r>
                                   </m:sub>
                                 </m:sSub>
                               </m:oMath>
                             </m:oMathPara>
                           </a14:m>
-                          <a:endParaRPr lang="es-CO" sz="1400" dirty="0"/>
+                          <a:endParaRPr lang="es-CO" sz="1500" dirty="0"/>
                         </a:p>
                       </a:txBody>
                       <a:tcPr anchor="ctr"/>
@@ -7853,7 +8377,7 @@
                                 <m:sSub>
                                   <m:sSubPr>
                                     <m:ctrlPr>
-                                      <a:rPr lang="es-CO" sz="1400" b="0" i="1" smtClean="0">
+                                      <a:rPr lang="es-CO" sz="1500" b="0" i="1" smtClean="0">
                                         <a:latin typeface="Cambria Math" panose="02040503050406030204" pitchFamily="18" charset="0"/>
                                         <a:ea typeface="Cambria Math" panose="02040503050406030204" pitchFamily="18" charset="0"/>
                                         <a:cs typeface="Shruti" panose="020B0502040204020203" pitchFamily="34" charset="0"/>
@@ -7862,7 +8386,7 @@
                                   </m:sSubPr>
                                   <m:e>
                                     <m:r>
-                                      <a:rPr lang="es-CO" sz="1400" b="0" i="1" smtClean="0">
+                                      <a:rPr lang="es-CO" sz="1500" b="0" i="1" smtClean="0">
                                         <a:latin typeface="Cambria Math" panose="02040503050406030204" pitchFamily="18" charset="0"/>
                                         <a:ea typeface="Cambria Math" panose="02040503050406030204" pitchFamily="18" charset="0"/>
                                         <a:cs typeface="Shruti" panose="020B0502040204020203" pitchFamily="34" charset="0"/>
@@ -7872,7 +8396,7 @@
                                   </m:e>
                                   <m:sub>
                                     <m:r>
-                                      <a:rPr lang="es-CO" sz="1400" b="0" i="1" smtClean="0">
+                                      <a:rPr lang="es-CO" sz="1500" b="0" i="1" smtClean="0">
                                         <a:latin typeface="Cambria Math" panose="02040503050406030204" pitchFamily="18" charset="0"/>
                                         <a:ea typeface="Cambria Math" panose="02040503050406030204" pitchFamily="18" charset="0"/>
                                         <a:cs typeface="Shruti" panose="020B0502040204020203" pitchFamily="34" charset="0"/>
@@ -7884,7 +8408,7 @@
                               </m:oMath>
                             </m:oMathPara>
                           </a14:m>
-                          <a:endParaRPr lang="es-CO" sz="1400" dirty="0"/>
+                          <a:endParaRPr lang="es-CO" sz="1500" dirty="0"/>
                         </a:p>
                       </a:txBody>
                       <a:tcPr anchor="ctr"/>
@@ -7904,7 +8428,7 @@
                                 <m:sSub>
                                   <m:sSubPr>
                                     <m:ctrlPr>
-                                      <a:rPr lang="es-CO" sz="1400" b="0" i="1" smtClean="0">
+                                      <a:rPr lang="es-CO" sz="1500" b="0" i="1" smtClean="0">
                                         <a:latin typeface="Cambria Math" panose="02040503050406030204" pitchFamily="18" charset="0"/>
                                         <a:ea typeface="Cambria Math" panose="02040503050406030204" pitchFamily="18" charset="0"/>
                                         <a:cs typeface="Shruti" panose="020B0502040204020203" pitchFamily="34" charset="0"/>
@@ -7913,7 +8437,7 @@
                                   </m:sSubPr>
                                   <m:e>
                                     <m:r>
-                                      <a:rPr lang="es-CO" sz="1400" b="0" i="1" smtClean="0">
+                                      <a:rPr lang="es-CO" sz="1500" b="0" i="1" smtClean="0">
                                         <a:latin typeface="Cambria Math" panose="02040503050406030204" pitchFamily="18" charset="0"/>
                                         <a:ea typeface="Cambria Math" panose="02040503050406030204" pitchFamily="18" charset="0"/>
                                         <a:cs typeface="Shruti" panose="020B0502040204020203" pitchFamily="34" charset="0"/>
@@ -7923,7 +8447,7 @@
                                   </m:e>
                                   <m:sub>
                                     <m:r>
-                                      <a:rPr lang="es-CO" sz="1400" b="0" i="1" smtClean="0">
+                                      <a:rPr lang="es-CO" sz="1500" b="0" i="1" smtClean="0">
                                         <a:latin typeface="Cambria Math" panose="02040503050406030204" pitchFamily="18" charset="0"/>
                                         <a:ea typeface="Cambria Math" panose="02040503050406030204" pitchFamily="18" charset="0"/>
                                         <a:cs typeface="Shruti" panose="020B0502040204020203" pitchFamily="34" charset="0"/>
@@ -7935,7 +8459,7 @@
                               </m:oMath>
                             </m:oMathPara>
                           </a14:m>
-                          <a:endParaRPr lang="es-CO" sz="1400" dirty="0"/>
+                          <a:endParaRPr lang="es-CO" sz="1500" dirty="0"/>
                         </a:p>
                       </a:txBody>
                       <a:tcPr anchor="ctr"/>
@@ -7955,7 +8479,7 @@
                                 <m:sSub>
                                   <m:sSubPr>
                                     <m:ctrlPr>
-                                      <a:rPr lang="es-CO" sz="1400" b="0" i="1" smtClean="0">
+                                      <a:rPr lang="es-CO" sz="1500" b="0" i="1" smtClean="0">
                                         <a:latin typeface="Cambria Math" panose="02040503050406030204" pitchFamily="18" charset="0"/>
                                         <a:ea typeface="Cambria Math" panose="02040503050406030204" pitchFamily="18" charset="0"/>
                                         <a:cs typeface="Shruti" panose="020B0502040204020203" pitchFamily="34" charset="0"/>
@@ -7964,7 +8488,7 @@
                                   </m:sSubPr>
                                   <m:e>
                                     <m:r>
-                                      <a:rPr lang="es-CO" sz="1400" b="0" i="1" smtClean="0">
+                                      <a:rPr lang="es-CO" sz="1500" b="0" i="1" smtClean="0">
                                         <a:latin typeface="Cambria Math" panose="02040503050406030204" pitchFamily="18" charset="0"/>
                                         <a:ea typeface="Cambria Math" panose="02040503050406030204" pitchFamily="18" charset="0"/>
                                         <a:cs typeface="Shruti" panose="020B0502040204020203" pitchFamily="34" charset="0"/>
@@ -7974,7 +8498,7 @@
                                   </m:e>
                                   <m:sub>
                                     <m:r>
-                                      <a:rPr lang="es-CO" sz="1400" b="0" i="1" smtClean="0">
+                                      <a:rPr lang="es-CO" sz="1500" b="0" i="1" smtClean="0">
                                         <a:latin typeface="Cambria Math" panose="02040503050406030204" pitchFamily="18" charset="0"/>
                                         <a:ea typeface="Cambria Math" panose="02040503050406030204" pitchFamily="18" charset="0"/>
                                         <a:cs typeface="Shruti" panose="020B0502040204020203" pitchFamily="34" charset="0"/>
@@ -7986,7 +8510,7 @@
                               </m:oMath>
                             </m:oMathPara>
                           </a14:m>
-                          <a:endParaRPr lang="es-CO" sz="1400" dirty="0"/>
+                          <a:endParaRPr lang="es-CO" sz="1500" dirty="0"/>
                         </a:p>
                       </a:txBody>
                       <a:tcPr anchor="ctr"/>
@@ -8006,7 +8530,7 @@
                                 <m:sSub>
                                   <m:sSubPr>
                                     <m:ctrlPr>
-                                      <a:rPr lang="es-CO" sz="1400" b="0" i="1" smtClean="0">
+                                      <a:rPr lang="es-CO" sz="1500" b="0" i="1" smtClean="0">
                                         <a:latin typeface="Cambria Math" panose="02040503050406030204" pitchFamily="18" charset="0"/>
                                         <a:ea typeface="Cambria Math" panose="02040503050406030204" pitchFamily="18" charset="0"/>
                                         <a:cs typeface="Shruti" panose="020B0502040204020203" pitchFamily="34" charset="0"/>
@@ -8015,7 +8539,7 @@
                                   </m:sSubPr>
                                   <m:e>
                                     <m:r>
-                                      <a:rPr lang="es-CO" sz="1400" b="0" i="1" smtClean="0">
+                                      <a:rPr lang="es-CO" sz="1500" b="0" i="1" smtClean="0">
                                         <a:latin typeface="Cambria Math" panose="02040503050406030204" pitchFamily="18" charset="0"/>
                                         <a:ea typeface="Cambria Math" panose="02040503050406030204" pitchFamily="18" charset="0"/>
                                         <a:cs typeface="Shruti" panose="020B0502040204020203" pitchFamily="34" charset="0"/>
@@ -8025,7 +8549,7 @@
                                   </m:e>
                                   <m:sub>
                                     <m:r>
-                                      <a:rPr lang="es-CO" sz="1400" b="0" i="1" smtClean="0">
+                                      <a:rPr lang="es-CO" sz="1500" b="0" i="1" smtClean="0">
                                         <a:latin typeface="Cambria Math" panose="02040503050406030204" pitchFamily="18" charset="0"/>
                                         <a:ea typeface="Cambria Math" panose="02040503050406030204" pitchFamily="18" charset="0"/>
                                         <a:cs typeface="Shruti" panose="020B0502040204020203" pitchFamily="34" charset="0"/>
@@ -8037,7 +8561,7 @@
                               </m:oMath>
                             </m:oMathPara>
                           </a14:m>
-                          <a:endParaRPr lang="es-CO" sz="1400" dirty="0"/>
+                          <a:endParaRPr lang="es-CO" sz="1500" dirty="0"/>
                         </a:p>
                       </a:txBody>
                       <a:tcPr anchor="ctr"/>
@@ -8057,7 +8581,7 @@
                                 <m:sSub>
                                   <m:sSubPr>
                                     <m:ctrlPr>
-                                      <a:rPr lang="es-CO" sz="1400" b="0" i="1" smtClean="0">
+                                      <a:rPr lang="es-CO" sz="1500" b="0" i="1" smtClean="0">
                                         <a:latin typeface="Cambria Math" panose="02040503050406030204" pitchFamily="18" charset="0"/>
                                         <a:ea typeface="Cambria Math" panose="02040503050406030204" pitchFamily="18" charset="0"/>
                                         <a:cs typeface="Shruti" panose="020B0502040204020203" pitchFamily="34" charset="0"/>
@@ -8066,7 +8590,7 @@
                                   </m:sSubPr>
                                   <m:e>
                                     <m:r>
-                                      <a:rPr lang="es-CO" sz="1400" b="0" i="1" smtClean="0">
+                                      <a:rPr lang="es-CO" sz="1500" b="0" i="1" smtClean="0">
                                         <a:latin typeface="Cambria Math" panose="02040503050406030204" pitchFamily="18" charset="0"/>
                                         <a:ea typeface="Cambria Math" panose="02040503050406030204" pitchFamily="18" charset="0"/>
                                         <a:cs typeface="Shruti" panose="020B0502040204020203" pitchFamily="34" charset="0"/>
@@ -8076,7 +8600,7 @@
                                   </m:e>
                                   <m:sub>
                                     <m:r>
-                                      <a:rPr lang="es-CO" sz="1400" b="0" i="1" smtClean="0">
+                                      <a:rPr lang="es-CO" sz="1500" b="0" i="1" smtClean="0">
                                         <a:latin typeface="Cambria Math" panose="02040503050406030204" pitchFamily="18" charset="0"/>
                                         <a:ea typeface="Cambria Math" panose="02040503050406030204" pitchFamily="18" charset="0"/>
                                         <a:cs typeface="Shruti" panose="020B0502040204020203" pitchFamily="34" charset="0"/>
@@ -8088,7 +8612,7 @@
                               </m:oMath>
                             </m:oMathPara>
                           </a14:m>
-                          <a:endParaRPr lang="es-CO" sz="1400" dirty="0"/>
+                          <a:endParaRPr lang="es-CO" sz="1500" dirty="0"/>
                         </a:p>
                       </a:txBody>
                       <a:tcPr anchor="ctr"/>
@@ -8099,7 +8623,7 @@
                       </a:ext>
                     </a:extLst>
                   </a:tr>
-                  <a:tr h="459018">
+                  <a:tr h="459019">
                     <a:tc>
                       <a:txBody>
                         <a:bodyPr/>
@@ -8129,7 +8653,7 @@
                                 <m:sSub>
                                   <m:sSubPr>
                                     <m:ctrlPr>
-                                      <a:rPr lang="es-CO" sz="1400" b="0" i="1" smtClean="0">
+                                      <a:rPr lang="es-CO" sz="1500" b="0" i="1" smtClean="0">
                                         <a:latin typeface="Cambria Math" panose="02040503050406030204" pitchFamily="18" charset="0"/>
                                         <a:ea typeface="Cambria Math" panose="02040503050406030204" pitchFamily="18" charset="0"/>
                                         <a:cs typeface="Shruti" panose="020B0502040204020203" pitchFamily="34" charset="0"/>
@@ -8138,7 +8662,7 @@
                                   </m:sSubPr>
                                   <m:e>
                                     <m:r>
-                                      <a:rPr lang="es-CO" sz="1400" b="0" i="1" smtClean="0">
+                                      <a:rPr lang="es-CO" sz="1500" b="0" i="1" smtClean="0">
                                         <a:latin typeface="Cambria Math" panose="02040503050406030204" pitchFamily="18" charset="0"/>
                                         <a:ea typeface="Cambria Math" panose="02040503050406030204" pitchFamily="18" charset="0"/>
                                         <a:cs typeface="Shruti" panose="020B0502040204020203" pitchFamily="34" charset="0"/>
@@ -8148,27 +8672,19 @@
                                   </m:e>
                                   <m:sub>
                                     <m:r>
-                                      <a:rPr lang="es-CO" sz="1400" b="0" i="1" smtClean="0">
+                                      <a:rPr lang="es-CO" sz="1500" b="0" i="1" smtClean="0">
                                         <a:latin typeface="Cambria Math" panose="02040503050406030204" pitchFamily="18" charset="0"/>
                                         <a:ea typeface="Cambria Math" panose="02040503050406030204" pitchFamily="18" charset="0"/>
                                         <a:cs typeface="Shruti" panose="020B0502040204020203" pitchFamily="34" charset="0"/>
                                       </a:rPr>
-                                      <m:t>6</m:t>
-                                    </m:r>
-                                    <m:r>
-                                      <a:rPr lang="es-CO" sz="1400" b="0" i="1" smtClean="0">
-                                        <a:latin typeface="Cambria Math" panose="02040503050406030204" pitchFamily="18" charset="0"/>
-                                        <a:ea typeface="Cambria Math" panose="02040503050406030204" pitchFamily="18" charset="0"/>
-                                        <a:cs typeface="Shruti" panose="020B0502040204020203" pitchFamily="34" charset="0"/>
-                                      </a:rPr>
-                                      <m:t>2</m:t>
+                                      <m:t>62</m:t>
                                     </m:r>
                                   </m:sub>
                                 </m:sSub>
                               </m:oMath>
                             </m:oMathPara>
                           </a14:m>
-                          <a:endParaRPr lang="es-CO" sz="1400" dirty="0"/>
+                          <a:endParaRPr lang="es-CO" sz="1500" dirty="0"/>
                         </a:p>
                       </a:txBody>
                       <a:tcPr anchor="ctr"/>
@@ -8188,7 +8704,7 @@
                                 <m:sSub>
                                   <m:sSubPr>
                                     <m:ctrlPr>
-                                      <a:rPr lang="es-CO" sz="1400" b="0" i="1" smtClean="0">
+                                      <a:rPr lang="es-CO" sz="1500" b="0" i="1" smtClean="0">
                                         <a:latin typeface="Cambria Math" panose="02040503050406030204" pitchFamily="18" charset="0"/>
                                         <a:ea typeface="Cambria Math" panose="02040503050406030204" pitchFamily="18" charset="0"/>
                                         <a:cs typeface="Shruti" panose="020B0502040204020203" pitchFamily="34" charset="0"/>
@@ -8197,7 +8713,7 @@
                                   </m:sSubPr>
                                   <m:e>
                                     <m:r>
-                                      <a:rPr lang="es-CO" sz="1400" b="0" i="1" smtClean="0">
+                                      <a:rPr lang="es-CO" sz="1500" b="0" i="1" smtClean="0">
                                         <a:latin typeface="Cambria Math" panose="02040503050406030204" pitchFamily="18" charset="0"/>
                                         <a:ea typeface="Cambria Math" panose="02040503050406030204" pitchFamily="18" charset="0"/>
                                         <a:cs typeface="Shruti" panose="020B0502040204020203" pitchFamily="34" charset="0"/>
@@ -8207,7 +8723,7 @@
                                   </m:e>
                                   <m:sub>
                                     <m:r>
-                                      <a:rPr lang="es-CO" sz="1400" b="0" i="1" smtClean="0">
+                                      <a:rPr lang="es-CO" sz="1500" b="0" i="1" smtClean="0">
                                         <a:latin typeface="Cambria Math" panose="02040503050406030204" pitchFamily="18" charset="0"/>
                                         <a:ea typeface="Cambria Math" panose="02040503050406030204" pitchFamily="18" charset="0"/>
                                         <a:cs typeface="Shruti" panose="020B0502040204020203" pitchFamily="34" charset="0"/>
@@ -8219,7 +8735,7 @@
                               </m:oMath>
                             </m:oMathPara>
                           </a14:m>
-                          <a:endParaRPr lang="es-CO" sz="1400" dirty="0"/>
+                          <a:endParaRPr lang="es-CO" sz="1500" dirty="0"/>
                         </a:p>
                       </a:txBody>
                       <a:tcPr anchor="ctr"/>
@@ -8239,7 +8755,7 @@
                                 <m:sSub>
                                   <m:sSubPr>
                                     <m:ctrlPr>
-                                      <a:rPr lang="es-CO" sz="1400" b="0" i="1" smtClean="0">
+                                      <a:rPr lang="es-CO" sz="1500" b="0" i="1" smtClean="0">
                                         <a:latin typeface="Cambria Math" panose="02040503050406030204" pitchFamily="18" charset="0"/>
                                         <a:ea typeface="Cambria Math" panose="02040503050406030204" pitchFamily="18" charset="0"/>
                                         <a:cs typeface="Shruti" panose="020B0502040204020203" pitchFamily="34" charset="0"/>
@@ -8248,7 +8764,7 @@
                                   </m:sSubPr>
                                   <m:e>
                                     <m:r>
-                                      <a:rPr lang="es-CO" sz="1400" b="0" i="1" smtClean="0">
+                                      <a:rPr lang="es-CO" sz="1500" b="0" i="1" smtClean="0">
                                         <a:latin typeface="Cambria Math" panose="02040503050406030204" pitchFamily="18" charset="0"/>
                                         <a:ea typeface="Cambria Math" panose="02040503050406030204" pitchFamily="18" charset="0"/>
                                         <a:cs typeface="Shruti" panose="020B0502040204020203" pitchFamily="34" charset="0"/>
@@ -8258,7 +8774,7 @@
                                   </m:e>
                                   <m:sub>
                                     <m:r>
-                                      <a:rPr lang="es-CO" sz="1400" b="0" i="1" smtClean="0">
+                                      <a:rPr lang="es-CO" sz="1500" b="0" i="1" smtClean="0">
                                         <a:latin typeface="Cambria Math" panose="02040503050406030204" pitchFamily="18" charset="0"/>
                                         <a:ea typeface="Cambria Math" panose="02040503050406030204" pitchFamily="18" charset="0"/>
                                         <a:cs typeface="Shruti" panose="020B0502040204020203" pitchFamily="34" charset="0"/>
@@ -8270,7 +8786,7 @@
                               </m:oMath>
                             </m:oMathPara>
                           </a14:m>
-                          <a:endParaRPr lang="es-CO" sz="1400" dirty="0"/>
+                          <a:endParaRPr lang="es-CO" sz="1500" dirty="0"/>
                         </a:p>
                       </a:txBody>
                       <a:tcPr anchor="ctr"/>
@@ -8290,7 +8806,7 @@
                                 <m:sSub>
                                   <m:sSubPr>
                                     <m:ctrlPr>
-                                      <a:rPr lang="es-CO" sz="1400" b="0" i="1" smtClean="0">
+                                      <a:rPr lang="es-CO" sz="1500" b="0" i="1" smtClean="0">
                                         <a:latin typeface="Cambria Math" panose="02040503050406030204" pitchFamily="18" charset="0"/>
                                         <a:ea typeface="Cambria Math" panose="02040503050406030204" pitchFamily="18" charset="0"/>
                                         <a:cs typeface="Shruti" panose="020B0502040204020203" pitchFamily="34" charset="0"/>
@@ -8299,7 +8815,7 @@
                                   </m:sSubPr>
                                   <m:e>
                                     <m:r>
-                                      <a:rPr lang="es-CO" sz="1400" b="0" i="1" smtClean="0">
+                                      <a:rPr lang="es-CO" sz="1500" b="0" i="1" smtClean="0">
                                         <a:latin typeface="Cambria Math" panose="02040503050406030204" pitchFamily="18" charset="0"/>
                                         <a:ea typeface="Cambria Math" panose="02040503050406030204" pitchFamily="18" charset="0"/>
                                         <a:cs typeface="Shruti" panose="020B0502040204020203" pitchFamily="34" charset="0"/>
@@ -8309,7 +8825,7 @@
                                   </m:e>
                                   <m:sub>
                                     <m:r>
-                                      <a:rPr lang="es-CO" sz="1400" b="0" i="1" smtClean="0">
+                                      <a:rPr lang="es-CO" sz="1500" b="0" i="1" smtClean="0">
                                         <a:latin typeface="Cambria Math" panose="02040503050406030204" pitchFamily="18" charset="0"/>
                                         <a:ea typeface="Cambria Math" panose="02040503050406030204" pitchFamily="18" charset="0"/>
                                         <a:cs typeface="Shruti" panose="020B0502040204020203" pitchFamily="34" charset="0"/>
@@ -8321,7 +8837,7 @@
                               </m:oMath>
                             </m:oMathPara>
                           </a14:m>
-                          <a:endParaRPr lang="es-CO" sz="1400" dirty="0"/>
+                          <a:endParaRPr lang="es-CO" sz="1500" dirty="0"/>
                         </a:p>
                       </a:txBody>
                       <a:tcPr anchor="ctr"/>
@@ -8341,7 +8857,7 @@
                                 <m:sSub>
                                   <m:sSubPr>
                                     <m:ctrlPr>
-                                      <a:rPr lang="es-CO" sz="1400" b="0" i="1" smtClean="0">
+                                      <a:rPr lang="es-CO" sz="1500" b="0" i="1" smtClean="0">
                                         <a:latin typeface="Cambria Math" panose="02040503050406030204" pitchFamily="18" charset="0"/>
                                         <a:ea typeface="Cambria Math" panose="02040503050406030204" pitchFamily="18" charset="0"/>
                                         <a:cs typeface="Shruti" panose="020B0502040204020203" pitchFamily="34" charset="0"/>
@@ -8350,7 +8866,7 @@
                                   </m:sSubPr>
                                   <m:e>
                                     <m:r>
-                                      <a:rPr lang="es-CO" sz="1400" b="0" i="1" smtClean="0">
+                                      <a:rPr lang="es-CO" sz="1500" b="0" i="1" smtClean="0">
                                         <a:latin typeface="Cambria Math" panose="02040503050406030204" pitchFamily="18" charset="0"/>
                                         <a:ea typeface="Cambria Math" panose="02040503050406030204" pitchFamily="18" charset="0"/>
                                         <a:cs typeface="Shruti" panose="020B0502040204020203" pitchFamily="34" charset="0"/>
@@ -8360,7 +8876,7 @@
                                   </m:e>
                                   <m:sub>
                                     <m:r>
-                                      <a:rPr lang="es-CO" sz="1400" b="0" i="1" smtClean="0">
+                                      <a:rPr lang="es-CO" sz="1500" b="0" i="1" smtClean="0">
                                         <a:latin typeface="Cambria Math" panose="02040503050406030204" pitchFamily="18" charset="0"/>
                                         <a:ea typeface="Cambria Math" panose="02040503050406030204" pitchFamily="18" charset="0"/>
                                         <a:cs typeface="Shruti" panose="020B0502040204020203" pitchFamily="34" charset="0"/>
@@ -8372,7 +8888,7 @@
                               </m:oMath>
                             </m:oMathPara>
                           </a14:m>
-                          <a:endParaRPr lang="es-CO" sz="1400" dirty="0"/>
+                          <a:endParaRPr lang="es-CO" sz="1500" dirty="0"/>
                         </a:p>
                       </a:txBody>
                       <a:tcPr anchor="ctr"/>
@@ -8392,7 +8908,7 @@
                                 <m:sSub>
                                   <m:sSubPr>
                                     <m:ctrlPr>
-                                      <a:rPr lang="es-CO" sz="1400" b="0" i="1" smtClean="0">
+                                      <a:rPr lang="es-CO" sz="1500" b="0" i="1" smtClean="0">
                                         <a:latin typeface="Cambria Math" panose="02040503050406030204" pitchFamily="18" charset="0"/>
                                         <a:ea typeface="Cambria Math" panose="02040503050406030204" pitchFamily="18" charset="0"/>
                                         <a:cs typeface="Shruti" panose="020B0502040204020203" pitchFamily="34" charset="0"/>
@@ -8401,7 +8917,7 @@
                                   </m:sSubPr>
                                   <m:e>
                                     <m:r>
-                                      <a:rPr lang="es-CO" sz="1400" b="0" i="1" smtClean="0">
+                                      <a:rPr lang="es-CO" sz="1500" b="0" i="1" smtClean="0">
                                         <a:latin typeface="Cambria Math" panose="02040503050406030204" pitchFamily="18" charset="0"/>
                                         <a:ea typeface="Cambria Math" panose="02040503050406030204" pitchFamily="18" charset="0"/>
                                         <a:cs typeface="Shruti" panose="020B0502040204020203" pitchFamily="34" charset="0"/>
@@ -8411,7 +8927,7 @@
                                   </m:e>
                                   <m:sub>
                                     <m:r>
-                                      <a:rPr lang="es-CO" sz="1400" b="0" i="1" smtClean="0">
+                                      <a:rPr lang="es-CO" sz="1500" b="0" i="1" smtClean="0">
                                         <a:latin typeface="Cambria Math" panose="02040503050406030204" pitchFamily="18" charset="0"/>
                                         <a:ea typeface="Cambria Math" panose="02040503050406030204" pitchFamily="18" charset="0"/>
                                         <a:cs typeface="Shruti" panose="020B0502040204020203" pitchFamily="34" charset="0"/>
@@ -8423,7 +8939,7 @@
                               </m:oMath>
                             </m:oMathPara>
                           </a14:m>
-                          <a:endParaRPr lang="es-CO" sz="1400" dirty="0"/>
+                          <a:endParaRPr lang="es-CO" sz="1500" dirty="0"/>
                         </a:p>
                       </a:txBody>
                       <a:tcPr anchor="ctr"/>
@@ -8461,8 +8977,8 @@
               </p:nvPr>
             </p:nvGraphicFramePr>
             <p:xfrm>
-              <a:off x="6603078" y="1978187"/>
-              <a:ext cx="4712624" cy="2761452"/>
+              <a:off x="6603079" y="1978187"/>
+              <a:ext cx="4712624" cy="2761458"/>
             </p:xfrm>
             <a:graphic>
               <a:graphicData uri="http://schemas.openxmlformats.org/drawingml/2006/table">
@@ -8521,14 +9037,14 @@
                       </a:extLst>
                     </a:gridCol>
                   </a:tblGrid>
-                  <a:tr h="466362">
+                  <a:tr h="466363">
                     <a:tc>
                       <a:txBody>
                         <a:bodyPr/>
                         <a:lstStyle/>
                         <a:p>
                           <a:pPr algn="ctr"/>
-                          <a:endParaRPr lang="es-CO"/>
+                          <a:endParaRPr lang="es-CO" sz="1300"/>
                         </a:p>
                       </a:txBody>
                       <a:tcPr anchor="ctr"/>
@@ -8623,7 +9139,7 @@
                       </a:ext>
                     </a:extLst>
                   </a:tr>
-                  <a:tr h="459018">
+                  <a:tr h="459019">
                     <a:tc>
                       <a:txBody>
                         <a:bodyPr/>
@@ -8746,7 +9262,7 @@
                       </a:ext>
                     </a:extLst>
                   </a:tr>
-                  <a:tr h="459018">
+                  <a:tr h="459019">
                     <a:tc>
                       <a:txBody>
                         <a:bodyPr/>
@@ -8869,7 +9385,7 @@
                       </a:ext>
                     </a:extLst>
                   </a:tr>
-                  <a:tr h="459018">
+                  <a:tr h="459019">
                     <a:tc>
                       <a:txBody>
                         <a:bodyPr/>
@@ -8992,7 +9508,7 @@
                       </a:ext>
                     </a:extLst>
                   </a:tr>
-                  <a:tr h="459018">
+                  <a:tr h="459019">
                     <a:tc>
                       <a:txBody>
                         <a:bodyPr/>
@@ -9115,7 +9631,7 @@
                       </a:ext>
                     </a:extLst>
                   </a:tr>
-                  <a:tr h="459018">
+                  <a:tr h="459019">
                     <a:tc>
                       <a:txBody>
                         <a:bodyPr/>
@@ -9261,7 +9777,7 @@
         </p:nvCxnSpPr>
         <p:spPr>
           <a:xfrm flipV="1">
-            <a:off x="3568779" y="1530117"/>
+            <a:off x="3568782" y="1530119"/>
             <a:ext cx="1533221" cy="644683"/>
           </a:xfrm>
           <a:prstGeom prst="straightConnector1">
@@ -9302,7 +9818,7 @@
         </p:nvCxnSpPr>
         <p:spPr>
           <a:xfrm flipV="1">
-            <a:off x="5344707" y="1852458"/>
+            <a:off x="5344710" y="1852462"/>
             <a:ext cx="9293" cy="1091329"/>
           </a:xfrm>
           <a:prstGeom prst="straightConnector1">
@@ -9341,7 +9857,7 @@
         </p:nvSpPr>
         <p:spPr>
           <a:xfrm rot="16200000">
-            <a:off x="5699063" y="2885379"/>
+            <a:off x="5699066" y="2885380"/>
             <a:ext cx="1409491" cy="369332"/>
           </a:xfrm>
           <a:prstGeom prst="rect">
@@ -9413,8 +9929,8 @@
         </p:nvCxnSpPr>
         <p:spPr>
           <a:xfrm>
-            <a:off x="1634339" y="3370116"/>
-            <a:ext cx="2664000" cy="1307306"/>
+            <a:off x="1634339" y="3370118"/>
+            <a:ext cx="2664000" cy="1307307"/>
           </a:xfrm>
           <a:prstGeom prst="straightConnector1">
             <a:avLst/>
@@ -9456,8 +9972,8 @@
         </p:nvCxnSpPr>
         <p:spPr>
           <a:xfrm>
-            <a:off x="2735522" y="4829325"/>
-            <a:ext cx="1549210" cy="3348"/>
+            <a:off x="2735523" y="4829326"/>
+            <a:ext cx="1549211" cy="3348"/>
           </a:xfrm>
           <a:prstGeom prst="straightConnector1">
             <a:avLst/>
@@ -9497,7 +10013,7 @@
         </p:nvCxnSpPr>
         <p:spPr>
           <a:xfrm flipH="1">
-            <a:off x="4670214" y="3552109"/>
+            <a:off x="4670215" y="3552112"/>
             <a:ext cx="589716" cy="1003257"/>
           </a:xfrm>
           <a:prstGeom prst="straightConnector1">
@@ -9538,7 +10054,7 @@
         </p:nvCxnSpPr>
         <p:spPr>
           <a:xfrm>
-            <a:off x="1528431" y="3489335"/>
+            <a:off x="1528431" y="3489338"/>
             <a:ext cx="792140" cy="1110971"/>
           </a:xfrm>
           <a:prstGeom prst="straightConnector1">
@@ -9579,8 +10095,8 @@
         </p:nvCxnSpPr>
         <p:spPr>
           <a:xfrm flipV="1">
-            <a:off x="1641929" y="2377701"/>
-            <a:ext cx="1404786" cy="730595"/>
+            <a:off x="1641931" y="2377703"/>
+            <a:ext cx="1404787" cy="730595"/>
           </a:xfrm>
           <a:prstGeom prst="straightConnector1">
             <a:avLst/>
@@ -9618,8 +10134,8 @@
         </p:nvGrpSpPr>
         <p:grpSpPr>
           <a:xfrm rot="9011756">
-            <a:off x="2742511" y="4301363"/>
-            <a:ext cx="518548" cy="108930"/>
+            <a:off x="2742511" y="4301365"/>
+            <a:ext cx="518548" cy="108931"/>
             <a:chOff x="7777424" y="2883875"/>
             <a:chExt cx="593258" cy="137455"/>
           </a:xfrm>
@@ -9783,8 +10299,8 @@
         </p:nvGrpSpPr>
         <p:grpSpPr>
           <a:xfrm rot="8942499">
-            <a:off x="4386231" y="3422924"/>
-            <a:ext cx="518548" cy="108930"/>
+            <a:off x="4386231" y="3422926"/>
+            <a:ext cx="518548" cy="108931"/>
             <a:chOff x="7777424" y="2883875"/>
             <a:chExt cx="593258" cy="137455"/>
           </a:xfrm>
@@ -9948,7 +10464,7 @@
         </p:nvGrpSpPr>
         <p:grpSpPr>
           <a:xfrm rot="14608653">
-            <a:off x="3395123" y="3105978"/>
+            <a:off x="3395123" y="3105982"/>
             <a:ext cx="470144" cy="120145"/>
             <a:chOff x="7777424" y="2883875"/>
             <a:chExt cx="593258" cy="137455"/>
@@ -10113,8 +10629,8 @@
         </p:nvGrpSpPr>
         <p:grpSpPr>
           <a:xfrm rot="1429383">
-            <a:off x="4088545" y="2822247"/>
-            <a:ext cx="518548" cy="108930"/>
+            <a:off x="4088546" y="2822249"/>
+            <a:ext cx="518548" cy="108931"/>
             <a:chOff x="7777424" y="2883875"/>
             <a:chExt cx="593258" cy="137455"/>
           </a:xfrm>
@@ -10332,7 +10848,7 @@
         </p:nvSpPr>
         <p:spPr>
           <a:xfrm>
-            <a:off x="5897880" y="1354597"/>
+            <a:off x="5897880" y="1354598"/>
             <a:ext cx="2651760" cy="369332"/>
           </a:xfrm>
           <a:prstGeom prst="rect">
@@ -10362,6 +10878,4092 @@
     <p:extLst>
       <p:ext uri="{BB962C8B-B14F-4D97-AF65-F5344CB8AC3E}">
         <p14:creationId xmlns:p14="http://schemas.microsoft.com/office/powerpoint/2010/main" val="3027999517"/>
+      </p:ext>
+    </p:extLst>
+  </p:cSld>
+  <p:clrMapOvr>
+    <a:masterClrMapping/>
+  </p:clrMapOvr>
+</p:sld>
+</file>
+
+<file path=ppt/slides/slide2.xml><?xml version="1.0" encoding="utf-8"?>
+<p:sld xmlns:a="http://schemas.openxmlformats.org/drawingml/2006/main" xmlns:r="http://schemas.openxmlformats.org/officeDocument/2006/relationships" xmlns:p="http://schemas.openxmlformats.org/presentationml/2006/main">
+  <p:cSld>
+    <p:spTree>
+      <p:nvGrpSpPr>
+        <p:cNvPr id="1" name="">
+          <a:extLst>
+            <a:ext uri="{FF2B5EF4-FFF2-40B4-BE49-F238E27FC236}">
+              <a16:creationId xmlns:a16="http://schemas.microsoft.com/office/drawing/2014/main" id="{3569DC74-D401-278D-C6AE-C035563BDF3D}"/>
+            </a:ext>
+          </a:extLst>
+        </p:cNvPr>
+        <p:cNvGrpSpPr/>
+        <p:nvPr/>
+      </p:nvGrpSpPr>
+      <p:grpSpPr>
+        <a:xfrm>
+          <a:off x="0" y="0"/>
+          <a:ext cx="0" cy="0"/>
+          <a:chOff x="0" y="0"/>
+          <a:chExt cx="0" cy="0"/>
+        </a:xfrm>
+      </p:grpSpPr>
+      <p:sp>
+        <p:nvSpPr>
+          <p:cNvPr id="295" name="Rectángulo: esquinas redondeadas 294">
+            <a:extLst>
+              <a:ext uri="{FF2B5EF4-FFF2-40B4-BE49-F238E27FC236}">
+                <a16:creationId xmlns:a16="http://schemas.microsoft.com/office/drawing/2014/main" id="{F4A7B192-4629-9840-F817-630FDE283214}"/>
+              </a:ext>
+            </a:extLst>
+          </p:cNvPr>
+          <p:cNvSpPr/>
+          <p:nvPr/>
+        </p:nvSpPr>
+        <p:spPr>
+          <a:xfrm rot="20214259">
+            <a:off x="5161593" y="1734287"/>
+            <a:ext cx="1980000" cy="216000"/>
+          </a:xfrm>
+          <a:prstGeom prst="roundRect">
+            <a:avLst/>
+          </a:prstGeom>
+          <a:solidFill>
+            <a:srgbClr val="EB712D">
+              <a:alpha val="27843"/>
+            </a:srgbClr>
+          </a:solidFill>
+          <a:ln>
+            <a:noFill/>
+          </a:ln>
+        </p:spPr>
+        <p:style>
+          <a:lnRef idx="2">
+            <a:schemeClr val="accent1">
+              <a:shade val="15000"/>
+            </a:schemeClr>
+          </a:lnRef>
+          <a:fillRef idx="1">
+            <a:schemeClr val="accent1"/>
+          </a:fillRef>
+          <a:effectRef idx="0">
+            <a:schemeClr val="accent1"/>
+          </a:effectRef>
+          <a:fontRef idx="minor">
+            <a:schemeClr val="lt1"/>
+          </a:fontRef>
+        </p:style>
+        <p:txBody>
+          <a:bodyPr rtlCol="0" anchor="ctr"/>
+          <a:lstStyle/>
+          <a:p>
+            <a:pPr algn="ctr"/>
+            <a:endParaRPr lang="es-CO"/>
+          </a:p>
+        </p:txBody>
+      </p:sp>
+      <p:sp>
+        <p:nvSpPr>
+          <p:cNvPr id="294" name="Rectángulo: esquinas redondeadas 293">
+            <a:extLst>
+              <a:ext uri="{FF2B5EF4-FFF2-40B4-BE49-F238E27FC236}">
+                <a16:creationId xmlns:a16="http://schemas.microsoft.com/office/drawing/2014/main" id="{9347F12F-F109-5D85-4CDD-6065BA79680A}"/>
+              </a:ext>
+            </a:extLst>
+          </p:cNvPr>
+          <p:cNvSpPr/>
+          <p:nvPr/>
+        </p:nvSpPr>
+        <p:spPr>
+          <a:xfrm rot="1373932">
+            <a:off x="5176833" y="2686787"/>
+            <a:ext cx="1980000" cy="216000"/>
+          </a:xfrm>
+          <a:prstGeom prst="roundRect">
+            <a:avLst/>
+          </a:prstGeom>
+          <a:solidFill>
+            <a:srgbClr val="EB712D">
+              <a:alpha val="38824"/>
+            </a:srgbClr>
+          </a:solidFill>
+          <a:ln>
+            <a:noFill/>
+          </a:ln>
+        </p:spPr>
+        <p:style>
+          <a:lnRef idx="2">
+            <a:schemeClr val="accent1">
+              <a:shade val="15000"/>
+            </a:schemeClr>
+          </a:lnRef>
+          <a:fillRef idx="1">
+            <a:schemeClr val="accent1"/>
+          </a:fillRef>
+          <a:effectRef idx="0">
+            <a:schemeClr val="accent1"/>
+          </a:effectRef>
+          <a:fontRef idx="minor">
+            <a:schemeClr val="lt1"/>
+          </a:fontRef>
+        </p:style>
+        <p:txBody>
+          <a:bodyPr rtlCol="0" anchor="ctr"/>
+          <a:lstStyle/>
+          <a:p>
+            <a:pPr algn="ctr"/>
+            <a:endParaRPr lang="es-CO"/>
+          </a:p>
+        </p:txBody>
+      </p:sp>
+      <p:sp>
+        <p:nvSpPr>
+          <p:cNvPr id="253" name="Rectángulo: esquinas redondeadas 252">
+            <a:extLst>
+              <a:ext uri="{FF2B5EF4-FFF2-40B4-BE49-F238E27FC236}">
+                <a16:creationId xmlns:a16="http://schemas.microsoft.com/office/drawing/2014/main" id="{DD59F065-7FFC-8E5E-45FE-2B6DFA77F5DB}"/>
+              </a:ext>
+            </a:extLst>
+          </p:cNvPr>
+          <p:cNvSpPr/>
+          <p:nvPr/>
+        </p:nvSpPr>
+        <p:spPr>
+          <a:xfrm rot="16200000">
+            <a:off x="6366660" y="2303603"/>
+            <a:ext cx="1537735" cy="216000"/>
+          </a:xfrm>
+          <a:prstGeom prst="roundRect">
+            <a:avLst/>
+          </a:prstGeom>
+          <a:solidFill>
+            <a:srgbClr val="EB712D">
+              <a:alpha val="50980"/>
+            </a:srgbClr>
+          </a:solidFill>
+          <a:ln>
+            <a:noFill/>
+          </a:ln>
+        </p:spPr>
+        <p:style>
+          <a:lnRef idx="2">
+            <a:schemeClr val="accent1">
+              <a:shade val="15000"/>
+            </a:schemeClr>
+          </a:lnRef>
+          <a:fillRef idx="1">
+            <a:schemeClr val="accent1"/>
+          </a:fillRef>
+          <a:effectRef idx="0">
+            <a:schemeClr val="accent1"/>
+          </a:effectRef>
+          <a:fontRef idx="minor">
+            <a:schemeClr val="lt1"/>
+          </a:fontRef>
+        </p:style>
+        <p:txBody>
+          <a:bodyPr rtlCol="0" anchor="ctr"/>
+          <a:lstStyle/>
+          <a:p>
+            <a:pPr algn="ctr"/>
+            <a:endParaRPr lang="es-CO"/>
+          </a:p>
+        </p:txBody>
+      </p:sp>
+      <p:sp>
+        <p:nvSpPr>
+          <p:cNvPr id="252" name="Rectángulo: esquinas redondeadas 251">
+            <a:extLst>
+              <a:ext uri="{FF2B5EF4-FFF2-40B4-BE49-F238E27FC236}">
+                <a16:creationId xmlns:a16="http://schemas.microsoft.com/office/drawing/2014/main" id="{60352BAE-B626-69D6-8813-CDD232DEF536}"/>
+              </a:ext>
+            </a:extLst>
+          </p:cNvPr>
+          <p:cNvSpPr/>
+          <p:nvPr/>
+        </p:nvSpPr>
+        <p:spPr>
+          <a:xfrm rot="19814728">
+            <a:off x="5749184" y="3472423"/>
+            <a:ext cx="1537735" cy="216000"/>
+          </a:xfrm>
+          <a:prstGeom prst="roundRect">
+            <a:avLst/>
+          </a:prstGeom>
+          <a:solidFill>
+            <a:srgbClr val="EB712D">
+              <a:alpha val="50980"/>
+            </a:srgbClr>
+          </a:solidFill>
+          <a:ln>
+            <a:noFill/>
+          </a:ln>
+        </p:spPr>
+        <p:style>
+          <a:lnRef idx="2">
+            <a:schemeClr val="accent1">
+              <a:shade val="15000"/>
+            </a:schemeClr>
+          </a:lnRef>
+          <a:fillRef idx="1">
+            <a:schemeClr val="accent1"/>
+          </a:fillRef>
+          <a:effectRef idx="0">
+            <a:schemeClr val="accent1"/>
+          </a:effectRef>
+          <a:fontRef idx="minor">
+            <a:schemeClr val="lt1"/>
+          </a:fontRef>
+        </p:style>
+        <p:txBody>
+          <a:bodyPr rtlCol="0" anchor="ctr"/>
+          <a:lstStyle/>
+          <a:p>
+            <a:pPr algn="ctr"/>
+            <a:endParaRPr lang="es-CO"/>
+          </a:p>
+        </p:txBody>
+      </p:sp>
+      <p:sp>
+        <p:nvSpPr>
+          <p:cNvPr id="251" name="Rectángulo: esquinas redondeadas 250">
+            <a:extLst>
+              <a:ext uri="{FF2B5EF4-FFF2-40B4-BE49-F238E27FC236}">
+                <a16:creationId xmlns:a16="http://schemas.microsoft.com/office/drawing/2014/main" id="{FD1B6044-DD44-14B5-9551-E08AB4C90EC0}"/>
+              </a:ext>
+            </a:extLst>
+          </p:cNvPr>
+          <p:cNvSpPr/>
+          <p:nvPr/>
+        </p:nvSpPr>
+        <p:spPr>
+          <a:xfrm rot="3837572">
+            <a:off x="4722795" y="2972559"/>
+            <a:ext cx="1537735" cy="216000"/>
+          </a:xfrm>
+          <a:prstGeom prst="roundRect">
+            <a:avLst/>
+          </a:prstGeom>
+          <a:solidFill>
+            <a:srgbClr val="EB712D">
+              <a:alpha val="50980"/>
+            </a:srgbClr>
+          </a:solidFill>
+          <a:ln>
+            <a:noFill/>
+          </a:ln>
+        </p:spPr>
+        <p:style>
+          <a:lnRef idx="2">
+            <a:schemeClr val="accent1">
+              <a:shade val="15000"/>
+            </a:schemeClr>
+          </a:lnRef>
+          <a:fillRef idx="1">
+            <a:schemeClr val="accent1"/>
+          </a:fillRef>
+          <a:effectRef idx="0">
+            <a:schemeClr val="accent1"/>
+          </a:effectRef>
+          <a:fontRef idx="minor">
+            <a:schemeClr val="lt1"/>
+          </a:fontRef>
+        </p:style>
+        <p:txBody>
+          <a:bodyPr rtlCol="0" anchor="ctr"/>
+          <a:lstStyle/>
+          <a:p>
+            <a:pPr algn="ctr"/>
+            <a:endParaRPr lang="es-CO"/>
+          </a:p>
+        </p:txBody>
+      </p:sp>
+      <p:sp>
+        <p:nvSpPr>
+          <p:cNvPr id="250" name="Rectángulo: esquinas redondeadas 249">
+            <a:extLst>
+              <a:ext uri="{FF2B5EF4-FFF2-40B4-BE49-F238E27FC236}">
+                <a16:creationId xmlns:a16="http://schemas.microsoft.com/office/drawing/2014/main" id="{C065979B-2353-6A57-F7BF-7C21B4E801B8}"/>
+              </a:ext>
+            </a:extLst>
+          </p:cNvPr>
+          <p:cNvSpPr/>
+          <p:nvPr/>
+        </p:nvSpPr>
+        <p:spPr>
+          <a:xfrm rot="19933396">
+            <a:off x="3191321" y="2631911"/>
+            <a:ext cx="1870661" cy="216000"/>
+          </a:xfrm>
+          <a:prstGeom prst="roundRect">
+            <a:avLst/>
+          </a:prstGeom>
+          <a:solidFill>
+            <a:srgbClr val="EB712D">
+              <a:alpha val="50980"/>
+            </a:srgbClr>
+          </a:solidFill>
+          <a:ln>
+            <a:noFill/>
+          </a:ln>
+        </p:spPr>
+        <p:style>
+          <a:lnRef idx="2">
+            <a:schemeClr val="accent1">
+              <a:shade val="15000"/>
+            </a:schemeClr>
+          </a:lnRef>
+          <a:fillRef idx="1">
+            <a:schemeClr val="accent1"/>
+          </a:fillRef>
+          <a:effectRef idx="0">
+            <a:schemeClr val="accent1"/>
+          </a:effectRef>
+          <a:fontRef idx="minor">
+            <a:schemeClr val="lt1"/>
+          </a:fontRef>
+        </p:style>
+        <p:txBody>
+          <a:bodyPr rtlCol="0" anchor="ctr"/>
+          <a:lstStyle/>
+          <a:p>
+            <a:pPr algn="ctr"/>
+            <a:endParaRPr lang="es-CO"/>
+          </a:p>
+        </p:txBody>
+      </p:sp>
+      <p:cxnSp>
+        <p:nvCxnSpPr>
+          <p:cNvPr id="94" name="Conector recto de flecha 93">
+            <a:extLst>
+              <a:ext uri="{FF2B5EF4-FFF2-40B4-BE49-F238E27FC236}">
+                <a16:creationId xmlns:a16="http://schemas.microsoft.com/office/drawing/2014/main" id="{DE20938C-F2D5-765E-6938-F4EC6FB0BD01}"/>
+              </a:ext>
+            </a:extLst>
+          </p:cNvPr>
+          <p:cNvCxnSpPr>
+            <a:cxnSpLocks/>
+          </p:cNvCxnSpPr>
+          <p:nvPr/>
+        </p:nvCxnSpPr>
+        <p:spPr>
+          <a:xfrm>
+            <a:off x="5232635" y="2528620"/>
+            <a:ext cx="537304" cy="1113616"/>
+          </a:xfrm>
+          <a:prstGeom prst="straightConnector1">
+            <a:avLst/>
+          </a:prstGeom>
+          <a:ln w="38100" cap="flat" cmpd="sng" algn="ctr">
+            <a:solidFill>
+              <a:schemeClr val="accent2"/>
+            </a:solidFill>
+            <a:prstDash val="solid"/>
+            <a:round/>
+            <a:headEnd type="arrow" w="med" len="med"/>
+            <a:tailEnd type="arrow" w="med" len="med"/>
+          </a:ln>
+        </p:spPr>
+        <p:style>
+          <a:lnRef idx="0">
+            <a:scrgbClr r="0" g="0" b="0"/>
+          </a:lnRef>
+          <a:fillRef idx="0">
+            <a:scrgbClr r="0" g="0" b="0"/>
+          </a:fillRef>
+          <a:effectRef idx="0">
+            <a:scrgbClr r="0" g="0" b="0"/>
+          </a:effectRef>
+          <a:fontRef idx="minor">
+            <a:schemeClr val="tx1"/>
+          </a:fontRef>
+        </p:style>
+      </p:cxnSp>
+      <p:sp>
+        <p:nvSpPr>
+          <p:cNvPr id="128" name="Elipse 127">
+            <a:extLst>
+              <a:ext uri="{FF2B5EF4-FFF2-40B4-BE49-F238E27FC236}">
+                <a16:creationId xmlns:a16="http://schemas.microsoft.com/office/drawing/2014/main" id="{203B44FC-9827-B84B-AAE3-4105C594792A}"/>
+              </a:ext>
+            </a:extLst>
+          </p:cNvPr>
+          <p:cNvSpPr/>
+          <p:nvPr/>
+        </p:nvSpPr>
+        <p:spPr>
+          <a:xfrm>
+            <a:off x="4855479" y="1988620"/>
+            <a:ext cx="504000" cy="540000"/>
+          </a:xfrm>
+          <a:prstGeom prst="ellipse">
+            <a:avLst/>
+          </a:prstGeom>
+        </p:spPr>
+        <p:style>
+          <a:lnRef idx="0">
+            <a:schemeClr val="accent4"/>
+          </a:lnRef>
+          <a:fillRef idx="3">
+            <a:schemeClr val="accent4"/>
+          </a:fillRef>
+          <a:effectRef idx="3">
+            <a:schemeClr val="accent4"/>
+          </a:effectRef>
+          <a:fontRef idx="minor">
+            <a:schemeClr val="lt1"/>
+          </a:fontRef>
+        </p:style>
+        <p:txBody>
+          <a:bodyPr rtlCol="0" anchor="ctr"/>
+          <a:lstStyle/>
+          <a:p>
+            <a:pPr algn="ctr"/>
+            <a:r>
+              <a:rPr lang="es-CO" sz="2400" dirty="0"/>
+              <a:t>3</a:t>
+            </a:r>
+            <a:endParaRPr lang="es-CO" dirty="0"/>
+          </a:p>
+        </p:txBody>
+      </p:sp>
+      <p:sp>
+        <p:nvSpPr>
+          <p:cNvPr id="131" name="Elipse 130">
+            <a:extLst>
+              <a:ext uri="{FF2B5EF4-FFF2-40B4-BE49-F238E27FC236}">
+                <a16:creationId xmlns:a16="http://schemas.microsoft.com/office/drawing/2014/main" id="{94CE5616-B098-75A2-4532-2543F2070770}"/>
+              </a:ext>
+            </a:extLst>
+          </p:cNvPr>
+          <p:cNvSpPr/>
+          <p:nvPr/>
+        </p:nvSpPr>
+        <p:spPr>
+          <a:xfrm>
+            <a:off x="6083052" y="4562673"/>
+            <a:ext cx="504000" cy="540000"/>
+          </a:xfrm>
+          <a:prstGeom prst="ellipse">
+            <a:avLst/>
+          </a:prstGeom>
+        </p:spPr>
+        <p:style>
+          <a:lnRef idx="0">
+            <a:schemeClr val="accent4"/>
+          </a:lnRef>
+          <a:fillRef idx="3">
+            <a:schemeClr val="accent4"/>
+          </a:fillRef>
+          <a:effectRef idx="3">
+            <a:schemeClr val="accent4"/>
+          </a:effectRef>
+          <a:fontRef idx="minor">
+            <a:schemeClr val="lt1"/>
+          </a:fontRef>
+        </p:style>
+        <p:txBody>
+          <a:bodyPr rtlCol="0" anchor="ctr"/>
+          <a:lstStyle/>
+          <a:p>
+            <a:pPr algn="ctr"/>
+            <a:r>
+              <a:rPr lang="es-CO" sz="2400" dirty="0"/>
+              <a:t>5</a:t>
+            </a:r>
+            <a:endParaRPr lang="es-CO" dirty="0"/>
+          </a:p>
+        </p:txBody>
+      </p:sp>
+      <p:sp>
+        <p:nvSpPr>
+          <p:cNvPr id="132" name="Elipse 131">
+            <a:extLst>
+              <a:ext uri="{FF2B5EF4-FFF2-40B4-BE49-F238E27FC236}">
+                <a16:creationId xmlns:a16="http://schemas.microsoft.com/office/drawing/2014/main" id="{ED0C5A4E-A14B-82C6-6277-7EF51CBAE168}"/>
+              </a:ext>
+            </a:extLst>
+          </p:cNvPr>
+          <p:cNvSpPr/>
+          <p:nvPr/>
+        </p:nvSpPr>
+        <p:spPr>
+          <a:xfrm>
+            <a:off x="6898647" y="2976707"/>
+            <a:ext cx="504000" cy="540000"/>
+          </a:xfrm>
+          <a:prstGeom prst="ellipse">
+            <a:avLst/>
+          </a:prstGeom>
+        </p:spPr>
+        <p:style>
+          <a:lnRef idx="0">
+            <a:schemeClr val="accent4"/>
+          </a:lnRef>
+          <a:fillRef idx="3">
+            <a:schemeClr val="accent4"/>
+          </a:fillRef>
+          <a:effectRef idx="3">
+            <a:schemeClr val="accent4"/>
+          </a:effectRef>
+          <a:fontRef idx="minor">
+            <a:schemeClr val="lt1"/>
+          </a:fontRef>
+        </p:style>
+        <p:txBody>
+          <a:bodyPr rtlCol="0" anchor="ctr"/>
+          <a:lstStyle/>
+          <a:p>
+            <a:pPr algn="ctr"/>
+            <a:r>
+              <a:rPr lang="es-CO" sz="2400" dirty="0"/>
+              <a:t>6</a:t>
+            </a:r>
+            <a:endParaRPr lang="es-CO" dirty="0"/>
+          </a:p>
+        </p:txBody>
+      </p:sp>
+      <p:sp>
+        <p:nvSpPr>
+          <p:cNvPr id="133" name="Elipse 132">
+            <a:extLst>
+              <a:ext uri="{FF2B5EF4-FFF2-40B4-BE49-F238E27FC236}">
+                <a16:creationId xmlns:a16="http://schemas.microsoft.com/office/drawing/2014/main" id="{87775D43-CD5D-56FA-C400-B0A6730DEF91}"/>
+              </a:ext>
+            </a:extLst>
+          </p:cNvPr>
+          <p:cNvSpPr/>
+          <p:nvPr/>
+        </p:nvSpPr>
+        <p:spPr>
+          <a:xfrm>
+            <a:off x="6900320" y="1260117"/>
+            <a:ext cx="504000" cy="540000"/>
+          </a:xfrm>
+          <a:prstGeom prst="ellipse">
+            <a:avLst/>
+          </a:prstGeom>
+        </p:spPr>
+        <p:style>
+          <a:lnRef idx="0">
+            <a:schemeClr val="accent4"/>
+          </a:lnRef>
+          <a:fillRef idx="3">
+            <a:schemeClr val="accent4"/>
+          </a:fillRef>
+          <a:effectRef idx="3">
+            <a:schemeClr val="accent4"/>
+          </a:effectRef>
+          <a:fontRef idx="minor">
+            <a:schemeClr val="lt1"/>
+          </a:fontRef>
+        </p:style>
+        <p:txBody>
+          <a:bodyPr rtlCol="0" anchor="ctr"/>
+          <a:lstStyle/>
+          <a:p>
+            <a:pPr algn="ctr"/>
+            <a:r>
+              <a:rPr lang="es-CO" sz="2400" dirty="0"/>
+              <a:t>7</a:t>
+            </a:r>
+            <a:endParaRPr lang="es-CO" dirty="0"/>
+          </a:p>
+        </p:txBody>
+      </p:sp>
+      <p:sp>
+        <p:nvSpPr>
+          <p:cNvPr id="134" name="Elipse 133">
+            <a:extLst>
+              <a:ext uri="{FF2B5EF4-FFF2-40B4-BE49-F238E27FC236}">
+                <a16:creationId xmlns:a16="http://schemas.microsoft.com/office/drawing/2014/main" id="{BA99C9E3-A328-3E77-AAEC-3BE13873BDAC}"/>
+              </a:ext>
+            </a:extLst>
+          </p:cNvPr>
+          <p:cNvSpPr/>
+          <p:nvPr/>
+        </p:nvSpPr>
+        <p:spPr>
+          <a:xfrm>
+            <a:off x="5625851" y="3643243"/>
+            <a:ext cx="504000" cy="540000"/>
+          </a:xfrm>
+          <a:prstGeom prst="ellipse">
+            <a:avLst/>
+          </a:prstGeom>
+        </p:spPr>
+        <p:style>
+          <a:lnRef idx="0">
+            <a:schemeClr val="accent4"/>
+          </a:lnRef>
+          <a:fillRef idx="3">
+            <a:schemeClr val="accent4"/>
+          </a:fillRef>
+          <a:effectRef idx="3">
+            <a:schemeClr val="accent4"/>
+          </a:effectRef>
+          <a:fontRef idx="minor">
+            <a:schemeClr val="lt1"/>
+          </a:fontRef>
+        </p:style>
+        <p:txBody>
+          <a:bodyPr rtlCol="0" anchor="ctr"/>
+          <a:lstStyle/>
+          <a:p>
+            <a:pPr algn="ctr"/>
+            <a:r>
+              <a:rPr lang="es-CO" sz="2400" dirty="0"/>
+              <a:t>4</a:t>
+            </a:r>
+            <a:endParaRPr lang="es-CO" dirty="0"/>
+          </a:p>
+        </p:txBody>
+      </p:sp>
+      <p:sp>
+        <p:nvSpPr>
+          <p:cNvPr id="135" name="Elipse 134">
+            <a:extLst>
+              <a:ext uri="{FF2B5EF4-FFF2-40B4-BE49-F238E27FC236}">
+                <a16:creationId xmlns:a16="http://schemas.microsoft.com/office/drawing/2014/main" id="{749A2358-1797-37EC-F0C1-481E8E19B3B4}"/>
+              </a:ext>
+            </a:extLst>
+          </p:cNvPr>
+          <p:cNvSpPr/>
+          <p:nvPr/>
+        </p:nvSpPr>
+        <p:spPr>
+          <a:xfrm>
+            <a:off x="4029843" y="4559325"/>
+            <a:ext cx="504000" cy="540000"/>
+          </a:xfrm>
+          <a:prstGeom prst="ellipse">
+            <a:avLst/>
+          </a:prstGeom>
+        </p:spPr>
+        <p:style>
+          <a:lnRef idx="0">
+            <a:schemeClr val="accent4"/>
+          </a:lnRef>
+          <a:fillRef idx="3">
+            <a:schemeClr val="accent4"/>
+          </a:fillRef>
+          <a:effectRef idx="3">
+            <a:schemeClr val="accent4"/>
+          </a:effectRef>
+          <a:fontRef idx="minor">
+            <a:schemeClr val="lt1"/>
+          </a:fontRef>
+        </p:style>
+        <p:txBody>
+          <a:bodyPr rtlCol="0" anchor="ctr"/>
+          <a:lstStyle/>
+          <a:p>
+            <a:pPr algn="ctr"/>
+            <a:r>
+              <a:rPr lang="es-CO" sz="2400" dirty="0"/>
+              <a:t>2</a:t>
+            </a:r>
+            <a:endParaRPr lang="es-CO" dirty="0"/>
+          </a:p>
+        </p:txBody>
+      </p:sp>
+      <p:sp>
+        <p:nvSpPr>
+          <p:cNvPr id="136" name="Elipse 135">
+            <a:extLst>
+              <a:ext uri="{FF2B5EF4-FFF2-40B4-BE49-F238E27FC236}">
+                <a16:creationId xmlns:a16="http://schemas.microsoft.com/office/drawing/2014/main" id="{BD03AAD5-65E3-F094-0BEF-135782D0E0E8}"/>
+              </a:ext>
+            </a:extLst>
+          </p:cNvPr>
+          <p:cNvSpPr/>
+          <p:nvPr/>
+        </p:nvSpPr>
+        <p:spPr>
+          <a:xfrm>
+            <a:off x="2936249" y="2963308"/>
+            <a:ext cx="504000" cy="540000"/>
+          </a:xfrm>
+          <a:prstGeom prst="ellipse">
+            <a:avLst/>
+          </a:prstGeom>
+        </p:spPr>
+        <p:style>
+          <a:lnRef idx="0">
+            <a:schemeClr val="accent4"/>
+          </a:lnRef>
+          <a:fillRef idx="3">
+            <a:schemeClr val="accent4"/>
+          </a:fillRef>
+          <a:effectRef idx="3">
+            <a:schemeClr val="accent4"/>
+          </a:effectRef>
+          <a:fontRef idx="minor">
+            <a:schemeClr val="lt1"/>
+          </a:fontRef>
+        </p:style>
+        <p:txBody>
+          <a:bodyPr rtlCol="0" anchor="ctr"/>
+          <a:lstStyle/>
+          <a:p>
+            <a:pPr algn="ctr"/>
+            <a:r>
+              <a:rPr lang="es-CO" sz="2400" dirty="0"/>
+              <a:t>1</a:t>
+            </a:r>
+            <a:endParaRPr lang="es-CO" dirty="0"/>
+          </a:p>
+        </p:txBody>
+      </p:sp>
+      <p:cxnSp>
+        <p:nvCxnSpPr>
+          <p:cNvPr id="140" name="Conector recto de flecha 139">
+            <a:extLst>
+              <a:ext uri="{FF2B5EF4-FFF2-40B4-BE49-F238E27FC236}">
+                <a16:creationId xmlns:a16="http://schemas.microsoft.com/office/drawing/2014/main" id="{A0116368-6F24-D9DE-F431-1F051E662AF7}"/>
+              </a:ext>
+            </a:extLst>
+          </p:cNvPr>
+          <p:cNvCxnSpPr>
+            <a:cxnSpLocks/>
+          </p:cNvCxnSpPr>
+          <p:nvPr/>
+        </p:nvCxnSpPr>
+        <p:spPr>
+          <a:xfrm flipV="1">
+            <a:off x="4338949" y="2541949"/>
+            <a:ext cx="646372" cy="2017211"/>
+          </a:xfrm>
+          <a:prstGeom prst="straightConnector1">
+            <a:avLst/>
+          </a:prstGeom>
+          <a:ln w="38100" cap="flat" cmpd="sng" algn="ctr">
+            <a:solidFill>
+              <a:schemeClr val="accent2"/>
+            </a:solidFill>
+            <a:prstDash val="solid"/>
+            <a:round/>
+            <a:headEnd type="arrow" w="med" len="med"/>
+            <a:tailEnd type="arrow" w="med" len="med"/>
+          </a:ln>
+        </p:spPr>
+        <p:style>
+          <a:lnRef idx="0">
+            <a:scrgbClr r="0" g="0" b="0"/>
+          </a:lnRef>
+          <a:fillRef idx="0">
+            <a:scrgbClr r="0" g="0" b="0"/>
+          </a:fillRef>
+          <a:effectRef idx="0">
+            <a:scrgbClr r="0" g="0" b="0"/>
+          </a:effectRef>
+          <a:fontRef idx="minor">
+            <a:schemeClr val="tx1"/>
+          </a:fontRef>
+        </p:style>
+      </p:cxnSp>
+      <p:cxnSp>
+        <p:nvCxnSpPr>
+          <p:cNvPr id="141" name="Conector recto de flecha 140">
+            <a:extLst>
+              <a:ext uri="{FF2B5EF4-FFF2-40B4-BE49-F238E27FC236}">
+                <a16:creationId xmlns:a16="http://schemas.microsoft.com/office/drawing/2014/main" id="{6C9B5DD1-7293-458C-8157-641D382FDCD4}"/>
+              </a:ext>
+            </a:extLst>
+          </p:cNvPr>
+          <p:cNvCxnSpPr>
+            <a:cxnSpLocks/>
+          </p:cNvCxnSpPr>
+          <p:nvPr/>
+        </p:nvCxnSpPr>
+        <p:spPr>
+          <a:xfrm>
+            <a:off x="5314331" y="2402819"/>
+            <a:ext cx="1605032" cy="718055"/>
+          </a:xfrm>
+          <a:prstGeom prst="straightConnector1">
+            <a:avLst/>
+          </a:prstGeom>
+          <a:ln w="38100" cap="flat" cmpd="sng" algn="ctr">
+            <a:solidFill>
+              <a:schemeClr val="accent2"/>
+            </a:solidFill>
+            <a:prstDash val="solid"/>
+            <a:round/>
+            <a:headEnd type="arrow" w="med" len="med"/>
+            <a:tailEnd type="arrow" w="med" len="med"/>
+          </a:ln>
+        </p:spPr>
+        <p:style>
+          <a:lnRef idx="0">
+            <a:scrgbClr r="0" g="0" b="0"/>
+          </a:lnRef>
+          <a:fillRef idx="0">
+            <a:scrgbClr r="0" g="0" b="0"/>
+          </a:fillRef>
+          <a:effectRef idx="0">
+            <a:scrgbClr r="0" g="0" b="0"/>
+          </a:effectRef>
+          <a:fontRef idx="minor">
+            <a:schemeClr val="tx1"/>
+          </a:fontRef>
+        </p:style>
+      </p:cxnSp>
+      <p:cxnSp>
+        <p:nvCxnSpPr>
+          <p:cNvPr id="146" name="Conector recto de flecha 145">
+            <a:extLst>
+              <a:ext uri="{FF2B5EF4-FFF2-40B4-BE49-F238E27FC236}">
+                <a16:creationId xmlns:a16="http://schemas.microsoft.com/office/drawing/2014/main" id="{25ED273C-2D73-9A30-D85D-FCF2AB69B835}"/>
+              </a:ext>
+            </a:extLst>
+          </p:cNvPr>
+          <p:cNvCxnSpPr>
+            <a:cxnSpLocks/>
+          </p:cNvCxnSpPr>
+          <p:nvPr/>
+        </p:nvCxnSpPr>
+        <p:spPr>
+          <a:xfrm flipV="1">
+            <a:off x="4451560" y="4018992"/>
+            <a:ext cx="1174293" cy="637487"/>
+          </a:xfrm>
+          <a:prstGeom prst="straightConnector1">
+            <a:avLst/>
+          </a:prstGeom>
+          <a:ln w="38100" cap="flat" cmpd="sng" algn="ctr">
+            <a:solidFill>
+              <a:schemeClr val="accent2"/>
+            </a:solidFill>
+            <a:prstDash val="solid"/>
+            <a:round/>
+            <a:headEnd type="arrow" w="med" len="med"/>
+            <a:tailEnd type="arrow" w="med" len="med"/>
+          </a:ln>
+        </p:spPr>
+        <p:style>
+          <a:lnRef idx="0">
+            <a:scrgbClr r="0" g="0" b="0"/>
+          </a:lnRef>
+          <a:fillRef idx="0">
+            <a:scrgbClr r="0" g="0" b="0"/>
+          </a:fillRef>
+          <a:effectRef idx="0">
+            <a:scrgbClr r="0" g="0" b="0"/>
+          </a:effectRef>
+          <a:fontRef idx="minor">
+            <a:schemeClr val="tx1"/>
+          </a:fontRef>
+        </p:style>
+      </p:cxnSp>
+      <p:cxnSp>
+        <p:nvCxnSpPr>
+          <p:cNvPr id="162" name="Conector recto de flecha 161">
+            <a:extLst>
+              <a:ext uri="{FF2B5EF4-FFF2-40B4-BE49-F238E27FC236}">
+                <a16:creationId xmlns:a16="http://schemas.microsoft.com/office/drawing/2014/main" id="{F20D0E41-8B9B-9E99-76A0-94C2154AE681}"/>
+              </a:ext>
+            </a:extLst>
+          </p:cNvPr>
+          <p:cNvCxnSpPr>
+            <a:cxnSpLocks/>
+          </p:cNvCxnSpPr>
+          <p:nvPr/>
+        </p:nvCxnSpPr>
+        <p:spPr>
+          <a:xfrm flipV="1">
+            <a:off x="6105327" y="3357489"/>
+            <a:ext cx="793323" cy="427667"/>
+          </a:xfrm>
+          <a:prstGeom prst="straightConnector1">
+            <a:avLst/>
+          </a:prstGeom>
+          <a:ln w="38100" cap="flat" cmpd="sng" algn="ctr">
+            <a:solidFill>
+              <a:schemeClr val="accent2"/>
+            </a:solidFill>
+            <a:prstDash val="solid"/>
+            <a:round/>
+            <a:headEnd type="arrow" w="med" len="med"/>
+            <a:tailEnd type="arrow" w="med" len="med"/>
+          </a:ln>
+        </p:spPr>
+        <p:style>
+          <a:lnRef idx="0">
+            <a:scrgbClr r="0" g="0" b="0"/>
+          </a:lnRef>
+          <a:fillRef idx="0">
+            <a:scrgbClr r="0" g="0" b="0"/>
+          </a:fillRef>
+          <a:effectRef idx="0">
+            <a:scrgbClr r="0" g="0" b="0"/>
+          </a:effectRef>
+          <a:fontRef idx="minor">
+            <a:schemeClr val="tx1"/>
+          </a:fontRef>
+        </p:style>
+      </p:cxnSp>
+      <p:grpSp>
+        <p:nvGrpSpPr>
+          <p:cNvPr id="167" name="Grupo 166">
+            <a:extLst>
+              <a:ext uri="{FF2B5EF4-FFF2-40B4-BE49-F238E27FC236}">
+                <a16:creationId xmlns:a16="http://schemas.microsoft.com/office/drawing/2014/main" id="{1E7D3EFA-E6DC-E19F-4D52-E549758BDEB9}"/>
+              </a:ext>
+            </a:extLst>
+          </p:cNvPr>
+          <p:cNvGrpSpPr/>
+          <p:nvPr/>
+        </p:nvGrpSpPr>
+        <p:grpSpPr>
+          <a:xfrm rot="19971564">
+            <a:off x="3740766" y="2632431"/>
+            <a:ext cx="518548" cy="108931"/>
+            <a:chOff x="7777424" y="2883875"/>
+            <a:chExt cx="593258" cy="137455"/>
+          </a:xfrm>
+        </p:grpSpPr>
+        <p:sp>
+          <p:nvSpPr>
+            <p:cNvPr id="164" name="Flecha: cheurón 163">
+              <a:extLst>
+                <a:ext uri="{FF2B5EF4-FFF2-40B4-BE49-F238E27FC236}">
+                  <a16:creationId xmlns:a16="http://schemas.microsoft.com/office/drawing/2014/main" id="{FDEE3076-EDC6-AF88-39C4-8A511B71A1A5}"/>
+                </a:ext>
+              </a:extLst>
+            </p:cNvPr>
+            <p:cNvSpPr/>
+            <p:nvPr/>
+          </p:nvSpPr>
+          <p:spPr>
+            <a:xfrm>
+              <a:off x="7777424" y="2883877"/>
+              <a:ext cx="200923" cy="137453"/>
+            </a:xfrm>
+            <a:prstGeom prst="chevron">
+              <a:avLst/>
+            </a:prstGeom>
+          </p:spPr>
+          <p:style>
+            <a:lnRef idx="0">
+              <a:schemeClr val="accent1"/>
+            </a:lnRef>
+            <a:fillRef idx="3">
+              <a:schemeClr val="accent1"/>
+            </a:fillRef>
+            <a:effectRef idx="3">
+              <a:schemeClr val="accent1"/>
+            </a:effectRef>
+            <a:fontRef idx="minor">
+              <a:schemeClr val="lt1"/>
+            </a:fontRef>
+          </p:style>
+          <p:txBody>
+            <a:bodyPr rtlCol="0" anchor="ctr"/>
+            <a:lstStyle/>
+            <a:p>
+              <a:pPr algn="ctr"/>
+              <a:endParaRPr lang="es-CO">
+                <a:solidFill>
+                  <a:schemeClr val="tx1"/>
+                </a:solidFill>
+              </a:endParaRPr>
+            </a:p>
+          </p:txBody>
+        </p:sp>
+        <p:sp>
+          <p:nvSpPr>
+            <p:cNvPr id="165" name="Flecha: cheurón 164">
+              <a:extLst>
+                <a:ext uri="{FF2B5EF4-FFF2-40B4-BE49-F238E27FC236}">
+                  <a16:creationId xmlns:a16="http://schemas.microsoft.com/office/drawing/2014/main" id="{5EF0A569-EABF-ACE0-6880-CF2BFBC9395E}"/>
+                </a:ext>
+              </a:extLst>
+            </p:cNvPr>
+            <p:cNvSpPr/>
+            <p:nvPr/>
+          </p:nvSpPr>
+          <p:spPr>
+            <a:xfrm>
+              <a:off x="7968836" y="2883876"/>
+              <a:ext cx="200923" cy="137453"/>
+            </a:xfrm>
+            <a:prstGeom prst="chevron">
+              <a:avLst/>
+            </a:prstGeom>
+          </p:spPr>
+          <p:style>
+            <a:lnRef idx="0">
+              <a:schemeClr val="accent1"/>
+            </a:lnRef>
+            <a:fillRef idx="3">
+              <a:schemeClr val="accent1"/>
+            </a:fillRef>
+            <a:effectRef idx="3">
+              <a:schemeClr val="accent1"/>
+            </a:effectRef>
+            <a:fontRef idx="minor">
+              <a:schemeClr val="lt1"/>
+            </a:fontRef>
+          </p:style>
+          <p:txBody>
+            <a:bodyPr rtlCol="0" anchor="ctr"/>
+            <a:lstStyle/>
+            <a:p>
+              <a:pPr algn="ctr"/>
+              <a:endParaRPr lang="es-CO" dirty="0">
+                <a:solidFill>
+                  <a:schemeClr val="tx1"/>
+                </a:solidFill>
+              </a:endParaRPr>
+            </a:p>
+          </p:txBody>
+        </p:sp>
+        <p:sp>
+          <p:nvSpPr>
+            <p:cNvPr id="166" name="Flecha: cheurón 165">
+              <a:extLst>
+                <a:ext uri="{FF2B5EF4-FFF2-40B4-BE49-F238E27FC236}">
+                  <a16:creationId xmlns:a16="http://schemas.microsoft.com/office/drawing/2014/main" id="{3C164FCB-9245-A478-1E00-43CFD7B15922}"/>
+                </a:ext>
+              </a:extLst>
+            </p:cNvPr>
+            <p:cNvSpPr/>
+            <p:nvPr/>
+          </p:nvSpPr>
+          <p:spPr>
+            <a:xfrm>
+              <a:off x="8169759" y="2883875"/>
+              <a:ext cx="200923" cy="137453"/>
+            </a:xfrm>
+            <a:prstGeom prst="chevron">
+              <a:avLst/>
+            </a:prstGeom>
+          </p:spPr>
+          <p:style>
+            <a:lnRef idx="0">
+              <a:schemeClr val="accent1"/>
+            </a:lnRef>
+            <a:fillRef idx="3">
+              <a:schemeClr val="accent1"/>
+            </a:fillRef>
+            <a:effectRef idx="3">
+              <a:schemeClr val="accent1"/>
+            </a:effectRef>
+            <a:fontRef idx="minor">
+              <a:schemeClr val="lt1"/>
+            </a:fontRef>
+          </p:style>
+          <p:txBody>
+            <a:bodyPr rtlCol="0" anchor="ctr"/>
+            <a:lstStyle/>
+            <a:p>
+              <a:pPr algn="ctr"/>
+              <a:endParaRPr lang="es-CO">
+                <a:solidFill>
+                  <a:schemeClr val="tx1"/>
+                </a:solidFill>
+              </a:endParaRPr>
+            </a:p>
+          </p:txBody>
+        </p:sp>
+      </p:grpSp>
+      <p:grpSp>
+        <p:nvGrpSpPr>
+          <p:cNvPr id="168" name="Grupo 167">
+            <a:extLst>
+              <a:ext uri="{FF2B5EF4-FFF2-40B4-BE49-F238E27FC236}">
+                <a16:creationId xmlns:a16="http://schemas.microsoft.com/office/drawing/2014/main" id="{9B6AF3B3-3156-BCA8-A6EA-2ED12A7C1D3C}"/>
+              </a:ext>
+            </a:extLst>
+          </p:cNvPr>
+          <p:cNvGrpSpPr/>
+          <p:nvPr/>
+        </p:nvGrpSpPr>
+        <p:grpSpPr>
+          <a:xfrm rot="3788728">
+            <a:off x="5399183" y="3037402"/>
+            <a:ext cx="470144" cy="120145"/>
+            <a:chOff x="7777424" y="2883875"/>
+            <a:chExt cx="593258" cy="137455"/>
+          </a:xfrm>
+        </p:grpSpPr>
+        <p:sp>
+          <p:nvSpPr>
+            <p:cNvPr id="169" name="Flecha: cheurón 168">
+              <a:extLst>
+                <a:ext uri="{FF2B5EF4-FFF2-40B4-BE49-F238E27FC236}">
+                  <a16:creationId xmlns:a16="http://schemas.microsoft.com/office/drawing/2014/main" id="{9AB116B4-81A2-FCCE-2477-84EEB30EB4F5}"/>
+                </a:ext>
+              </a:extLst>
+            </p:cNvPr>
+            <p:cNvSpPr/>
+            <p:nvPr/>
+          </p:nvSpPr>
+          <p:spPr>
+            <a:xfrm>
+              <a:off x="7777424" y="2883877"/>
+              <a:ext cx="200923" cy="137453"/>
+            </a:xfrm>
+            <a:prstGeom prst="chevron">
+              <a:avLst/>
+            </a:prstGeom>
+          </p:spPr>
+          <p:style>
+            <a:lnRef idx="0">
+              <a:schemeClr val="accent1"/>
+            </a:lnRef>
+            <a:fillRef idx="3">
+              <a:schemeClr val="accent1"/>
+            </a:fillRef>
+            <a:effectRef idx="3">
+              <a:schemeClr val="accent1"/>
+            </a:effectRef>
+            <a:fontRef idx="minor">
+              <a:schemeClr val="lt1"/>
+            </a:fontRef>
+          </p:style>
+          <p:txBody>
+            <a:bodyPr rtlCol="0" anchor="ctr"/>
+            <a:lstStyle/>
+            <a:p>
+              <a:pPr algn="ctr"/>
+              <a:endParaRPr lang="es-CO">
+                <a:solidFill>
+                  <a:schemeClr val="tx1"/>
+                </a:solidFill>
+              </a:endParaRPr>
+            </a:p>
+          </p:txBody>
+        </p:sp>
+        <p:sp>
+          <p:nvSpPr>
+            <p:cNvPr id="170" name="Flecha: cheurón 169">
+              <a:extLst>
+                <a:ext uri="{FF2B5EF4-FFF2-40B4-BE49-F238E27FC236}">
+                  <a16:creationId xmlns:a16="http://schemas.microsoft.com/office/drawing/2014/main" id="{011E4812-41C6-F252-CDE0-8F476C1D6985}"/>
+                </a:ext>
+              </a:extLst>
+            </p:cNvPr>
+            <p:cNvSpPr/>
+            <p:nvPr/>
+          </p:nvSpPr>
+          <p:spPr>
+            <a:xfrm>
+              <a:off x="7968836" y="2883876"/>
+              <a:ext cx="200923" cy="137453"/>
+            </a:xfrm>
+            <a:prstGeom prst="chevron">
+              <a:avLst/>
+            </a:prstGeom>
+          </p:spPr>
+          <p:style>
+            <a:lnRef idx="0">
+              <a:schemeClr val="accent1"/>
+            </a:lnRef>
+            <a:fillRef idx="3">
+              <a:schemeClr val="accent1"/>
+            </a:fillRef>
+            <a:effectRef idx="3">
+              <a:schemeClr val="accent1"/>
+            </a:effectRef>
+            <a:fontRef idx="minor">
+              <a:schemeClr val="lt1"/>
+            </a:fontRef>
+          </p:style>
+          <p:txBody>
+            <a:bodyPr rtlCol="0" anchor="ctr"/>
+            <a:lstStyle/>
+            <a:p>
+              <a:pPr algn="ctr"/>
+              <a:endParaRPr lang="es-CO" dirty="0">
+                <a:solidFill>
+                  <a:schemeClr val="tx1"/>
+                </a:solidFill>
+              </a:endParaRPr>
+            </a:p>
+          </p:txBody>
+        </p:sp>
+        <p:sp>
+          <p:nvSpPr>
+            <p:cNvPr id="171" name="Flecha: cheurón 170">
+              <a:extLst>
+                <a:ext uri="{FF2B5EF4-FFF2-40B4-BE49-F238E27FC236}">
+                  <a16:creationId xmlns:a16="http://schemas.microsoft.com/office/drawing/2014/main" id="{9A0A9FD2-E55B-F17D-88D2-CA42B650A3F4}"/>
+                </a:ext>
+              </a:extLst>
+            </p:cNvPr>
+            <p:cNvSpPr/>
+            <p:nvPr/>
+          </p:nvSpPr>
+          <p:spPr>
+            <a:xfrm>
+              <a:off x="8169759" y="2883875"/>
+              <a:ext cx="200923" cy="137453"/>
+            </a:xfrm>
+            <a:prstGeom prst="chevron">
+              <a:avLst/>
+            </a:prstGeom>
+          </p:spPr>
+          <p:style>
+            <a:lnRef idx="0">
+              <a:schemeClr val="accent1"/>
+            </a:lnRef>
+            <a:fillRef idx="3">
+              <a:schemeClr val="accent1"/>
+            </a:fillRef>
+            <a:effectRef idx="3">
+              <a:schemeClr val="accent1"/>
+            </a:effectRef>
+            <a:fontRef idx="minor">
+              <a:schemeClr val="lt1"/>
+            </a:fontRef>
+          </p:style>
+          <p:txBody>
+            <a:bodyPr rtlCol="0" anchor="ctr"/>
+            <a:lstStyle/>
+            <a:p>
+              <a:pPr algn="ctr"/>
+              <a:endParaRPr lang="es-CO">
+                <a:solidFill>
+                  <a:schemeClr val="tx1"/>
+                </a:solidFill>
+              </a:endParaRPr>
+            </a:p>
+          </p:txBody>
+        </p:sp>
+      </p:grpSp>
+      <p:grpSp>
+        <p:nvGrpSpPr>
+          <p:cNvPr id="172" name="Grupo 171">
+            <a:extLst>
+              <a:ext uri="{FF2B5EF4-FFF2-40B4-BE49-F238E27FC236}">
+                <a16:creationId xmlns:a16="http://schemas.microsoft.com/office/drawing/2014/main" id="{1A585251-19EB-5E81-A2FC-3C98A206397E}"/>
+              </a:ext>
+            </a:extLst>
+          </p:cNvPr>
+          <p:cNvGrpSpPr/>
+          <p:nvPr/>
+        </p:nvGrpSpPr>
+        <p:grpSpPr>
+          <a:xfrm rot="20362009">
+            <a:off x="5831147" y="1713091"/>
+            <a:ext cx="518548" cy="108931"/>
+            <a:chOff x="7777424" y="2883875"/>
+            <a:chExt cx="593258" cy="137455"/>
+          </a:xfrm>
+        </p:grpSpPr>
+        <p:sp>
+          <p:nvSpPr>
+            <p:cNvPr id="173" name="Flecha: cheurón 172">
+              <a:extLst>
+                <a:ext uri="{FF2B5EF4-FFF2-40B4-BE49-F238E27FC236}">
+                  <a16:creationId xmlns:a16="http://schemas.microsoft.com/office/drawing/2014/main" id="{B1C1FFAD-F946-7515-0069-718A14F5AE52}"/>
+                </a:ext>
+              </a:extLst>
+            </p:cNvPr>
+            <p:cNvSpPr/>
+            <p:nvPr/>
+          </p:nvSpPr>
+          <p:spPr>
+            <a:xfrm>
+              <a:off x="7777424" y="2883877"/>
+              <a:ext cx="200923" cy="137453"/>
+            </a:xfrm>
+            <a:prstGeom prst="chevron">
+              <a:avLst/>
+            </a:prstGeom>
+          </p:spPr>
+          <p:style>
+            <a:lnRef idx="0">
+              <a:schemeClr val="accent1"/>
+            </a:lnRef>
+            <a:fillRef idx="3">
+              <a:schemeClr val="accent1"/>
+            </a:fillRef>
+            <a:effectRef idx="3">
+              <a:schemeClr val="accent1"/>
+            </a:effectRef>
+            <a:fontRef idx="minor">
+              <a:schemeClr val="lt1"/>
+            </a:fontRef>
+          </p:style>
+          <p:txBody>
+            <a:bodyPr rtlCol="0" anchor="ctr"/>
+            <a:lstStyle/>
+            <a:p>
+              <a:pPr algn="ctr"/>
+              <a:endParaRPr lang="es-CO">
+                <a:solidFill>
+                  <a:schemeClr val="tx1"/>
+                </a:solidFill>
+              </a:endParaRPr>
+            </a:p>
+          </p:txBody>
+        </p:sp>
+        <p:sp>
+          <p:nvSpPr>
+            <p:cNvPr id="174" name="Flecha: cheurón 173">
+              <a:extLst>
+                <a:ext uri="{FF2B5EF4-FFF2-40B4-BE49-F238E27FC236}">
+                  <a16:creationId xmlns:a16="http://schemas.microsoft.com/office/drawing/2014/main" id="{A51720EF-C338-28D8-0442-85B691AD058A}"/>
+                </a:ext>
+              </a:extLst>
+            </p:cNvPr>
+            <p:cNvSpPr/>
+            <p:nvPr/>
+          </p:nvSpPr>
+          <p:spPr>
+            <a:xfrm>
+              <a:off x="7968836" y="2883876"/>
+              <a:ext cx="200923" cy="137453"/>
+            </a:xfrm>
+            <a:prstGeom prst="chevron">
+              <a:avLst/>
+            </a:prstGeom>
+          </p:spPr>
+          <p:style>
+            <a:lnRef idx="0">
+              <a:schemeClr val="accent1"/>
+            </a:lnRef>
+            <a:fillRef idx="3">
+              <a:schemeClr val="accent1"/>
+            </a:fillRef>
+            <a:effectRef idx="3">
+              <a:schemeClr val="accent1"/>
+            </a:effectRef>
+            <a:fontRef idx="minor">
+              <a:schemeClr val="lt1"/>
+            </a:fontRef>
+          </p:style>
+          <p:txBody>
+            <a:bodyPr rtlCol="0" anchor="ctr"/>
+            <a:lstStyle/>
+            <a:p>
+              <a:pPr algn="ctr"/>
+              <a:endParaRPr lang="es-CO" dirty="0">
+                <a:solidFill>
+                  <a:schemeClr val="tx1"/>
+                </a:solidFill>
+              </a:endParaRPr>
+            </a:p>
+          </p:txBody>
+        </p:sp>
+        <p:sp>
+          <p:nvSpPr>
+            <p:cNvPr id="175" name="Flecha: cheurón 174">
+              <a:extLst>
+                <a:ext uri="{FF2B5EF4-FFF2-40B4-BE49-F238E27FC236}">
+                  <a16:creationId xmlns:a16="http://schemas.microsoft.com/office/drawing/2014/main" id="{E3EAA669-193D-1F86-7A28-3AF104D7FABC}"/>
+                </a:ext>
+              </a:extLst>
+            </p:cNvPr>
+            <p:cNvSpPr/>
+            <p:nvPr/>
+          </p:nvSpPr>
+          <p:spPr>
+            <a:xfrm>
+              <a:off x="8169759" y="2883875"/>
+              <a:ext cx="200923" cy="137453"/>
+            </a:xfrm>
+            <a:prstGeom prst="chevron">
+              <a:avLst/>
+            </a:prstGeom>
+          </p:spPr>
+          <p:style>
+            <a:lnRef idx="0">
+              <a:schemeClr val="accent1"/>
+            </a:lnRef>
+            <a:fillRef idx="3">
+              <a:schemeClr val="accent1"/>
+            </a:fillRef>
+            <a:effectRef idx="3">
+              <a:schemeClr val="accent1"/>
+            </a:effectRef>
+            <a:fontRef idx="minor">
+              <a:schemeClr val="lt1"/>
+            </a:fontRef>
+          </p:style>
+          <p:txBody>
+            <a:bodyPr rtlCol="0" anchor="ctr"/>
+            <a:lstStyle/>
+            <a:p>
+              <a:pPr algn="ctr"/>
+              <a:endParaRPr lang="es-CO">
+                <a:solidFill>
+                  <a:schemeClr val="tx1"/>
+                </a:solidFill>
+              </a:endParaRPr>
+            </a:p>
+          </p:txBody>
+        </p:sp>
+      </p:grpSp>
+      <p:grpSp>
+        <p:nvGrpSpPr>
+          <p:cNvPr id="180" name="Grupo 179">
+            <a:extLst>
+              <a:ext uri="{FF2B5EF4-FFF2-40B4-BE49-F238E27FC236}">
+                <a16:creationId xmlns:a16="http://schemas.microsoft.com/office/drawing/2014/main" id="{62927529-B58E-0FB8-6899-2DEFA103B677}"/>
+              </a:ext>
+            </a:extLst>
+          </p:cNvPr>
+          <p:cNvGrpSpPr/>
+          <p:nvPr/>
+        </p:nvGrpSpPr>
+        <p:grpSpPr>
+          <a:xfrm rot="16200000">
+            <a:off x="6979018" y="2311307"/>
+            <a:ext cx="518548" cy="108931"/>
+            <a:chOff x="7777424" y="2883875"/>
+            <a:chExt cx="593258" cy="137455"/>
+          </a:xfrm>
+        </p:grpSpPr>
+        <p:sp>
+          <p:nvSpPr>
+            <p:cNvPr id="181" name="Flecha: cheurón 180">
+              <a:extLst>
+                <a:ext uri="{FF2B5EF4-FFF2-40B4-BE49-F238E27FC236}">
+                  <a16:creationId xmlns:a16="http://schemas.microsoft.com/office/drawing/2014/main" id="{50DECB72-D394-4F1E-A0B7-909B969F61DA}"/>
+                </a:ext>
+              </a:extLst>
+            </p:cNvPr>
+            <p:cNvSpPr/>
+            <p:nvPr/>
+          </p:nvSpPr>
+          <p:spPr>
+            <a:xfrm>
+              <a:off x="7777424" y="2883877"/>
+              <a:ext cx="200923" cy="137453"/>
+            </a:xfrm>
+            <a:prstGeom prst="chevron">
+              <a:avLst/>
+            </a:prstGeom>
+          </p:spPr>
+          <p:style>
+            <a:lnRef idx="0">
+              <a:schemeClr val="accent1"/>
+            </a:lnRef>
+            <a:fillRef idx="3">
+              <a:schemeClr val="accent1"/>
+            </a:fillRef>
+            <a:effectRef idx="3">
+              <a:schemeClr val="accent1"/>
+            </a:effectRef>
+            <a:fontRef idx="minor">
+              <a:schemeClr val="lt1"/>
+            </a:fontRef>
+          </p:style>
+          <p:txBody>
+            <a:bodyPr rtlCol="0" anchor="ctr"/>
+            <a:lstStyle/>
+            <a:p>
+              <a:pPr algn="ctr"/>
+              <a:endParaRPr lang="es-CO">
+                <a:solidFill>
+                  <a:schemeClr val="tx1"/>
+                </a:solidFill>
+              </a:endParaRPr>
+            </a:p>
+          </p:txBody>
+        </p:sp>
+        <p:sp>
+          <p:nvSpPr>
+            <p:cNvPr id="182" name="Flecha: cheurón 181">
+              <a:extLst>
+                <a:ext uri="{FF2B5EF4-FFF2-40B4-BE49-F238E27FC236}">
+                  <a16:creationId xmlns:a16="http://schemas.microsoft.com/office/drawing/2014/main" id="{E3526F93-9D05-849F-D903-D07DB6DB7417}"/>
+                </a:ext>
+              </a:extLst>
+            </p:cNvPr>
+            <p:cNvSpPr/>
+            <p:nvPr/>
+          </p:nvSpPr>
+          <p:spPr>
+            <a:xfrm>
+              <a:off x="7968836" y="2883876"/>
+              <a:ext cx="200923" cy="137453"/>
+            </a:xfrm>
+            <a:prstGeom prst="chevron">
+              <a:avLst/>
+            </a:prstGeom>
+          </p:spPr>
+          <p:style>
+            <a:lnRef idx="0">
+              <a:schemeClr val="accent1"/>
+            </a:lnRef>
+            <a:fillRef idx="3">
+              <a:schemeClr val="accent1"/>
+            </a:fillRef>
+            <a:effectRef idx="3">
+              <a:schemeClr val="accent1"/>
+            </a:effectRef>
+            <a:fontRef idx="minor">
+              <a:schemeClr val="lt1"/>
+            </a:fontRef>
+          </p:style>
+          <p:txBody>
+            <a:bodyPr rtlCol="0" anchor="ctr"/>
+            <a:lstStyle/>
+            <a:p>
+              <a:pPr algn="ctr"/>
+              <a:endParaRPr lang="es-CO" dirty="0">
+                <a:solidFill>
+                  <a:schemeClr val="tx1"/>
+                </a:solidFill>
+              </a:endParaRPr>
+            </a:p>
+          </p:txBody>
+        </p:sp>
+        <p:sp>
+          <p:nvSpPr>
+            <p:cNvPr id="183" name="Flecha: cheurón 182">
+              <a:extLst>
+                <a:ext uri="{FF2B5EF4-FFF2-40B4-BE49-F238E27FC236}">
+                  <a16:creationId xmlns:a16="http://schemas.microsoft.com/office/drawing/2014/main" id="{6AEC1546-834E-A166-3F0C-0754C992C872}"/>
+                </a:ext>
+              </a:extLst>
+            </p:cNvPr>
+            <p:cNvSpPr/>
+            <p:nvPr/>
+          </p:nvSpPr>
+          <p:spPr>
+            <a:xfrm>
+              <a:off x="8169759" y="2883875"/>
+              <a:ext cx="200923" cy="137453"/>
+            </a:xfrm>
+            <a:prstGeom prst="chevron">
+              <a:avLst/>
+            </a:prstGeom>
+          </p:spPr>
+          <p:style>
+            <a:lnRef idx="0">
+              <a:schemeClr val="accent1"/>
+            </a:lnRef>
+            <a:fillRef idx="3">
+              <a:schemeClr val="accent1"/>
+            </a:fillRef>
+            <a:effectRef idx="3">
+              <a:schemeClr val="accent1"/>
+            </a:effectRef>
+            <a:fontRef idx="minor">
+              <a:schemeClr val="lt1"/>
+            </a:fontRef>
+          </p:style>
+          <p:txBody>
+            <a:bodyPr rtlCol="0" anchor="ctr"/>
+            <a:lstStyle/>
+            <a:p>
+              <a:pPr algn="ctr"/>
+              <a:endParaRPr lang="es-CO">
+                <a:solidFill>
+                  <a:schemeClr val="tx1"/>
+                </a:solidFill>
+              </a:endParaRPr>
+            </a:p>
+          </p:txBody>
+        </p:sp>
+      </p:grpSp>
+      <p:grpSp>
+        <p:nvGrpSpPr>
+          <p:cNvPr id="188" name="Grupo 187">
+            <a:extLst>
+              <a:ext uri="{FF2B5EF4-FFF2-40B4-BE49-F238E27FC236}">
+                <a16:creationId xmlns:a16="http://schemas.microsoft.com/office/drawing/2014/main" id="{D4576F31-8799-929A-C5B6-1A52AB269981}"/>
+              </a:ext>
+            </a:extLst>
+          </p:cNvPr>
+          <p:cNvGrpSpPr/>
+          <p:nvPr/>
+        </p:nvGrpSpPr>
+        <p:grpSpPr>
+          <a:xfrm rot="12233250">
+            <a:off x="6008786" y="2669849"/>
+            <a:ext cx="518548" cy="108931"/>
+            <a:chOff x="7777424" y="2883875"/>
+            <a:chExt cx="593258" cy="137455"/>
+          </a:xfrm>
+        </p:grpSpPr>
+        <p:sp>
+          <p:nvSpPr>
+            <p:cNvPr id="189" name="Flecha: cheurón 188">
+              <a:extLst>
+                <a:ext uri="{FF2B5EF4-FFF2-40B4-BE49-F238E27FC236}">
+                  <a16:creationId xmlns:a16="http://schemas.microsoft.com/office/drawing/2014/main" id="{0266B501-49C1-011D-083A-A94FE5FA5016}"/>
+                </a:ext>
+              </a:extLst>
+            </p:cNvPr>
+            <p:cNvSpPr/>
+            <p:nvPr/>
+          </p:nvSpPr>
+          <p:spPr>
+            <a:xfrm>
+              <a:off x="7777424" y="2883877"/>
+              <a:ext cx="200923" cy="137453"/>
+            </a:xfrm>
+            <a:prstGeom prst="chevron">
+              <a:avLst/>
+            </a:prstGeom>
+          </p:spPr>
+          <p:style>
+            <a:lnRef idx="0">
+              <a:schemeClr val="accent1"/>
+            </a:lnRef>
+            <a:fillRef idx="3">
+              <a:schemeClr val="accent1"/>
+            </a:fillRef>
+            <a:effectRef idx="3">
+              <a:schemeClr val="accent1"/>
+            </a:effectRef>
+            <a:fontRef idx="minor">
+              <a:schemeClr val="lt1"/>
+            </a:fontRef>
+          </p:style>
+          <p:txBody>
+            <a:bodyPr rtlCol="0" anchor="ctr"/>
+            <a:lstStyle/>
+            <a:p>
+              <a:pPr algn="ctr"/>
+              <a:endParaRPr lang="es-CO">
+                <a:solidFill>
+                  <a:schemeClr val="tx1"/>
+                </a:solidFill>
+              </a:endParaRPr>
+            </a:p>
+          </p:txBody>
+        </p:sp>
+        <p:sp>
+          <p:nvSpPr>
+            <p:cNvPr id="190" name="Flecha: cheurón 189">
+              <a:extLst>
+                <a:ext uri="{FF2B5EF4-FFF2-40B4-BE49-F238E27FC236}">
+                  <a16:creationId xmlns:a16="http://schemas.microsoft.com/office/drawing/2014/main" id="{3E2F68F1-2258-5D82-7E4E-D8472FEDEF75}"/>
+                </a:ext>
+              </a:extLst>
+            </p:cNvPr>
+            <p:cNvSpPr/>
+            <p:nvPr/>
+          </p:nvSpPr>
+          <p:spPr>
+            <a:xfrm>
+              <a:off x="7968836" y="2883876"/>
+              <a:ext cx="200923" cy="137453"/>
+            </a:xfrm>
+            <a:prstGeom prst="chevron">
+              <a:avLst/>
+            </a:prstGeom>
+          </p:spPr>
+          <p:style>
+            <a:lnRef idx="0">
+              <a:schemeClr val="accent1"/>
+            </a:lnRef>
+            <a:fillRef idx="3">
+              <a:schemeClr val="accent1"/>
+            </a:fillRef>
+            <a:effectRef idx="3">
+              <a:schemeClr val="accent1"/>
+            </a:effectRef>
+            <a:fontRef idx="minor">
+              <a:schemeClr val="lt1"/>
+            </a:fontRef>
+          </p:style>
+          <p:txBody>
+            <a:bodyPr rtlCol="0" anchor="ctr"/>
+            <a:lstStyle/>
+            <a:p>
+              <a:pPr algn="ctr"/>
+              <a:endParaRPr lang="es-CO" dirty="0">
+                <a:solidFill>
+                  <a:schemeClr val="tx1"/>
+                </a:solidFill>
+              </a:endParaRPr>
+            </a:p>
+          </p:txBody>
+        </p:sp>
+        <p:sp>
+          <p:nvSpPr>
+            <p:cNvPr id="191" name="Flecha: cheurón 190">
+              <a:extLst>
+                <a:ext uri="{FF2B5EF4-FFF2-40B4-BE49-F238E27FC236}">
+                  <a16:creationId xmlns:a16="http://schemas.microsoft.com/office/drawing/2014/main" id="{B2B34D36-F485-8702-57AF-B3903A5BE2A5}"/>
+                </a:ext>
+              </a:extLst>
+            </p:cNvPr>
+            <p:cNvSpPr/>
+            <p:nvPr/>
+          </p:nvSpPr>
+          <p:spPr>
+            <a:xfrm>
+              <a:off x="8169759" y="2883875"/>
+              <a:ext cx="200923" cy="137453"/>
+            </a:xfrm>
+            <a:prstGeom prst="chevron">
+              <a:avLst/>
+            </a:prstGeom>
+          </p:spPr>
+          <p:style>
+            <a:lnRef idx="0">
+              <a:schemeClr val="accent1"/>
+            </a:lnRef>
+            <a:fillRef idx="3">
+              <a:schemeClr val="accent1"/>
+            </a:fillRef>
+            <a:effectRef idx="3">
+              <a:schemeClr val="accent1"/>
+            </a:effectRef>
+            <a:fontRef idx="minor">
+              <a:schemeClr val="lt1"/>
+            </a:fontRef>
+          </p:style>
+          <p:txBody>
+            <a:bodyPr rtlCol="0" anchor="ctr"/>
+            <a:lstStyle/>
+            <a:p>
+              <a:pPr algn="ctr"/>
+              <a:endParaRPr lang="es-CO">
+                <a:solidFill>
+                  <a:schemeClr val="tx1"/>
+                </a:solidFill>
+              </a:endParaRPr>
+            </a:p>
+          </p:txBody>
+        </p:sp>
+      </p:grpSp>
+      <p:grpSp>
+        <p:nvGrpSpPr>
+          <p:cNvPr id="192" name="Grupo 191">
+            <a:extLst>
+              <a:ext uri="{FF2B5EF4-FFF2-40B4-BE49-F238E27FC236}">
+                <a16:creationId xmlns:a16="http://schemas.microsoft.com/office/drawing/2014/main" id="{5120F73F-E555-6987-28D2-D2C43C635AA2}"/>
+              </a:ext>
+            </a:extLst>
+          </p:cNvPr>
+          <p:cNvGrpSpPr/>
+          <p:nvPr/>
+        </p:nvGrpSpPr>
+        <p:grpSpPr>
+          <a:xfrm rot="19931559">
+            <a:off x="4751847" y="4415594"/>
+            <a:ext cx="518548" cy="108931"/>
+            <a:chOff x="7777424" y="2883875"/>
+            <a:chExt cx="593258" cy="137455"/>
+          </a:xfrm>
+        </p:grpSpPr>
+        <p:sp>
+          <p:nvSpPr>
+            <p:cNvPr id="193" name="Flecha: cheurón 192">
+              <a:extLst>
+                <a:ext uri="{FF2B5EF4-FFF2-40B4-BE49-F238E27FC236}">
+                  <a16:creationId xmlns:a16="http://schemas.microsoft.com/office/drawing/2014/main" id="{5973FF89-916E-5135-05F7-F4D70E4637F7}"/>
+                </a:ext>
+              </a:extLst>
+            </p:cNvPr>
+            <p:cNvSpPr/>
+            <p:nvPr/>
+          </p:nvSpPr>
+          <p:spPr>
+            <a:xfrm>
+              <a:off x="7777424" y="2883877"/>
+              <a:ext cx="200923" cy="137453"/>
+            </a:xfrm>
+            <a:prstGeom prst="chevron">
+              <a:avLst/>
+            </a:prstGeom>
+          </p:spPr>
+          <p:style>
+            <a:lnRef idx="0">
+              <a:schemeClr val="accent1"/>
+            </a:lnRef>
+            <a:fillRef idx="3">
+              <a:schemeClr val="accent1"/>
+            </a:fillRef>
+            <a:effectRef idx="3">
+              <a:schemeClr val="accent1"/>
+            </a:effectRef>
+            <a:fontRef idx="minor">
+              <a:schemeClr val="lt1"/>
+            </a:fontRef>
+          </p:style>
+          <p:txBody>
+            <a:bodyPr rtlCol="0" anchor="ctr"/>
+            <a:lstStyle/>
+            <a:p>
+              <a:pPr algn="ctr"/>
+              <a:endParaRPr lang="es-CO">
+                <a:solidFill>
+                  <a:schemeClr val="tx1"/>
+                </a:solidFill>
+              </a:endParaRPr>
+            </a:p>
+          </p:txBody>
+        </p:sp>
+        <p:sp>
+          <p:nvSpPr>
+            <p:cNvPr id="194" name="Flecha: cheurón 193">
+              <a:extLst>
+                <a:ext uri="{FF2B5EF4-FFF2-40B4-BE49-F238E27FC236}">
+                  <a16:creationId xmlns:a16="http://schemas.microsoft.com/office/drawing/2014/main" id="{D39ADC12-78F0-11FA-5C66-9CA07A1AFF5E}"/>
+                </a:ext>
+              </a:extLst>
+            </p:cNvPr>
+            <p:cNvSpPr/>
+            <p:nvPr/>
+          </p:nvSpPr>
+          <p:spPr>
+            <a:xfrm>
+              <a:off x="7968836" y="2883876"/>
+              <a:ext cx="200923" cy="137453"/>
+            </a:xfrm>
+            <a:prstGeom prst="chevron">
+              <a:avLst/>
+            </a:prstGeom>
+          </p:spPr>
+          <p:style>
+            <a:lnRef idx="0">
+              <a:schemeClr val="accent1"/>
+            </a:lnRef>
+            <a:fillRef idx="3">
+              <a:schemeClr val="accent1"/>
+            </a:fillRef>
+            <a:effectRef idx="3">
+              <a:schemeClr val="accent1"/>
+            </a:effectRef>
+            <a:fontRef idx="minor">
+              <a:schemeClr val="lt1"/>
+            </a:fontRef>
+          </p:style>
+          <p:txBody>
+            <a:bodyPr rtlCol="0" anchor="ctr"/>
+            <a:lstStyle/>
+            <a:p>
+              <a:pPr algn="ctr"/>
+              <a:endParaRPr lang="es-CO" dirty="0">
+                <a:solidFill>
+                  <a:schemeClr val="tx1"/>
+                </a:solidFill>
+              </a:endParaRPr>
+            </a:p>
+          </p:txBody>
+        </p:sp>
+        <p:sp>
+          <p:nvSpPr>
+            <p:cNvPr id="195" name="Flecha: cheurón 194">
+              <a:extLst>
+                <a:ext uri="{FF2B5EF4-FFF2-40B4-BE49-F238E27FC236}">
+                  <a16:creationId xmlns:a16="http://schemas.microsoft.com/office/drawing/2014/main" id="{B2DB514F-2590-F423-1BD7-CF1BF0F94E91}"/>
+                </a:ext>
+              </a:extLst>
+            </p:cNvPr>
+            <p:cNvSpPr/>
+            <p:nvPr/>
+          </p:nvSpPr>
+          <p:spPr>
+            <a:xfrm>
+              <a:off x="8169759" y="2883875"/>
+              <a:ext cx="200923" cy="137453"/>
+            </a:xfrm>
+            <a:prstGeom prst="chevron">
+              <a:avLst/>
+            </a:prstGeom>
+          </p:spPr>
+          <p:style>
+            <a:lnRef idx="0">
+              <a:schemeClr val="accent1"/>
+            </a:lnRef>
+            <a:fillRef idx="3">
+              <a:schemeClr val="accent1"/>
+            </a:fillRef>
+            <a:effectRef idx="3">
+              <a:schemeClr val="accent1"/>
+            </a:effectRef>
+            <a:fontRef idx="minor">
+              <a:schemeClr val="lt1"/>
+            </a:fontRef>
+          </p:style>
+          <p:txBody>
+            <a:bodyPr rtlCol="0" anchor="ctr"/>
+            <a:lstStyle/>
+            <a:p>
+              <a:pPr algn="ctr"/>
+              <a:endParaRPr lang="es-CO">
+                <a:solidFill>
+                  <a:schemeClr val="tx1"/>
+                </a:solidFill>
+              </a:endParaRPr>
+            </a:p>
+          </p:txBody>
+        </p:sp>
+      </p:grpSp>
+      <p:grpSp>
+        <p:nvGrpSpPr>
+          <p:cNvPr id="200" name="Grupo 199">
+            <a:extLst>
+              <a:ext uri="{FF2B5EF4-FFF2-40B4-BE49-F238E27FC236}">
+                <a16:creationId xmlns:a16="http://schemas.microsoft.com/office/drawing/2014/main" id="{4309835D-312C-BBAD-7645-539FE6B359BD}"/>
+              </a:ext>
+            </a:extLst>
+          </p:cNvPr>
+          <p:cNvGrpSpPr/>
+          <p:nvPr/>
+        </p:nvGrpSpPr>
+        <p:grpSpPr>
+          <a:xfrm rot="7123298">
+            <a:off x="6604022" y="4038778"/>
+            <a:ext cx="518548" cy="108931"/>
+            <a:chOff x="7777424" y="2883875"/>
+            <a:chExt cx="593258" cy="137455"/>
+          </a:xfrm>
+        </p:grpSpPr>
+        <p:sp>
+          <p:nvSpPr>
+            <p:cNvPr id="201" name="Flecha: cheurón 200">
+              <a:extLst>
+                <a:ext uri="{FF2B5EF4-FFF2-40B4-BE49-F238E27FC236}">
+                  <a16:creationId xmlns:a16="http://schemas.microsoft.com/office/drawing/2014/main" id="{A898F326-CB8A-8793-AFE0-B86165068155}"/>
+                </a:ext>
+              </a:extLst>
+            </p:cNvPr>
+            <p:cNvSpPr/>
+            <p:nvPr/>
+          </p:nvSpPr>
+          <p:spPr>
+            <a:xfrm>
+              <a:off x="7777424" y="2883877"/>
+              <a:ext cx="200923" cy="137453"/>
+            </a:xfrm>
+            <a:prstGeom prst="chevron">
+              <a:avLst/>
+            </a:prstGeom>
+          </p:spPr>
+          <p:style>
+            <a:lnRef idx="0">
+              <a:schemeClr val="accent1"/>
+            </a:lnRef>
+            <a:fillRef idx="3">
+              <a:schemeClr val="accent1"/>
+            </a:fillRef>
+            <a:effectRef idx="3">
+              <a:schemeClr val="accent1"/>
+            </a:effectRef>
+            <a:fontRef idx="minor">
+              <a:schemeClr val="lt1"/>
+            </a:fontRef>
+          </p:style>
+          <p:txBody>
+            <a:bodyPr rtlCol="0" anchor="ctr"/>
+            <a:lstStyle/>
+            <a:p>
+              <a:pPr algn="ctr"/>
+              <a:endParaRPr lang="es-CO">
+                <a:solidFill>
+                  <a:schemeClr val="tx1"/>
+                </a:solidFill>
+              </a:endParaRPr>
+            </a:p>
+          </p:txBody>
+        </p:sp>
+        <p:sp>
+          <p:nvSpPr>
+            <p:cNvPr id="202" name="Flecha: cheurón 201">
+              <a:extLst>
+                <a:ext uri="{FF2B5EF4-FFF2-40B4-BE49-F238E27FC236}">
+                  <a16:creationId xmlns:a16="http://schemas.microsoft.com/office/drawing/2014/main" id="{43034ABE-6EA9-13D4-F9E8-E7450A2BE219}"/>
+                </a:ext>
+              </a:extLst>
+            </p:cNvPr>
+            <p:cNvSpPr/>
+            <p:nvPr/>
+          </p:nvSpPr>
+          <p:spPr>
+            <a:xfrm>
+              <a:off x="7968836" y="2883876"/>
+              <a:ext cx="200923" cy="137453"/>
+            </a:xfrm>
+            <a:prstGeom prst="chevron">
+              <a:avLst/>
+            </a:prstGeom>
+          </p:spPr>
+          <p:style>
+            <a:lnRef idx="0">
+              <a:schemeClr val="accent1"/>
+            </a:lnRef>
+            <a:fillRef idx="3">
+              <a:schemeClr val="accent1"/>
+            </a:fillRef>
+            <a:effectRef idx="3">
+              <a:schemeClr val="accent1"/>
+            </a:effectRef>
+            <a:fontRef idx="minor">
+              <a:schemeClr val="lt1"/>
+            </a:fontRef>
+          </p:style>
+          <p:txBody>
+            <a:bodyPr rtlCol="0" anchor="ctr"/>
+            <a:lstStyle/>
+            <a:p>
+              <a:pPr algn="ctr"/>
+              <a:endParaRPr lang="es-CO" dirty="0">
+                <a:solidFill>
+                  <a:schemeClr val="tx1"/>
+                </a:solidFill>
+              </a:endParaRPr>
+            </a:p>
+          </p:txBody>
+        </p:sp>
+        <p:sp>
+          <p:nvSpPr>
+            <p:cNvPr id="203" name="Flecha: cheurón 202">
+              <a:extLst>
+                <a:ext uri="{FF2B5EF4-FFF2-40B4-BE49-F238E27FC236}">
+                  <a16:creationId xmlns:a16="http://schemas.microsoft.com/office/drawing/2014/main" id="{18C93A6F-6C9E-ABCE-F33E-3AA8323E8A1D}"/>
+                </a:ext>
+              </a:extLst>
+            </p:cNvPr>
+            <p:cNvSpPr/>
+            <p:nvPr/>
+          </p:nvSpPr>
+          <p:spPr>
+            <a:xfrm>
+              <a:off x="8169759" y="2883875"/>
+              <a:ext cx="200923" cy="137453"/>
+            </a:xfrm>
+            <a:prstGeom prst="chevron">
+              <a:avLst/>
+            </a:prstGeom>
+          </p:spPr>
+          <p:style>
+            <a:lnRef idx="0">
+              <a:schemeClr val="accent1"/>
+            </a:lnRef>
+            <a:fillRef idx="3">
+              <a:schemeClr val="accent1"/>
+            </a:fillRef>
+            <a:effectRef idx="3">
+              <a:schemeClr val="accent1"/>
+            </a:effectRef>
+            <a:fontRef idx="minor">
+              <a:schemeClr val="lt1"/>
+            </a:fontRef>
+          </p:style>
+          <p:txBody>
+            <a:bodyPr rtlCol="0" anchor="ctr"/>
+            <a:lstStyle/>
+            <a:p>
+              <a:pPr algn="ctr"/>
+              <a:endParaRPr lang="es-CO">
+                <a:solidFill>
+                  <a:schemeClr val="tx1"/>
+                </a:solidFill>
+              </a:endParaRPr>
+            </a:p>
+          </p:txBody>
+        </p:sp>
+      </p:grpSp>
+      <p:grpSp>
+        <p:nvGrpSpPr>
+          <p:cNvPr id="208" name="Grupo 207">
+            <a:extLst>
+              <a:ext uri="{FF2B5EF4-FFF2-40B4-BE49-F238E27FC236}">
+                <a16:creationId xmlns:a16="http://schemas.microsoft.com/office/drawing/2014/main" id="{18EF1364-CC77-B623-9C5A-5442877A268D}"/>
+              </a:ext>
+            </a:extLst>
+          </p:cNvPr>
+          <p:cNvGrpSpPr/>
+          <p:nvPr/>
+        </p:nvGrpSpPr>
+        <p:grpSpPr>
+          <a:xfrm>
+            <a:off x="4936961" y="4877982"/>
+            <a:ext cx="518548" cy="108931"/>
+            <a:chOff x="7777424" y="2883875"/>
+            <a:chExt cx="593258" cy="137455"/>
+          </a:xfrm>
+        </p:grpSpPr>
+        <p:sp>
+          <p:nvSpPr>
+            <p:cNvPr id="209" name="Flecha: cheurón 208">
+              <a:extLst>
+                <a:ext uri="{FF2B5EF4-FFF2-40B4-BE49-F238E27FC236}">
+                  <a16:creationId xmlns:a16="http://schemas.microsoft.com/office/drawing/2014/main" id="{4996136B-32B8-9082-C16D-BF03AE679A49}"/>
+                </a:ext>
+              </a:extLst>
+            </p:cNvPr>
+            <p:cNvSpPr/>
+            <p:nvPr/>
+          </p:nvSpPr>
+          <p:spPr>
+            <a:xfrm>
+              <a:off x="7777424" y="2883877"/>
+              <a:ext cx="200923" cy="137453"/>
+            </a:xfrm>
+            <a:prstGeom prst="chevron">
+              <a:avLst/>
+            </a:prstGeom>
+          </p:spPr>
+          <p:style>
+            <a:lnRef idx="0">
+              <a:schemeClr val="accent1"/>
+            </a:lnRef>
+            <a:fillRef idx="3">
+              <a:schemeClr val="accent1"/>
+            </a:fillRef>
+            <a:effectRef idx="3">
+              <a:schemeClr val="accent1"/>
+            </a:effectRef>
+            <a:fontRef idx="minor">
+              <a:schemeClr val="lt1"/>
+            </a:fontRef>
+          </p:style>
+          <p:txBody>
+            <a:bodyPr rtlCol="0" anchor="ctr"/>
+            <a:lstStyle/>
+            <a:p>
+              <a:pPr algn="ctr"/>
+              <a:endParaRPr lang="es-CO">
+                <a:solidFill>
+                  <a:schemeClr val="tx1"/>
+                </a:solidFill>
+              </a:endParaRPr>
+            </a:p>
+          </p:txBody>
+        </p:sp>
+        <p:sp>
+          <p:nvSpPr>
+            <p:cNvPr id="210" name="Flecha: cheurón 209">
+              <a:extLst>
+                <a:ext uri="{FF2B5EF4-FFF2-40B4-BE49-F238E27FC236}">
+                  <a16:creationId xmlns:a16="http://schemas.microsoft.com/office/drawing/2014/main" id="{5F3CF3E2-81B5-FE0A-B82A-86F6E2BDA6B1}"/>
+                </a:ext>
+              </a:extLst>
+            </p:cNvPr>
+            <p:cNvSpPr/>
+            <p:nvPr/>
+          </p:nvSpPr>
+          <p:spPr>
+            <a:xfrm>
+              <a:off x="7968836" y="2883876"/>
+              <a:ext cx="200923" cy="137453"/>
+            </a:xfrm>
+            <a:prstGeom prst="chevron">
+              <a:avLst/>
+            </a:prstGeom>
+          </p:spPr>
+          <p:style>
+            <a:lnRef idx="0">
+              <a:schemeClr val="accent1"/>
+            </a:lnRef>
+            <a:fillRef idx="3">
+              <a:schemeClr val="accent1"/>
+            </a:fillRef>
+            <a:effectRef idx="3">
+              <a:schemeClr val="accent1"/>
+            </a:effectRef>
+            <a:fontRef idx="minor">
+              <a:schemeClr val="lt1"/>
+            </a:fontRef>
+          </p:style>
+          <p:txBody>
+            <a:bodyPr rtlCol="0" anchor="ctr"/>
+            <a:lstStyle/>
+            <a:p>
+              <a:pPr algn="ctr"/>
+              <a:endParaRPr lang="es-CO" dirty="0">
+                <a:solidFill>
+                  <a:schemeClr val="tx1"/>
+                </a:solidFill>
+              </a:endParaRPr>
+            </a:p>
+          </p:txBody>
+        </p:sp>
+        <p:sp>
+          <p:nvSpPr>
+            <p:cNvPr id="211" name="Flecha: cheurón 210">
+              <a:extLst>
+                <a:ext uri="{FF2B5EF4-FFF2-40B4-BE49-F238E27FC236}">
+                  <a16:creationId xmlns:a16="http://schemas.microsoft.com/office/drawing/2014/main" id="{C685A3B8-19EB-5CF9-4B1C-6537C98A989D}"/>
+                </a:ext>
+              </a:extLst>
+            </p:cNvPr>
+            <p:cNvSpPr/>
+            <p:nvPr/>
+          </p:nvSpPr>
+          <p:spPr>
+            <a:xfrm>
+              <a:off x="8169759" y="2883875"/>
+              <a:ext cx="200923" cy="137453"/>
+            </a:xfrm>
+            <a:prstGeom prst="chevron">
+              <a:avLst/>
+            </a:prstGeom>
+          </p:spPr>
+          <p:style>
+            <a:lnRef idx="0">
+              <a:schemeClr val="accent1"/>
+            </a:lnRef>
+            <a:fillRef idx="3">
+              <a:schemeClr val="accent1"/>
+            </a:fillRef>
+            <a:effectRef idx="3">
+              <a:schemeClr val="accent1"/>
+            </a:effectRef>
+            <a:fontRef idx="minor">
+              <a:schemeClr val="lt1"/>
+            </a:fontRef>
+          </p:style>
+          <p:txBody>
+            <a:bodyPr rtlCol="0" anchor="ctr"/>
+            <a:lstStyle/>
+            <a:p>
+              <a:pPr algn="ctr"/>
+              <a:endParaRPr lang="es-CO">
+                <a:solidFill>
+                  <a:schemeClr val="tx1"/>
+                </a:solidFill>
+              </a:endParaRPr>
+            </a:p>
+          </p:txBody>
+        </p:sp>
+      </p:grpSp>
+      <p:grpSp>
+        <p:nvGrpSpPr>
+          <p:cNvPr id="216" name="Grupo 215">
+            <a:extLst>
+              <a:ext uri="{FF2B5EF4-FFF2-40B4-BE49-F238E27FC236}">
+                <a16:creationId xmlns:a16="http://schemas.microsoft.com/office/drawing/2014/main" id="{BA389ACD-209D-7F19-76C9-4303ADBAE10A}"/>
+              </a:ext>
+            </a:extLst>
+          </p:cNvPr>
+          <p:cNvGrpSpPr/>
+          <p:nvPr/>
+        </p:nvGrpSpPr>
+        <p:grpSpPr>
+          <a:xfrm rot="1631157">
+            <a:off x="3977773" y="3814770"/>
+            <a:ext cx="518548" cy="108931"/>
+            <a:chOff x="7777424" y="2883875"/>
+            <a:chExt cx="593258" cy="137455"/>
+          </a:xfrm>
+        </p:grpSpPr>
+        <p:sp>
+          <p:nvSpPr>
+            <p:cNvPr id="217" name="Flecha: cheurón 216">
+              <a:extLst>
+                <a:ext uri="{FF2B5EF4-FFF2-40B4-BE49-F238E27FC236}">
+                  <a16:creationId xmlns:a16="http://schemas.microsoft.com/office/drawing/2014/main" id="{0CC891B6-889E-7698-EAF0-4A20CF5E9960}"/>
+                </a:ext>
+              </a:extLst>
+            </p:cNvPr>
+            <p:cNvSpPr/>
+            <p:nvPr/>
+          </p:nvSpPr>
+          <p:spPr>
+            <a:xfrm>
+              <a:off x="7777424" y="2883877"/>
+              <a:ext cx="200923" cy="137453"/>
+            </a:xfrm>
+            <a:prstGeom prst="chevron">
+              <a:avLst/>
+            </a:prstGeom>
+          </p:spPr>
+          <p:style>
+            <a:lnRef idx="0">
+              <a:schemeClr val="accent1"/>
+            </a:lnRef>
+            <a:fillRef idx="3">
+              <a:schemeClr val="accent1"/>
+            </a:fillRef>
+            <a:effectRef idx="3">
+              <a:schemeClr val="accent1"/>
+            </a:effectRef>
+            <a:fontRef idx="minor">
+              <a:schemeClr val="lt1"/>
+            </a:fontRef>
+          </p:style>
+          <p:txBody>
+            <a:bodyPr rtlCol="0" anchor="ctr"/>
+            <a:lstStyle/>
+            <a:p>
+              <a:pPr algn="ctr"/>
+              <a:endParaRPr lang="es-CO">
+                <a:solidFill>
+                  <a:schemeClr val="tx1"/>
+                </a:solidFill>
+              </a:endParaRPr>
+            </a:p>
+          </p:txBody>
+        </p:sp>
+        <p:sp>
+          <p:nvSpPr>
+            <p:cNvPr id="218" name="Flecha: cheurón 217">
+              <a:extLst>
+                <a:ext uri="{FF2B5EF4-FFF2-40B4-BE49-F238E27FC236}">
+                  <a16:creationId xmlns:a16="http://schemas.microsoft.com/office/drawing/2014/main" id="{BC448E38-0398-773F-E633-57918E2B2F93}"/>
+                </a:ext>
+              </a:extLst>
+            </p:cNvPr>
+            <p:cNvSpPr/>
+            <p:nvPr/>
+          </p:nvSpPr>
+          <p:spPr>
+            <a:xfrm>
+              <a:off x="7968836" y="2883876"/>
+              <a:ext cx="200923" cy="137453"/>
+            </a:xfrm>
+            <a:prstGeom prst="chevron">
+              <a:avLst/>
+            </a:prstGeom>
+          </p:spPr>
+          <p:style>
+            <a:lnRef idx="0">
+              <a:schemeClr val="accent1"/>
+            </a:lnRef>
+            <a:fillRef idx="3">
+              <a:schemeClr val="accent1"/>
+            </a:fillRef>
+            <a:effectRef idx="3">
+              <a:schemeClr val="accent1"/>
+            </a:effectRef>
+            <a:fontRef idx="minor">
+              <a:schemeClr val="lt1"/>
+            </a:fontRef>
+          </p:style>
+          <p:txBody>
+            <a:bodyPr rtlCol="0" anchor="ctr"/>
+            <a:lstStyle/>
+            <a:p>
+              <a:pPr algn="ctr"/>
+              <a:endParaRPr lang="es-CO" dirty="0">
+                <a:solidFill>
+                  <a:schemeClr val="tx1"/>
+                </a:solidFill>
+              </a:endParaRPr>
+            </a:p>
+          </p:txBody>
+        </p:sp>
+        <p:sp>
+          <p:nvSpPr>
+            <p:cNvPr id="219" name="Flecha: cheurón 218">
+              <a:extLst>
+                <a:ext uri="{FF2B5EF4-FFF2-40B4-BE49-F238E27FC236}">
+                  <a16:creationId xmlns:a16="http://schemas.microsoft.com/office/drawing/2014/main" id="{C6ACC4B1-8B80-C77D-D993-495314B4B4E2}"/>
+                </a:ext>
+              </a:extLst>
+            </p:cNvPr>
+            <p:cNvSpPr/>
+            <p:nvPr/>
+          </p:nvSpPr>
+          <p:spPr>
+            <a:xfrm>
+              <a:off x="8169759" y="2883875"/>
+              <a:ext cx="200923" cy="137453"/>
+            </a:xfrm>
+            <a:prstGeom prst="chevron">
+              <a:avLst/>
+            </a:prstGeom>
+          </p:spPr>
+          <p:style>
+            <a:lnRef idx="0">
+              <a:schemeClr val="accent1"/>
+            </a:lnRef>
+            <a:fillRef idx="3">
+              <a:schemeClr val="accent1"/>
+            </a:fillRef>
+            <a:effectRef idx="3">
+              <a:schemeClr val="accent1"/>
+            </a:effectRef>
+            <a:fontRef idx="minor">
+              <a:schemeClr val="lt1"/>
+            </a:fontRef>
+          </p:style>
+          <p:txBody>
+            <a:bodyPr rtlCol="0" anchor="ctr"/>
+            <a:lstStyle/>
+            <a:p>
+              <a:pPr algn="ctr"/>
+              <a:endParaRPr lang="es-CO">
+                <a:solidFill>
+                  <a:schemeClr val="tx1"/>
+                </a:solidFill>
+              </a:endParaRPr>
+            </a:p>
+          </p:txBody>
+        </p:sp>
+      </p:grpSp>
+      <p:grpSp>
+        <p:nvGrpSpPr>
+          <p:cNvPr id="224" name="Grupo 223">
+            <a:extLst>
+              <a:ext uri="{FF2B5EF4-FFF2-40B4-BE49-F238E27FC236}">
+                <a16:creationId xmlns:a16="http://schemas.microsoft.com/office/drawing/2014/main" id="{1E4475CD-B89D-A57C-EECA-412798E05630}"/>
+              </a:ext>
+            </a:extLst>
+          </p:cNvPr>
+          <p:cNvGrpSpPr/>
+          <p:nvPr/>
+        </p:nvGrpSpPr>
+        <p:grpSpPr>
+          <a:xfrm rot="6499666">
+            <a:off x="4495143" y="3525143"/>
+            <a:ext cx="518548" cy="108931"/>
+            <a:chOff x="7777424" y="2883875"/>
+            <a:chExt cx="593258" cy="137455"/>
+          </a:xfrm>
+        </p:grpSpPr>
+        <p:sp>
+          <p:nvSpPr>
+            <p:cNvPr id="225" name="Flecha: cheurón 224">
+              <a:extLst>
+                <a:ext uri="{FF2B5EF4-FFF2-40B4-BE49-F238E27FC236}">
+                  <a16:creationId xmlns:a16="http://schemas.microsoft.com/office/drawing/2014/main" id="{EC333F9D-C862-6C87-CE21-C8BAAEA0E9A8}"/>
+                </a:ext>
+              </a:extLst>
+            </p:cNvPr>
+            <p:cNvSpPr/>
+            <p:nvPr/>
+          </p:nvSpPr>
+          <p:spPr>
+            <a:xfrm>
+              <a:off x="7777424" y="2883877"/>
+              <a:ext cx="200923" cy="137453"/>
+            </a:xfrm>
+            <a:prstGeom prst="chevron">
+              <a:avLst/>
+            </a:prstGeom>
+          </p:spPr>
+          <p:style>
+            <a:lnRef idx="0">
+              <a:schemeClr val="accent1"/>
+            </a:lnRef>
+            <a:fillRef idx="3">
+              <a:schemeClr val="accent1"/>
+            </a:fillRef>
+            <a:effectRef idx="3">
+              <a:schemeClr val="accent1"/>
+            </a:effectRef>
+            <a:fontRef idx="minor">
+              <a:schemeClr val="lt1"/>
+            </a:fontRef>
+          </p:style>
+          <p:txBody>
+            <a:bodyPr rtlCol="0" anchor="ctr"/>
+            <a:lstStyle/>
+            <a:p>
+              <a:pPr algn="ctr"/>
+              <a:endParaRPr lang="es-CO">
+                <a:solidFill>
+                  <a:schemeClr val="tx1"/>
+                </a:solidFill>
+              </a:endParaRPr>
+            </a:p>
+          </p:txBody>
+        </p:sp>
+        <p:sp>
+          <p:nvSpPr>
+            <p:cNvPr id="226" name="Flecha: cheurón 225">
+              <a:extLst>
+                <a:ext uri="{FF2B5EF4-FFF2-40B4-BE49-F238E27FC236}">
+                  <a16:creationId xmlns:a16="http://schemas.microsoft.com/office/drawing/2014/main" id="{68D33363-DB8D-AD59-CCF1-B225A81A6782}"/>
+                </a:ext>
+              </a:extLst>
+            </p:cNvPr>
+            <p:cNvSpPr/>
+            <p:nvPr/>
+          </p:nvSpPr>
+          <p:spPr>
+            <a:xfrm>
+              <a:off x="7968836" y="2883876"/>
+              <a:ext cx="200923" cy="137453"/>
+            </a:xfrm>
+            <a:prstGeom prst="chevron">
+              <a:avLst/>
+            </a:prstGeom>
+          </p:spPr>
+          <p:style>
+            <a:lnRef idx="0">
+              <a:schemeClr val="accent1"/>
+            </a:lnRef>
+            <a:fillRef idx="3">
+              <a:schemeClr val="accent1"/>
+            </a:fillRef>
+            <a:effectRef idx="3">
+              <a:schemeClr val="accent1"/>
+            </a:effectRef>
+            <a:fontRef idx="minor">
+              <a:schemeClr val="lt1"/>
+            </a:fontRef>
+          </p:style>
+          <p:txBody>
+            <a:bodyPr rtlCol="0" anchor="ctr"/>
+            <a:lstStyle/>
+            <a:p>
+              <a:pPr algn="ctr"/>
+              <a:endParaRPr lang="es-CO" dirty="0">
+                <a:solidFill>
+                  <a:schemeClr val="tx1"/>
+                </a:solidFill>
+              </a:endParaRPr>
+            </a:p>
+          </p:txBody>
+        </p:sp>
+        <p:sp>
+          <p:nvSpPr>
+            <p:cNvPr id="227" name="Flecha: cheurón 226">
+              <a:extLst>
+                <a:ext uri="{FF2B5EF4-FFF2-40B4-BE49-F238E27FC236}">
+                  <a16:creationId xmlns:a16="http://schemas.microsoft.com/office/drawing/2014/main" id="{A66C7001-5961-902E-7C4B-8EA203F3A8EE}"/>
+                </a:ext>
+              </a:extLst>
+            </p:cNvPr>
+            <p:cNvSpPr/>
+            <p:nvPr/>
+          </p:nvSpPr>
+          <p:spPr>
+            <a:xfrm>
+              <a:off x="8169759" y="2883875"/>
+              <a:ext cx="200923" cy="137453"/>
+            </a:xfrm>
+            <a:prstGeom prst="chevron">
+              <a:avLst/>
+            </a:prstGeom>
+          </p:spPr>
+          <p:style>
+            <a:lnRef idx="0">
+              <a:schemeClr val="accent1"/>
+            </a:lnRef>
+            <a:fillRef idx="3">
+              <a:schemeClr val="accent1"/>
+            </a:fillRef>
+            <a:effectRef idx="3">
+              <a:schemeClr val="accent1"/>
+            </a:effectRef>
+            <a:fontRef idx="minor">
+              <a:schemeClr val="lt1"/>
+            </a:fontRef>
+          </p:style>
+          <p:txBody>
+            <a:bodyPr rtlCol="0" anchor="ctr"/>
+            <a:lstStyle/>
+            <a:p>
+              <a:pPr algn="ctr"/>
+              <a:endParaRPr lang="es-CO">
+                <a:solidFill>
+                  <a:schemeClr val="tx1"/>
+                </a:solidFill>
+              </a:endParaRPr>
+            </a:p>
+          </p:txBody>
+        </p:sp>
+      </p:grpSp>
+      <p:grpSp>
+        <p:nvGrpSpPr>
+          <p:cNvPr id="228" name="Grupo 227">
+            <a:extLst>
+              <a:ext uri="{FF2B5EF4-FFF2-40B4-BE49-F238E27FC236}">
+                <a16:creationId xmlns:a16="http://schemas.microsoft.com/office/drawing/2014/main" id="{94C09F5B-4686-C3D4-712A-5E1AF665ED49}"/>
+              </a:ext>
+            </a:extLst>
+          </p:cNvPr>
+          <p:cNvGrpSpPr/>
+          <p:nvPr/>
+        </p:nvGrpSpPr>
+        <p:grpSpPr>
+          <a:xfrm rot="17255206">
+            <a:off x="4338311" y="3309522"/>
+            <a:ext cx="518548" cy="108931"/>
+            <a:chOff x="7777424" y="2883875"/>
+            <a:chExt cx="593258" cy="137455"/>
+          </a:xfrm>
+        </p:grpSpPr>
+        <p:sp>
+          <p:nvSpPr>
+            <p:cNvPr id="229" name="Flecha: cheurón 228">
+              <a:extLst>
+                <a:ext uri="{FF2B5EF4-FFF2-40B4-BE49-F238E27FC236}">
+                  <a16:creationId xmlns:a16="http://schemas.microsoft.com/office/drawing/2014/main" id="{B6438751-F6EF-65D2-F105-C1589302AB57}"/>
+                </a:ext>
+              </a:extLst>
+            </p:cNvPr>
+            <p:cNvSpPr/>
+            <p:nvPr/>
+          </p:nvSpPr>
+          <p:spPr>
+            <a:xfrm>
+              <a:off x="7777424" y="2883877"/>
+              <a:ext cx="200923" cy="137453"/>
+            </a:xfrm>
+            <a:prstGeom prst="chevron">
+              <a:avLst/>
+            </a:prstGeom>
+          </p:spPr>
+          <p:style>
+            <a:lnRef idx="0">
+              <a:schemeClr val="accent1"/>
+            </a:lnRef>
+            <a:fillRef idx="3">
+              <a:schemeClr val="accent1"/>
+            </a:fillRef>
+            <a:effectRef idx="3">
+              <a:schemeClr val="accent1"/>
+            </a:effectRef>
+            <a:fontRef idx="minor">
+              <a:schemeClr val="lt1"/>
+            </a:fontRef>
+          </p:style>
+          <p:txBody>
+            <a:bodyPr rtlCol="0" anchor="ctr"/>
+            <a:lstStyle/>
+            <a:p>
+              <a:pPr algn="ctr"/>
+              <a:endParaRPr lang="es-CO">
+                <a:solidFill>
+                  <a:schemeClr val="tx1"/>
+                </a:solidFill>
+              </a:endParaRPr>
+            </a:p>
+          </p:txBody>
+        </p:sp>
+        <p:sp>
+          <p:nvSpPr>
+            <p:cNvPr id="230" name="Flecha: cheurón 229">
+              <a:extLst>
+                <a:ext uri="{FF2B5EF4-FFF2-40B4-BE49-F238E27FC236}">
+                  <a16:creationId xmlns:a16="http://schemas.microsoft.com/office/drawing/2014/main" id="{CB082897-FBA2-6C30-00AA-E0F8D5012B1F}"/>
+                </a:ext>
+              </a:extLst>
+            </p:cNvPr>
+            <p:cNvSpPr/>
+            <p:nvPr/>
+          </p:nvSpPr>
+          <p:spPr>
+            <a:xfrm>
+              <a:off x="7968836" y="2883876"/>
+              <a:ext cx="200923" cy="137453"/>
+            </a:xfrm>
+            <a:prstGeom prst="chevron">
+              <a:avLst/>
+            </a:prstGeom>
+          </p:spPr>
+          <p:style>
+            <a:lnRef idx="0">
+              <a:schemeClr val="accent1"/>
+            </a:lnRef>
+            <a:fillRef idx="3">
+              <a:schemeClr val="accent1"/>
+            </a:fillRef>
+            <a:effectRef idx="3">
+              <a:schemeClr val="accent1"/>
+            </a:effectRef>
+            <a:fontRef idx="minor">
+              <a:schemeClr val="lt1"/>
+            </a:fontRef>
+          </p:style>
+          <p:txBody>
+            <a:bodyPr rtlCol="0" anchor="ctr"/>
+            <a:lstStyle/>
+            <a:p>
+              <a:pPr algn="ctr"/>
+              <a:endParaRPr lang="es-CO" dirty="0">
+                <a:solidFill>
+                  <a:schemeClr val="tx1"/>
+                </a:solidFill>
+              </a:endParaRPr>
+            </a:p>
+          </p:txBody>
+        </p:sp>
+        <p:sp>
+          <p:nvSpPr>
+            <p:cNvPr id="231" name="Flecha: cheurón 230">
+              <a:extLst>
+                <a:ext uri="{FF2B5EF4-FFF2-40B4-BE49-F238E27FC236}">
+                  <a16:creationId xmlns:a16="http://schemas.microsoft.com/office/drawing/2014/main" id="{69B3FBB7-8BCC-97EE-C610-3CFDEFCC67D5}"/>
+                </a:ext>
+              </a:extLst>
+            </p:cNvPr>
+            <p:cNvSpPr/>
+            <p:nvPr/>
+          </p:nvSpPr>
+          <p:spPr>
+            <a:xfrm>
+              <a:off x="8169759" y="2883875"/>
+              <a:ext cx="200923" cy="137453"/>
+            </a:xfrm>
+            <a:prstGeom prst="chevron">
+              <a:avLst/>
+            </a:prstGeom>
+          </p:spPr>
+          <p:style>
+            <a:lnRef idx="0">
+              <a:schemeClr val="accent1"/>
+            </a:lnRef>
+            <a:fillRef idx="3">
+              <a:schemeClr val="accent1"/>
+            </a:fillRef>
+            <a:effectRef idx="3">
+              <a:schemeClr val="accent1"/>
+            </a:effectRef>
+            <a:fontRef idx="minor">
+              <a:schemeClr val="lt1"/>
+            </a:fontRef>
+          </p:style>
+          <p:txBody>
+            <a:bodyPr rtlCol="0" anchor="ctr"/>
+            <a:lstStyle/>
+            <a:p>
+              <a:pPr algn="ctr"/>
+              <a:endParaRPr lang="es-CO">
+                <a:solidFill>
+                  <a:schemeClr val="tx1"/>
+                </a:solidFill>
+              </a:endParaRPr>
+            </a:p>
+          </p:txBody>
+        </p:sp>
+      </p:grpSp>
+      <p:grpSp>
+        <p:nvGrpSpPr>
+          <p:cNvPr id="232" name="Grupo 231">
+            <a:extLst>
+              <a:ext uri="{FF2B5EF4-FFF2-40B4-BE49-F238E27FC236}">
+                <a16:creationId xmlns:a16="http://schemas.microsoft.com/office/drawing/2014/main" id="{10A2B709-8215-4A2D-F12B-8DB0E11BDE6A}"/>
+              </a:ext>
+            </a:extLst>
+          </p:cNvPr>
+          <p:cNvGrpSpPr/>
+          <p:nvPr/>
+        </p:nvGrpSpPr>
+        <p:grpSpPr>
+          <a:xfrm rot="3389364">
+            <a:off x="3319691" y="3966354"/>
+            <a:ext cx="518548" cy="108931"/>
+            <a:chOff x="7777424" y="2883875"/>
+            <a:chExt cx="593258" cy="137455"/>
+          </a:xfrm>
+        </p:grpSpPr>
+        <p:sp>
+          <p:nvSpPr>
+            <p:cNvPr id="233" name="Flecha: cheurón 232">
+              <a:extLst>
+                <a:ext uri="{FF2B5EF4-FFF2-40B4-BE49-F238E27FC236}">
+                  <a16:creationId xmlns:a16="http://schemas.microsoft.com/office/drawing/2014/main" id="{4BFDF43B-C11D-A590-4BF3-344660ABE21D}"/>
+                </a:ext>
+              </a:extLst>
+            </p:cNvPr>
+            <p:cNvSpPr/>
+            <p:nvPr/>
+          </p:nvSpPr>
+          <p:spPr>
+            <a:xfrm>
+              <a:off x="7777424" y="2883877"/>
+              <a:ext cx="200923" cy="137453"/>
+            </a:xfrm>
+            <a:prstGeom prst="chevron">
+              <a:avLst/>
+            </a:prstGeom>
+          </p:spPr>
+          <p:style>
+            <a:lnRef idx="0">
+              <a:schemeClr val="accent1"/>
+            </a:lnRef>
+            <a:fillRef idx="3">
+              <a:schemeClr val="accent1"/>
+            </a:fillRef>
+            <a:effectRef idx="3">
+              <a:schemeClr val="accent1"/>
+            </a:effectRef>
+            <a:fontRef idx="minor">
+              <a:schemeClr val="lt1"/>
+            </a:fontRef>
+          </p:style>
+          <p:txBody>
+            <a:bodyPr rtlCol="0" anchor="ctr"/>
+            <a:lstStyle/>
+            <a:p>
+              <a:pPr algn="ctr"/>
+              <a:endParaRPr lang="es-CO">
+                <a:solidFill>
+                  <a:schemeClr val="tx1"/>
+                </a:solidFill>
+              </a:endParaRPr>
+            </a:p>
+          </p:txBody>
+        </p:sp>
+        <p:sp>
+          <p:nvSpPr>
+            <p:cNvPr id="234" name="Flecha: cheurón 233">
+              <a:extLst>
+                <a:ext uri="{FF2B5EF4-FFF2-40B4-BE49-F238E27FC236}">
+                  <a16:creationId xmlns:a16="http://schemas.microsoft.com/office/drawing/2014/main" id="{A3FEB860-34B8-7F5B-388E-58B3107ADD43}"/>
+                </a:ext>
+              </a:extLst>
+            </p:cNvPr>
+            <p:cNvSpPr/>
+            <p:nvPr/>
+          </p:nvSpPr>
+          <p:spPr>
+            <a:xfrm>
+              <a:off x="7968836" y="2883876"/>
+              <a:ext cx="200923" cy="137453"/>
+            </a:xfrm>
+            <a:prstGeom prst="chevron">
+              <a:avLst/>
+            </a:prstGeom>
+          </p:spPr>
+          <p:style>
+            <a:lnRef idx="0">
+              <a:schemeClr val="accent1"/>
+            </a:lnRef>
+            <a:fillRef idx="3">
+              <a:schemeClr val="accent1"/>
+            </a:fillRef>
+            <a:effectRef idx="3">
+              <a:schemeClr val="accent1"/>
+            </a:effectRef>
+            <a:fontRef idx="minor">
+              <a:schemeClr val="lt1"/>
+            </a:fontRef>
+          </p:style>
+          <p:txBody>
+            <a:bodyPr rtlCol="0" anchor="ctr"/>
+            <a:lstStyle/>
+            <a:p>
+              <a:pPr algn="ctr"/>
+              <a:endParaRPr lang="es-CO" dirty="0">
+                <a:solidFill>
+                  <a:schemeClr val="tx1"/>
+                </a:solidFill>
+              </a:endParaRPr>
+            </a:p>
+          </p:txBody>
+        </p:sp>
+        <p:sp>
+          <p:nvSpPr>
+            <p:cNvPr id="235" name="Flecha: cheurón 234">
+              <a:extLst>
+                <a:ext uri="{FF2B5EF4-FFF2-40B4-BE49-F238E27FC236}">
+                  <a16:creationId xmlns:a16="http://schemas.microsoft.com/office/drawing/2014/main" id="{C0613352-D1DB-C289-4DE2-6181D719187A}"/>
+                </a:ext>
+              </a:extLst>
+            </p:cNvPr>
+            <p:cNvSpPr/>
+            <p:nvPr/>
+          </p:nvSpPr>
+          <p:spPr>
+            <a:xfrm>
+              <a:off x="8169759" y="2883875"/>
+              <a:ext cx="200923" cy="137453"/>
+            </a:xfrm>
+            <a:prstGeom prst="chevron">
+              <a:avLst/>
+            </a:prstGeom>
+          </p:spPr>
+          <p:style>
+            <a:lnRef idx="0">
+              <a:schemeClr val="accent1"/>
+            </a:lnRef>
+            <a:fillRef idx="3">
+              <a:schemeClr val="accent1"/>
+            </a:fillRef>
+            <a:effectRef idx="3">
+              <a:schemeClr val="accent1"/>
+            </a:effectRef>
+            <a:fontRef idx="minor">
+              <a:schemeClr val="lt1"/>
+            </a:fontRef>
+          </p:style>
+          <p:txBody>
+            <a:bodyPr rtlCol="0" anchor="ctr"/>
+            <a:lstStyle/>
+            <a:p>
+              <a:pPr algn="ctr"/>
+              <a:endParaRPr lang="es-CO">
+                <a:solidFill>
+                  <a:schemeClr val="tx1"/>
+                </a:solidFill>
+              </a:endParaRPr>
+            </a:p>
+          </p:txBody>
+        </p:sp>
+      </p:grpSp>
+      <p:grpSp>
+        <p:nvGrpSpPr>
+          <p:cNvPr id="246" name="Grupo 245">
+            <a:extLst>
+              <a:ext uri="{FF2B5EF4-FFF2-40B4-BE49-F238E27FC236}">
+                <a16:creationId xmlns:a16="http://schemas.microsoft.com/office/drawing/2014/main" id="{992BB5B3-F9D3-F774-7AC0-DCE64DEADE71}"/>
+              </a:ext>
+            </a:extLst>
+          </p:cNvPr>
+          <p:cNvGrpSpPr/>
+          <p:nvPr/>
+        </p:nvGrpSpPr>
+        <p:grpSpPr>
+          <a:xfrm rot="19931559">
+            <a:off x="6283611" y="3605806"/>
+            <a:ext cx="518548" cy="108931"/>
+            <a:chOff x="7777424" y="2883875"/>
+            <a:chExt cx="593258" cy="137455"/>
+          </a:xfrm>
+        </p:grpSpPr>
+        <p:sp>
+          <p:nvSpPr>
+            <p:cNvPr id="247" name="Flecha: cheurón 246">
+              <a:extLst>
+                <a:ext uri="{FF2B5EF4-FFF2-40B4-BE49-F238E27FC236}">
+                  <a16:creationId xmlns:a16="http://schemas.microsoft.com/office/drawing/2014/main" id="{55A6F36A-E1E4-05A2-E9D7-D6193AC406D6}"/>
+                </a:ext>
+              </a:extLst>
+            </p:cNvPr>
+            <p:cNvSpPr/>
+            <p:nvPr/>
+          </p:nvSpPr>
+          <p:spPr>
+            <a:xfrm>
+              <a:off x="7777424" y="2883877"/>
+              <a:ext cx="200923" cy="137453"/>
+            </a:xfrm>
+            <a:prstGeom prst="chevron">
+              <a:avLst/>
+            </a:prstGeom>
+          </p:spPr>
+          <p:style>
+            <a:lnRef idx="0">
+              <a:schemeClr val="accent1"/>
+            </a:lnRef>
+            <a:fillRef idx="3">
+              <a:schemeClr val="accent1"/>
+            </a:fillRef>
+            <a:effectRef idx="3">
+              <a:schemeClr val="accent1"/>
+            </a:effectRef>
+            <a:fontRef idx="minor">
+              <a:schemeClr val="lt1"/>
+            </a:fontRef>
+          </p:style>
+          <p:txBody>
+            <a:bodyPr rtlCol="0" anchor="ctr"/>
+            <a:lstStyle/>
+            <a:p>
+              <a:pPr algn="ctr"/>
+              <a:endParaRPr lang="es-CO">
+                <a:solidFill>
+                  <a:schemeClr val="tx1"/>
+                </a:solidFill>
+              </a:endParaRPr>
+            </a:p>
+          </p:txBody>
+        </p:sp>
+        <p:sp>
+          <p:nvSpPr>
+            <p:cNvPr id="248" name="Flecha: cheurón 247">
+              <a:extLst>
+                <a:ext uri="{FF2B5EF4-FFF2-40B4-BE49-F238E27FC236}">
+                  <a16:creationId xmlns:a16="http://schemas.microsoft.com/office/drawing/2014/main" id="{7129A955-ABB4-4B4F-1BE5-DD0B143B6998}"/>
+                </a:ext>
+              </a:extLst>
+            </p:cNvPr>
+            <p:cNvSpPr/>
+            <p:nvPr/>
+          </p:nvSpPr>
+          <p:spPr>
+            <a:xfrm>
+              <a:off x="7968836" y="2883876"/>
+              <a:ext cx="200923" cy="137453"/>
+            </a:xfrm>
+            <a:prstGeom prst="chevron">
+              <a:avLst/>
+            </a:prstGeom>
+          </p:spPr>
+          <p:style>
+            <a:lnRef idx="0">
+              <a:schemeClr val="accent1"/>
+            </a:lnRef>
+            <a:fillRef idx="3">
+              <a:schemeClr val="accent1"/>
+            </a:fillRef>
+            <a:effectRef idx="3">
+              <a:schemeClr val="accent1"/>
+            </a:effectRef>
+            <a:fontRef idx="minor">
+              <a:schemeClr val="lt1"/>
+            </a:fontRef>
+          </p:style>
+          <p:txBody>
+            <a:bodyPr rtlCol="0" anchor="ctr"/>
+            <a:lstStyle/>
+            <a:p>
+              <a:pPr algn="ctr"/>
+              <a:endParaRPr lang="es-CO" dirty="0">
+                <a:solidFill>
+                  <a:schemeClr val="tx1"/>
+                </a:solidFill>
+              </a:endParaRPr>
+            </a:p>
+          </p:txBody>
+        </p:sp>
+        <p:sp>
+          <p:nvSpPr>
+            <p:cNvPr id="249" name="Flecha: cheurón 248">
+              <a:extLst>
+                <a:ext uri="{FF2B5EF4-FFF2-40B4-BE49-F238E27FC236}">
+                  <a16:creationId xmlns:a16="http://schemas.microsoft.com/office/drawing/2014/main" id="{B81AEF6C-CF90-F8CC-C7FF-246FEB6C78B2}"/>
+                </a:ext>
+              </a:extLst>
+            </p:cNvPr>
+            <p:cNvSpPr/>
+            <p:nvPr/>
+          </p:nvSpPr>
+          <p:spPr>
+            <a:xfrm>
+              <a:off x="8169759" y="2883875"/>
+              <a:ext cx="200923" cy="137453"/>
+            </a:xfrm>
+            <a:prstGeom prst="chevron">
+              <a:avLst/>
+            </a:prstGeom>
+          </p:spPr>
+          <p:style>
+            <a:lnRef idx="0">
+              <a:schemeClr val="accent1"/>
+            </a:lnRef>
+            <a:fillRef idx="3">
+              <a:schemeClr val="accent1"/>
+            </a:fillRef>
+            <a:effectRef idx="3">
+              <a:schemeClr val="accent1"/>
+            </a:effectRef>
+            <a:fontRef idx="minor">
+              <a:schemeClr val="lt1"/>
+            </a:fontRef>
+          </p:style>
+          <p:txBody>
+            <a:bodyPr rtlCol="0" anchor="ctr"/>
+            <a:lstStyle/>
+            <a:p>
+              <a:pPr algn="ctr"/>
+              <a:endParaRPr lang="es-CO">
+                <a:solidFill>
+                  <a:schemeClr val="tx1"/>
+                </a:solidFill>
+              </a:endParaRPr>
+            </a:p>
+          </p:txBody>
+        </p:sp>
+      </p:grpSp>
+      <p:cxnSp>
+        <p:nvCxnSpPr>
+          <p:cNvPr id="256" name="Conector recto de flecha 255">
+            <a:extLst>
+              <a:ext uri="{FF2B5EF4-FFF2-40B4-BE49-F238E27FC236}">
+                <a16:creationId xmlns:a16="http://schemas.microsoft.com/office/drawing/2014/main" id="{26B066E4-55F7-6B11-63B9-772FDB286121}"/>
+              </a:ext>
+            </a:extLst>
+          </p:cNvPr>
+          <p:cNvCxnSpPr>
+            <a:cxnSpLocks/>
+            <a:endCxn id="133" idx="2"/>
+          </p:cNvCxnSpPr>
+          <p:nvPr/>
+        </p:nvCxnSpPr>
+        <p:spPr>
+          <a:xfrm flipV="1">
+            <a:off x="5367102" y="1530119"/>
+            <a:ext cx="1533221" cy="644683"/>
+          </a:xfrm>
+          <a:prstGeom prst="straightConnector1">
+            <a:avLst/>
+          </a:prstGeom>
+          <a:ln w="38100">
+            <a:tailEnd type="triangle"/>
+          </a:ln>
+        </p:spPr>
+        <p:style>
+          <a:lnRef idx="3">
+            <a:schemeClr val="accent2"/>
+          </a:lnRef>
+          <a:fillRef idx="0">
+            <a:schemeClr val="accent2"/>
+          </a:fillRef>
+          <a:effectRef idx="2">
+            <a:schemeClr val="accent2"/>
+          </a:effectRef>
+          <a:fontRef idx="minor">
+            <a:schemeClr val="tx1"/>
+          </a:fontRef>
+        </p:style>
+      </p:cxnSp>
+      <p:cxnSp>
+        <p:nvCxnSpPr>
+          <p:cNvPr id="260" name="Conector recto de flecha 259">
+            <a:extLst>
+              <a:ext uri="{FF2B5EF4-FFF2-40B4-BE49-F238E27FC236}">
+                <a16:creationId xmlns:a16="http://schemas.microsoft.com/office/drawing/2014/main" id="{4349CCD0-464A-AB7E-AD81-6B75A898DD76}"/>
+              </a:ext>
+            </a:extLst>
+          </p:cNvPr>
+          <p:cNvCxnSpPr>
+            <a:cxnSpLocks/>
+          </p:cNvCxnSpPr>
+          <p:nvPr/>
+        </p:nvCxnSpPr>
+        <p:spPr>
+          <a:xfrm flipV="1">
+            <a:off x="7143030" y="1852462"/>
+            <a:ext cx="9293" cy="1091329"/>
+          </a:xfrm>
+          <a:prstGeom prst="straightConnector1">
+            <a:avLst/>
+          </a:prstGeom>
+          <a:ln w="38100">
+            <a:tailEnd type="triangle"/>
+          </a:ln>
+        </p:spPr>
+        <p:style>
+          <a:lnRef idx="3">
+            <a:schemeClr val="accent2"/>
+          </a:lnRef>
+          <a:fillRef idx="0">
+            <a:schemeClr val="accent2"/>
+          </a:fillRef>
+          <a:effectRef idx="2">
+            <a:schemeClr val="accent2"/>
+          </a:effectRef>
+          <a:fontRef idx="minor">
+            <a:schemeClr val="tx1"/>
+          </a:fontRef>
+        </p:style>
+      </p:cxnSp>
+      <p:cxnSp>
+        <p:nvCxnSpPr>
+          <p:cNvPr id="265" name="Conector recto de flecha 264">
+            <a:extLst>
+              <a:ext uri="{FF2B5EF4-FFF2-40B4-BE49-F238E27FC236}">
+                <a16:creationId xmlns:a16="http://schemas.microsoft.com/office/drawing/2014/main" id="{0DB9C948-62CD-5B97-22AA-C8D5FFDC38B3}"/>
+              </a:ext>
+            </a:extLst>
+          </p:cNvPr>
+          <p:cNvCxnSpPr>
+            <a:cxnSpLocks/>
+          </p:cNvCxnSpPr>
+          <p:nvPr/>
+        </p:nvCxnSpPr>
+        <p:spPr>
+          <a:xfrm>
+            <a:off x="3432659" y="3370118"/>
+            <a:ext cx="2664000" cy="1307307"/>
+          </a:xfrm>
+          <a:prstGeom prst="straightConnector1">
+            <a:avLst/>
+          </a:prstGeom>
+          <a:ln w="38100">
+            <a:tailEnd type="triangle"/>
+          </a:ln>
+        </p:spPr>
+        <p:style>
+          <a:lnRef idx="3">
+            <a:schemeClr val="accent2"/>
+          </a:lnRef>
+          <a:fillRef idx="0">
+            <a:schemeClr val="accent2"/>
+          </a:fillRef>
+          <a:effectRef idx="2">
+            <a:schemeClr val="accent2"/>
+          </a:effectRef>
+          <a:fontRef idx="minor">
+            <a:schemeClr val="tx1"/>
+          </a:fontRef>
+        </p:style>
+      </p:cxnSp>
+      <p:cxnSp>
+        <p:nvCxnSpPr>
+          <p:cNvPr id="267" name="Conector recto de flecha 266">
+            <a:extLst>
+              <a:ext uri="{FF2B5EF4-FFF2-40B4-BE49-F238E27FC236}">
+                <a16:creationId xmlns:a16="http://schemas.microsoft.com/office/drawing/2014/main" id="{99EB518B-9DB2-EDFC-8210-B6D0411C61FE}"/>
+              </a:ext>
+            </a:extLst>
+          </p:cNvPr>
+          <p:cNvCxnSpPr>
+            <a:cxnSpLocks/>
+            <a:stCxn id="135" idx="6"/>
+            <a:endCxn id="131" idx="2"/>
+          </p:cNvCxnSpPr>
+          <p:nvPr/>
+        </p:nvCxnSpPr>
+        <p:spPr>
+          <a:xfrm>
+            <a:off x="4533843" y="4829326"/>
+            <a:ext cx="1549211" cy="3348"/>
+          </a:xfrm>
+          <a:prstGeom prst="straightConnector1">
+            <a:avLst/>
+          </a:prstGeom>
+          <a:ln w="38100">
+            <a:tailEnd type="triangle"/>
+          </a:ln>
+        </p:spPr>
+        <p:style>
+          <a:lnRef idx="3">
+            <a:schemeClr val="accent2"/>
+          </a:lnRef>
+          <a:fillRef idx="0">
+            <a:schemeClr val="accent2"/>
+          </a:fillRef>
+          <a:effectRef idx="2">
+            <a:schemeClr val="accent2"/>
+          </a:effectRef>
+          <a:fontRef idx="minor">
+            <a:schemeClr val="tx1"/>
+          </a:fontRef>
+        </p:style>
+      </p:cxnSp>
+      <p:cxnSp>
+        <p:nvCxnSpPr>
+          <p:cNvPr id="270" name="Conector recto de flecha 269">
+            <a:extLst>
+              <a:ext uri="{FF2B5EF4-FFF2-40B4-BE49-F238E27FC236}">
+                <a16:creationId xmlns:a16="http://schemas.microsoft.com/office/drawing/2014/main" id="{80EC9028-91FB-A5DE-8228-28F8BA2F0581}"/>
+              </a:ext>
+            </a:extLst>
+          </p:cNvPr>
+          <p:cNvCxnSpPr>
+            <a:cxnSpLocks/>
+          </p:cNvCxnSpPr>
+          <p:nvPr/>
+        </p:nvCxnSpPr>
+        <p:spPr>
+          <a:xfrm flipH="1">
+            <a:off x="6468535" y="3552112"/>
+            <a:ext cx="589716" cy="1003257"/>
+          </a:xfrm>
+          <a:prstGeom prst="straightConnector1">
+            <a:avLst/>
+          </a:prstGeom>
+          <a:ln w="38100">
+            <a:tailEnd type="triangle"/>
+          </a:ln>
+        </p:spPr>
+        <p:style>
+          <a:lnRef idx="3">
+            <a:schemeClr val="accent2"/>
+          </a:lnRef>
+          <a:fillRef idx="0">
+            <a:schemeClr val="accent2"/>
+          </a:fillRef>
+          <a:effectRef idx="2">
+            <a:schemeClr val="accent2"/>
+          </a:effectRef>
+          <a:fontRef idx="minor">
+            <a:schemeClr val="tx1"/>
+          </a:fontRef>
+        </p:style>
+      </p:cxnSp>
+      <p:cxnSp>
+        <p:nvCxnSpPr>
+          <p:cNvPr id="272" name="Conector recto de flecha 271">
+            <a:extLst>
+              <a:ext uri="{FF2B5EF4-FFF2-40B4-BE49-F238E27FC236}">
+                <a16:creationId xmlns:a16="http://schemas.microsoft.com/office/drawing/2014/main" id="{F29CBB1B-AE51-2C9F-EB40-8D1D8F41D2CF}"/>
+              </a:ext>
+            </a:extLst>
+          </p:cNvPr>
+          <p:cNvCxnSpPr>
+            <a:cxnSpLocks/>
+          </p:cNvCxnSpPr>
+          <p:nvPr/>
+        </p:nvCxnSpPr>
+        <p:spPr>
+          <a:xfrm>
+            <a:off x="3326751" y="3489338"/>
+            <a:ext cx="792140" cy="1110971"/>
+          </a:xfrm>
+          <a:prstGeom prst="straightConnector1">
+            <a:avLst/>
+          </a:prstGeom>
+          <a:ln w="38100">
+            <a:tailEnd type="triangle"/>
+          </a:ln>
+        </p:spPr>
+        <p:style>
+          <a:lnRef idx="3">
+            <a:schemeClr val="accent2"/>
+          </a:lnRef>
+          <a:fillRef idx="0">
+            <a:schemeClr val="accent2"/>
+          </a:fillRef>
+          <a:effectRef idx="2">
+            <a:schemeClr val="accent2"/>
+          </a:effectRef>
+          <a:fontRef idx="minor">
+            <a:schemeClr val="tx1"/>
+          </a:fontRef>
+        </p:style>
+      </p:cxnSp>
+      <p:cxnSp>
+        <p:nvCxnSpPr>
+          <p:cNvPr id="275" name="Conector recto de flecha 274">
+            <a:extLst>
+              <a:ext uri="{FF2B5EF4-FFF2-40B4-BE49-F238E27FC236}">
+                <a16:creationId xmlns:a16="http://schemas.microsoft.com/office/drawing/2014/main" id="{25D25104-5060-C7D4-0447-6F7EB796A81E}"/>
+              </a:ext>
+            </a:extLst>
+          </p:cNvPr>
+          <p:cNvCxnSpPr>
+            <a:cxnSpLocks/>
+          </p:cNvCxnSpPr>
+          <p:nvPr/>
+        </p:nvCxnSpPr>
+        <p:spPr>
+          <a:xfrm flipV="1">
+            <a:off x="3440251" y="2377703"/>
+            <a:ext cx="1404787" cy="730595"/>
+          </a:xfrm>
+          <a:prstGeom prst="straightConnector1">
+            <a:avLst/>
+          </a:prstGeom>
+          <a:ln w="38100">
+            <a:tailEnd type="triangle"/>
+          </a:ln>
+        </p:spPr>
+        <p:style>
+          <a:lnRef idx="3">
+            <a:schemeClr val="accent2"/>
+          </a:lnRef>
+          <a:fillRef idx="0">
+            <a:schemeClr val="accent2"/>
+          </a:fillRef>
+          <a:effectRef idx="2">
+            <a:schemeClr val="accent2"/>
+          </a:effectRef>
+          <a:fontRef idx="minor">
+            <a:schemeClr val="tx1"/>
+          </a:fontRef>
+        </p:style>
+      </p:cxnSp>
+      <p:grpSp>
+        <p:nvGrpSpPr>
+          <p:cNvPr id="278" name="Grupo 277">
+            <a:extLst>
+              <a:ext uri="{FF2B5EF4-FFF2-40B4-BE49-F238E27FC236}">
+                <a16:creationId xmlns:a16="http://schemas.microsoft.com/office/drawing/2014/main" id="{39429C8E-0586-C4C6-8FBD-9197EEDCB69D}"/>
+              </a:ext>
+            </a:extLst>
+          </p:cNvPr>
+          <p:cNvGrpSpPr/>
+          <p:nvPr/>
+        </p:nvGrpSpPr>
+        <p:grpSpPr>
+          <a:xfrm rot="9011756">
+            <a:off x="4540831" y="4301365"/>
+            <a:ext cx="518548" cy="108931"/>
+            <a:chOff x="7777424" y="2883875"/>
+            <a:chExt cx="593258" cy="137455"/>
+          </a:xfrm>
+        </p:grpSpPr>
+        <p:sp>
+          <p:nvSpPr>
+            <p:cNvPr id="279" name="Flecha: cheurón 278">
+              <a:extLst>
+                <a:ext uri="{FF2B5EF4-FFF2-40B4-BE49-F238E27FC236}">
+                  <a16:creationId xmlns:a16="http://schemas.microsoft.com/office/drawing/2014/main" id="{65621BFA-FD5C-48B4-6D14-1639C23D5DB4}"/>
+                </a:ext>
+              </a:extLst>
+            </p:cNvPr>
+            <p:cNvSpPr/>
+            <p:nvPr/>
+          </p:nvSpPr>
+          <p:spPr>
+            <a:xfrm>
+              <a:off x="7777424" y="2883877"/>
+              <a:ext cx="200923" cy="137453"/>
+            </a:xfrm>
+            <a:prstGeom prst="chevron">
+              <a:avLst/>
+            </a:prstGeom>
+          </p:spPr>
+          <p:style>
+            <a:lnRef idx="0">
+              <a:schemeClr val="accent1"/>
+            </a:lnRef>
+            <a:fillRef idx="3">
+              <a:schemeClr val="accent1"/>
+            </a:fillRef>
+            <a:effectRef idx="3">
+              <a:schemeClr val="accent1"/>
+            </a:effectRef>
+            <a:fontRef idx="minor">
+              <a:schemeClr val="lt1"/>
+            </a:fontRef>
+          </p:style>
+          <p:txBody>
+            <a:bodyPr rtlCol="0" anchor="ctr"/>
+            <a:lstStyle/>
+            <a:p>
+              <a:pPr algn="ctr"/>
+              <a:endParaRPr lang="es-CO">
+                <a:solidFill>
+                  <a:schemeClr val="tx1"/>
+                </a:solidFill>
+              </a:endParaRPr>
+            </a:p>
+          </p:txBody>
+        </p:sp>
+        <p:sp>
+          <p:nvSpPr>
+            <p:cNvPr id="280" name="Flecha: cheurón 279">
+              <a:extLst>
+                <a:ext uri="{FF2B5EF4-FFF2-40B4-BE49-F238E27FC236}">
+                  <a16:creationId xmlns:a16="http://schemas.microsoft.com/office/drawing/2014/main" id="{AA77B463-ABD4-E81B-FEFC-41720D91F922}"/>
+                </a:ext>
+              </a:extLst>
+            </p:cNvPr>
+            <p:cNvSpPr/>
+            <p:nvPr/>
+          </p:nvSpPr>
+          <p:spPr>
+            <a:xfrm>
+              <a:off x="7968836" y="2883876"/>
+              <a:ext cx="200923" cy="137453"/>
+            </a:xfrm>
+            <a:prstGeom prst="chevron">
+              <a:avLst/>
+            </a:prstGeom>
+          </p:spPr>
+          <p:style>
+            <a:lnRef idx="0">
+              <a:schemeClr val="accent1"/>
+            </a:lnRef>
+            <a:fillRef idx="3">
+              <a:schemeClr val="accent1"/>
+            </a:fillRef>
+            <a:effectRef idx="3">
+              <a:schemeClr val="accent1"/>
+            </a:effectRef>
+            <a:fontRef idx="minor">
+              <a:schemeClr val="lt1"/>
+            </a:fontRef>
+          </p:style>
+          <p:txBody>
+            <a:bodyPr rtlCol="0" anchor="ctr"/>
+            <a:lstStyle/>
+            <a:p>
+              <a:pPr algn="ctr"/>
+              <a:endParaRPr lang="es-CO" dirty="0">
+                <a:solidFill>
+                  <a:schemeClr val="tx1"/>
+                </a:solidFill>
+              </a:endParaRPr>
+            </a:p>
+          </p:txBody>
+        </p:sp>
+        <p:sp>
+          <p:nvSpPr>
+            <p:cNvPr id="281" name="Flecha: cheurón 280">
+              <a:extLst>
+                <a:ext uri="{FF2B5EF4-FFF2-40B4-BE49-F238E27FC236}">
+                  <a16:creationId xmlns:a16="http://schemas.microsoft.com/office/drawing/2014/main" id="{7CD5C606-FCF1-E47C-FE60-86A4A5A834AF}"/>
+                </a:ext>
+              </a:extLst>
+            </p:cNvPr>
+            <p:cNvSpPr/>
+            <p:nvPr/>
+          </p:nvSpPr>
+          <p:spPr>
+            <a:xfrm>
+              <a:off x="8169759" y="2883875"/>
+              <a:ext cx="200923" cy="137453"/>
+            </a:xfrm>
+            <a:prstGeom prst="chevron">
+              <a:avLst/>
+            </a:prstGeom>
+          </p:spPr>
+          <p:style>
+            <a:lnRef idx="0">
+              <a:schemeClr val="accent1"/>
+            </a:lnRef>
+            <a:fillRef idx="3">
+              <a:schemeClr val="accent1"/>
+            </a:fillRef>
+            <a:effectRef idx="3">
+              <a:schemeClr val="accent1"/>
+            </a:effectRef>
+            <a:fontRef idx="minor">
+              <a:schemeClr val="lt1"/>
+            </a:fontRef>
+          </p:style>
+          <p:txBody>
+            <a:bodyPr rtlCol="0" anchor="ctr"/>
+            <a:lstStyle/>
+            <a:p>
+              <a:pPr algn="ctr"/>
+              <a:endParaRPr lang="es-CO">
+                <a:solidFill>
+                  <a:schemeClr val="tx1"/>
+                </a:solidFill>
+              </a:endParaRPr>
+            </a:p>
+          </p:txBody>
+        </p:sp>
+      </p:grpSp>
+      <p:grpSp>
+        <p:nvGrpSpPr>
+          <p:cNvPr id="282" name="Grupo 281">
+            <a:extLst>
+              <a:ext uri="{FF2B5EF4-FFF2-40B4-BE49-F238E27FC236}">
+                <a16:creationId xmlns:a16="http://schemas.microsoft.com/office/drawing/2014/main" id="{5414C166-3896-EDBB-EF08-95F19F50B5F9}"/>
+              </a:ext>
+            </a:extLst>
+          </p:cNvPr>
+          <p:cNvGrpSpPr/>
+          <p:nvPr/>
+        </p:nvGrpSpPr>
+        <p:grpSpPr>
+          <a:xfrm rot="8942499">
+            <a:off x="6184551" y="3422926"/>
+            <a:ext cx="518548" cy="108931"/>
+            <a:chOff x="7777424" y="2883875"/>
+            <a:chExt cx="593258" cy="137455"/>
+          </a:xfrm>
+        </p:grpSpPr>
+        <p:sp>
+          <p:nvSpPr>
+            <p:cNvPr id="283" name="Flecha: cheurón 282">
+              <a:extLst>
+                <a:ext uri="{FF2B5EF4-FFF2-40B4-BE49-F238E27FC236}">
+                  <a16:creationId xmlns:a16="http://schemas.microsoft.com/office/drawing/2014/main" id="{239C0963-F2D9-81DA-1C91-024A206AAFF6}"/>
+                </a:ext>
+              </a:extLst>
+            </p:cNvPr>
+            <p:cNvSpPr/>
+            <p:nvPr/>
+          </p:nvSpPr>
+          <p:spPr>
+            <a:xfrm>
+              <a:off x="7777424" y="2883877"/>
+              <a:ext cx="200923" cy="137453"/>
+            </a:xfrm>
+            <a:prstGeom prst="chevron">
+              <a:avLst/>
+            </a:prstGeom>
+          </p:spPr>
+          <p:style>
+            <a:lnRef idx="0">
+              <a:schemeClr val="accent1"/>
+            </a:lnRef>
+            <a:fillRef idx="3">
+              <a:schemeClr val="accent1"/>
+            </a:fillRef>
+            <a:effectRef idx="3">
+              <a:schemeClr val="accent1"/>
+            </a:effectRef>
+            <a:fontRef idx="minor">
+              <a:schemeClr val="lt1"/>
+            </a:fontRef>
+          </p:style>
+          <p:txBody>
+            <a:bodyPr rtlCol="0" anchor="ctr"/>
+            <a:lstStyle/>
+            <a:p>
+              <a:pPr algn="ctr"/>
+              <a:endParaRPr lang="es-CO">
+                <a:solidFill>
+                  <a:schemeClr val="tx1"/>
+                </a:solidFill>
+              </a:endParaRPr>
+            </a:p>
+          </p:txBody>
+        </p:sp>
+        <p:sp>
+          <p:nvSpPr>
+            <p:cNvPr id="284" name="Flecha: cheurón 283">
+              <a:extLst>
+                <a:ext uri="{FF2B5EF4-FFF2-40B4-BE49-F238E27FC236}">
+                  <a16:creationId xmlns:a16="http://schemas.microsoft.com/office/drawing/2014/main" id="{65D71154-F051-5680-59B8-5F8A27143011}"/>
+                </a:ext>
+              </a:extLst>
+            </p:cNvPr>
+            <p:cNvSpPr/>
+            <p:nvPr/>
+          </p:nvSpPr>
+          <p:spPr>
+            <a:xfrm>
+              <a:off x="7968836" y="2883876"/>
+              <a:ext cx="200923" cy="137453"/>
+            </a:xfrm>
+            <a:prstGeom prst="chevron">
+              <a:avLst/>
+            </a:prstGeom>
+          </p:spPr>
+          <p:style>
+            <a:lnRef idx="0">
+              <a:schemeClr val="accent1"/>
+            </a:lnRef>
+            <a:fillRef idx="3">
+              <a:schemeClr val="accent1"/>
+            </a:fillRef>
+            <a:effectRef idx="3">
+              <a:schemeClr val="accent1"/>
+            </a:effectRef>
+            <a:fontRef idx="minor">
+              <a:schemeClr val="lt1"/>
+            </a:fontRef>
+          </p:style>
+          <p:txBody>
+            <a:bodyPr rtlCol="0" anchor="ctr"/>
+            <a:lstStyle/>
+            <a:p>
+              <a:pPr algn="ctr"/>
+              <a:endParaRPr lang="es-CO" dirty="0">
+                <a:solidFill>
+                  <a:schemeClr val="tx1"/>
+                </a:solidFill>
+              </a:endParaRPr>
+            </a:p>
+          </p:txBody>
+        </p:sp>
+        <p:sp>
+          <p:nvSpPr>
+            <p:cNvPr id="285" name="Flecha: cheurón 284">
+              <a:extLst>
+                <a:ext uri="{FF2B5EF4-FFF2-40B4-BE49-F238E27FC236}">
+                  <a16:creationId xmlns:a16="http://schemas.microsoft.com/office/drawing/2014/main" id="{35FE7F01-C420-2EE5-007E-E1B7B60136AF}"/>
+                </a:ext>
+              </a:extLst>
+            </p:cNvPr>
+            <p:cNvSpPr/>
+            <p:nvPr/>
+          </p:nvSpPr>
+          <p:spPr>
+            <a:xfrm>
+              <a:off x="8169759" y="2883875"/>
+              <a:ext cx="200923" cy="137453"/>
+            </a:xfrm>
+            <a:prstGeom prst="chevron">
+              <a:avLst/>
+            </a:prstGeom>
+          </p:spPr>
+          <p:style>
+            <a:lnRef idx="0">
+              <a:schemeClr val="accent1"/>
+            </a:lnRef>
+            <a:fillRef idx="3">
+              <a:schemeClr val="accent1"/>
+            </a:fillRef>
+            <a:effectRef idx="3">
+              <a:schemeClr val="accent1"/>
+            </a:effectRef>
+            <a:fontRef idx="minor">
+              <a:schemeClr val="lt1"/>
+            </a:fontRef>
+          </p:style>
+          <p:txBody>
+            <a:bodyPr rtlCol="0" anchor="ctr"/>
+            <a:lstStyle/>
+            <a:p>
+              <a:pPr algn="ctr"/>
+              <a:endParaRPr lang="es-CO">
+                <a:solidFill>
+                  <a:schemeClr val="tx1"/>
+                </a:solidFill>
+              </a:endParaRPr>
+            </a:p>
+          </p:txBody>
+        </p:sp>
+      </p:grpSp>
+      <p:grpSp>
+        <p:nvGrpSpPr>
+          <p:cNvPr id="286" name="Grupo 285">
+            <a:extLst>
+              <a:ext uri="{FF2B5EF4-FFF2-40B4-BE49-F238E27FC236}">
+                <a16:creationId xmlns:a16="http://schemas.microsoft.com/office/drawing/2014/main" id="{401CB8CE-52F0-0A7C-F12D-28614806868F}"/>
+              </a:ext>
+            </a:extLst>
+          </p:cNvPr>
+          <p:cNvGrpSpPr/>
+          <p:nvPr/>
+        </p:nvGrpSpPr>
+        <p:grpSpPr>
+          <a:xfrm rot="14608653">
+            <a:off x="5193443" y="3105982"/>
+            <a:ext cx="470144" cy="120145"/>
+            <a:chOff x="7777424" y="2883875"/>
+            <a:chExt cx="593258" cy="137455"/>
+          </a:xfrm>
+        </p:grpSpPr>
+        <p:sp>
+          <p:nvSpPr>
+            <p:cNvPr id="287" name="Flecha: cheurón 286">
+              <a:extLst>
+                <a:ext uri="{FF2B5EF4-FFF2-40B4-BE49-F238E27FC236}">
+                  <a16:creationId xmlns:a16="http://schemas.microsoft.com/office/drawing/2014/main" id="{0CC80AA1-7C24-6AED-8A2F-362AE8F17287}"/>
+                </a:ext>
+              </a:extLst>
+            </p:cNvPr>
+            <p:cNvSpPr/>
+            <p:nvPr/>
+          </p:nvSpPr>
+          <p:spPr>
+            <a:xfrm>
+              <a:off x="7777424" y="2883877"/>
+              <a:ext cx="200923" cy="137453"/>
+            </a:xfrm>
+            <a:prstGeom prst="chevron">
+              <a:avLst/>
+            </a:prstGeom>
+          </p:spPr>
+          <p:style>
+            <a:lnRef idx="0">
+              <a:schemeClr val="accent1"/>
+            </a:lnRef>
+            <a:fillRef idx="3">
+              <a:schemeClr val="accent1"/>
+            </a:fillRef>
+            <a:effectRef idx="3">
+              <a:schemeClr val="accent1"/>
+            </a:effectRef>
+            <a:fontRef idx="minor">
+              <a:schemeClr val="lt1"/>
+            </a:fontRef>
+          </p:style>
+          <p:txBody>
+            <a:bodyPr rtlCol="0" anchor="ctr"/>
+            <a:lstStyle/>
+            <a:p>
+              <a:pPr algn="ctr"/>
+              <a:endParaRPr lang="es-CO">
+                <a:solidFill>
+                  <a:schemeClr val="tx1"/>
+                </a:solidFill>
+              </a:endParaRPr>
+            </a:p>
+          </p:txBody>
+        </p:sp>
+        <p:sp>
+          <p:nvSpPr>
+            <p:cNvPr id="288" name="Flecha: cheurón 287">
+              <a:extLst>
+                <a:ext uri="{FF2B5EF4-FFF2-40B4-BE49-F238E27FC236}">
+                  <a16:creationId xmlns:a16="http://schemas.microsoft.com/office/drawing/2014/main" id="{8E9404C0-4BAD-63E7-F09C-13B63961E2F2}"/>
+                </a:ext>
+              </a:extLst>
+            </p:cNvPr>
+            <p:cNvSpPr/>
+            <p:nvPr/>
+          </p:nvSpPr>
+          <p:spPr>
+            <a:xfrm>
+              <a:off x="7968836" y="2883876"/>
+              <a:ext cx="200923" cy="137453"/>
+            </a:xfrm>
+            <a:prstGeom prst="chevron">
+              <a:avLst/>
+            </a:prstGeom>
+          </p:spPr>
+          <p:style>
+            <a:lnRef idx="0">
+              <a:schemeClr val="accent1"/>
+            </a:lnRef>
+            <a:fillRef idx="3">
+              <a:schemeClr val="accent1"/>
+            </a:fillRef>
+            <a:effectRef idx="3">
+              <a:schemeClr val="accent1"/>
+            </a:effectRef>
+            <a:fontRef idx="minor">
+              <a:schemeClr val="lt1"/>
+            </a:fontRef>
+          </p:style>
+          <p:txBody>
+            <a:bodyPr rtlCol="0" anchor="ctr"/>
+            <a:lstStyle/>
+            <a:p>
+              <a:pPr algn="ctr"/>
+              <a:endParaRPr lang="es-CO" dirty="0">
+                <a:solidFill>
+                  <a:schemeClr val="tx1"/>
+                </a:solidFill>
+              </a:endParaRPr>
+            </a:p>
+          </p:txBody>
+        </p:sp>
+        <p:sp>
+          <p:nvSpPr>
+            <p:cNvPr id="289" name="Flecha: cheurón 288">
+              <a:extLst>
+                <a:ext uri="{FF2B5EF4-FFF2-40B4-BE49-F238E27FC236}">
+                  <a16:creationId xmlns:a16="http://schemas.microsoft.com/office/drawing/2014/main" id="{DEE246CB-B50D-CF47-5F7E-29A1BC3611BF}"/>
+                </a:ext>
+              </a:extLst>
+            </p:cNvPr>
+            <p:cNvSpPr/>
+            <p:nvPr/>
+          </p:nvSpPr>
+          <p:spPr>
+            <a:xfrm>
+              <a:off x="8169759" y="2883875"/>
+              <a:ext cx="200923" cy="137453"/>
+            </a:xfrm>
+            <a:prstGeom prst="chevron">
+              <a:avLst/>
+            </a:prstGeom>
+          </p:spPr>
+          <p:style>
+            <a:lnRef idx="0">
+              <a:schemeClr val="accent1"/>
+            </a:lnRef>
+            <a:fillRef idx="3">
+              <a:schemeClr val="accent1"/>
+            </a:fillRef>
+            <a:effectRef idx="3">
+              <a:schemeClr val="accent1"/>
+            </a:effectRef>
+            <a:fontRef idx="minor">
+              <a:schemeClr val="lt1"/>
+            </a:fontRef>
+          </p:style>
+          <p:txBody>
+            <a:bodyPr rtlCol="0" anchor="ctr"/>
+            <a:lstStyle/>
+            <a:p>
+              <a:pPr algn="ctr"/>
+              <a:endParaRPr lang="es-CO">
+                <a:solidFill>
+                  <a:schemeClr val="tx1"/>
+                </a:solidFill>
+              </a:endParaRPr>
+            </a:p>
+          </p:txBody>
+        </p:sp>
+      </p:grpSp>
+      <p:grpSp>
+        <p:nvGrpSpPr>
+          <p:cNvPr id="290" name="Grupo 289">
+            <a:extLst>
+              <a:ext uri="{FF2B5EF4-FFF2-40B4-BE49-F238E27FC236}">
+                <a16:creationId xmlns:a16="http://schemas.microsoft.com/office/drawing/2014/main" id="{B0F90EF3-697D-13D8-06DB-02EF58F05237}"/>
+              </a:ext>
+            </a:extLst>
+          </p:cNvPr>
+          <p:cNvGrpSpPr/>
+          <p:nvPr/>
+        </p:nvGrpSpPr>
+        <p:grpSpPr>
+          <a:xfrm rot="1429383">
+            <a:off x="5886866" y="2822249"/>
+            <a:ext cx="518548" cy="108931"/>
+            <a:chOff x="7777424" y="2883875"/>
+            <a:chExt cx="593258" cy="137455"/>
+          </a:xfrm>
+        </p:grpSpPr>
+        <p:sp>
+          <p:nvSpPr>
+            <p:cNvPr id="291" name="Flecha: cheurón 290">
+              <a:extLst>
+                <a:ext uri="{FF2B5EF4-FFF2-40B4-BE49-F238E27FC236}">
+                  <a16:creationId xmlns:a16="http://schemas.microsoft.com/office/drawing/2014/main" id="{271F3567-FD42-8E5D-18B9-33766D0E83A4}"/>
+                </a:ext>
+              </a:extLst>
+            </p:cNvPr>
+            <p:cNvSpPr/>
+            <p:nvPr/>
+          </p:nvSpPr>
+          <p:spPr>
+            <a:xfrm>
+              <a:off x="7777424" y="2883877"/>
+              <a:ext cx="200923" cy="137453"/>
+            </a:xfrm>
+            <a:prstGeom prst="chevron">
+              <a:avLst/>
+            </a:prstGeom>
+          </p:spPr>
+          <p:style>
+            <a:lnRef idx="0">
+              <a:schemeClr val="accent1"/>
+            </a:lnRef>
+            <a:fillRef idx="3">
+              <a:schemeClr val="accent1"/>
+            </a:fillRef>
+            <a:effectRef idx="3">
+              <a:schemeClr val="accent1"/>
+            </a:effectRef>
+            <a:fontRef idx="minor">
+              <a:schemeClr val="lt1"/>
+            </a:fontRef>
+          </p:style>
+          <p:txBody>
+            <a:bodyPr rtlCol="0" anchor="ctr"/>
+            <a:lstStyle/>
+            <a:p>
+              <a:pPr algn="ctr"/>
+              <a:endParaRPr lang="es-CO">
+                <a:solidFill>
+                  <a:schemeClr val="tx1"/>
+                </a:solidFill>
+              </a:endParaRPr>
+            </a:p>
+          </p:txBody>
+        </p:sp>
+        <p:sp>
+          <p:nvSpPr>
+            <p:cNvPr id="292" name="Flecha: cheurón 291">
+              <a:extLst>
+                <a:ext uri="{FF2B5EF4-FFF2-40B4-BE49-F238E27FC236}">
+                  <a16:creationId xmlns:a16="http://schemas.microsoft.com/office/drawing/2014/main" id="{4D8F9431-09BC-9AA0-8BA3-DDC15360C6F7}"/>
+                </a:ext>
+              </a:extLst>
+            </p:cNvPr>
+            <p:cNvSpPr/>
+            <p:nvPr/>
+          </p:nvSpPr>
+          <p:spPr>
+            <a:xfrm>
+              <a:off x="7968836" y="2883876"/>
+              <a:ext cx="200923" cy="137453"/>
+            </a:xfrm>
+            <a:prstGeom prst="chevron">
+              <a:avLst/>
+            </a:prstGeom>
+          </p:spPr>
+          <p:style>
+            <a:lnRef idx="0">
+              <a:schemeClr val="accent1"/>
+            </a:lnRef>
+            <a:fillRef idx="3">
+              <a:schemeClr val="accent1"/>
+            </a:fillRef>
+            <a:effectRef idx="3">
+              <a:schemeClr val="accent1"/>
+            </a:effectRef>
+            <a:fontRef idx="minor">
+              <a:schemeClr val="lt1"/>
+            </a:fontRef>
+          </p:style>
+          <p:txBody>
+            <a:bodyPr rtlCol="0" anchor="ctr"/>
+            <a:lstStyle/>
+            <a:p>
+              <a:pPr algn="ctr"/>
+              <a:endParaRPr lang="es-CO" dirty="0">
+                <a:solidFill>
+                  <a:schemeClr val="tx1"/>
+                </a:solidFill>
+              </a:endParaRPr>
+            </a:p>
+          </p:txBody>
+        </p:sp>
+        <p:sp>
+          <p:nvSpPr>
+            <p:cNvPr id="293" name="Flecha: cheurón 292">
+              <a:extLst>
+                <a:ext uri="{FF2B5EF4-FFF2-40B4-BE49-F238E27FC236}">
+                  <a16:creationId xmlns:a16="http://schemas.microsoft.com/office/drawing/2014/main" id="{16912B79-9CF5-CA7A-51BE-0B72DC7F98BC}"/>
+                </a:ext>
+              </a:extLst>
+            </p:cNvPr>
+            <p:cNvSpPr/>
+            <p:nvPr/>
+          </p:nvSpPr>
+          <p:spPr>
+            <a:xfrm>
+              <a:off x="8169759" y="2883875"/>
+              <a:ext cx="200923" cy="137453"/>
+            </a:xfrm>
+            <a:prstGeom prst="chevron">
+              <a:avLst/>
+            </a:prstGeom>
+          </p:spPr>
+          <p:style>
+            <a:lnRef idx="0">
+              <a:schemeClr val="accent1"/>
+            </a:lnRef>
+            <a:fillRef idx="3">
+              <a:schemeClr val="accent1"/>
+            </a:fillRef>
+            <a:effectRef idx="3">
+              <a:schemeClr val="accent1"/>
+            </a:effectRef>
+            <a:fontRef idx="minor">
+              <a:schemeClr val="lt1"/>
+            </a:fontRef>
+          </p:style>
+          <p:txBody>
+            <a:bodyPr rtlCol="0" anchor="ctr"/>
+            <a:lstStyle/>
+            <a:p>
+              <a:pPr algn="ctr"/>
+              <a:endParaRPr lang="es-CO">
+                <a:solidFill>
+                  <a:schemeClr val="tx1"/>
+                </a:solidFill>
+              </a:endParaRPr>
+            </a:p>
+          </p:txBody>
+        </p:sp>
+      </p:grpSp>
+    </p:spTree>
+    <p:extLst>
+      <p:ext uri="{BB962C8B-B14F-4D97-AF65-F5344CB8AC3E}">
+        <p14:creationId xmlns:p14="http://schemas.microsoft.com/office/powerpoint/2010/main" val="4102175269"/>
+      </p:ext>
+    </p:extLst>
+  </p:cSld>
+  <p:clrMapOvr>
+    <a:masterClrMapping/>
+  </p:clrMapOvr>
+</p:sld>
+</file>
+
+<file path=ppt/slides/slide3.xml><?xml version="1.0" encoding="utf-8"?>
+<p:sld xmlns:a="http://schemas.openxmlformats.org/drawingml/2006/main" xmlns:r="http://schemas.openxmlformats.org/officeDocument/2006/relationships" xmlns:p="http://schemas.openxmlformats.org/presentationml/2006/main">
+  <p:cSld>
+    <p:spTree>
+      <p:nvGrpSpPr>
+        <p:cNvPr id="1" name=""/>
+        <p:cNvGrpSpPr/>
+        <p:nvPr/>
+      </p:nvGrpSpPr>
+      <p:grpSpPr>
+        <a:xfrm>
+          <a:off x="0" y="0"/>
+          <a:ext cx="0" cy="0"/>
+          <a:chOff x="0" y="0"/>
+          <a:chExt cx="0" cy="0"/>
+        </a:xfrm>
+      </p:grpSpPr>
+      <p:pic>
+        <p:nvPicPr>
+          <p:cNvPr id="7" name="Imagen 6">
+            <a:extLst>
+              <a:ext uri="{FF2B5EF4-FFF2-40B4-BE49-F238E27FC236}">
+                <a16:creationId xmlns:a16="http://schemas.microsoft.com/office/drawing/2014/main" id="{DA5C12B6-13AC-1647-A144-1F13B547C095}"/>
+              </a:ext>
+            </a:extLst>
+          </p:cNvPr>
+          <p:cNvPicPr>
+            <a:picLocks noChangeAspect="1"/>
+          </p:cNvPicPr>
+          <p:nvPr/>
+        </p:nvPicPr>
+        <p:blipFill>
+          <a:blip r:embed="rId2"/>
+          <a:stretch>
+            <a:fillRect/>
+          </a:stretch>
+        </p:blipFill>
+        <p:spPr>
+          <a:xfrm>
+            <a:off x="2694000" y="0"/>
+            <a:ext cx="6804000" cy="6858000"/>
+          </a:xfrm>
+          <a:prstGeom prst="rect">
+            <a:avLst/>
+          </a:prstGeom>
+        </p:spPr>
+      </p:pic>
+    </p:spTree>
+    <p:extLst>
+      <p:ext uri="{BB962C8B-B14F-4D97-AF65-F5344CB8AC3E}">
+        <p14:creationId xmlns:p14="http://schemas.microsoft.com/office/powerpoint/2010/main" val="1853868027"/>
       </p:ext>
     </p:extLst>
   </p:cSld>
